--- a/docs/SIH2026_ChainIDVault_IdeaPPT.pptx
+++ b/docs/SIH2026_ChainIDVault_IdeaPPT.pptx
@@ -5555,7 +5555,7 @@
               <a:buNone/>
             </a:pPr>
             <a:r>
-              <a:rPr sz="3000" b="1">
+              <a:rPr sz="2800" b="1">
                 <a:solidFill>
                   <a:srgbClr val="1F3064"/>
                 </a:solidFill>
@@ -5572,13 +5572,14 @@
             </a:endParaRPr>
           </a:p>
           <a:p>
-            <a:pPr algn="l">
+            <a:pPr algn="l" indent="0" marL="0">
               <a:spcAft>
                 <a:spcPts val="200"/>
               </a:spcAft>
-            </a:pPr>
-            <a:r>
-              <a:rPr sz="1700" b="0">
+              <a:buNone/>
+            </a:pPr>
+            <a:r>
+              <a:rPr sz="1500" b="0">
                 <a:solidFill>
                   <a:srgbClr val="000000"/>
                 </a:solidFill>
@@ -5649,13 +5650,14 @@
           </a:bodyPr>
           <a:lstStyle/>
           <a:p>
-            <a:pPr>
-              <a:spcAft>
-                <a:spcPts val="1000"/>
-              </a:spcAft>
-            </a:pPr>
-            <a:r>
-              <a:rPr sz="1700" b="1">
+            <a:pPr indent="0" marL="0">
+              <a:spcAft>
+                <a:spcPts val="900"/>
+              </a:spcAft>
+              <a:buNone/>
+            </a:pPr>
+            <a:r>
+              <a:rPr sz="1600" b="1">
                 <a:solidFill>
                   <a:srgbClr val="000000"/>
                 </a:solidFill>
@@ -5664,7 +5666,7 @@
               <a:t>Problem Statement ID – </a:t>
             </a:r>
             <a:r>
-              <a:rPr sz="1700" b="0">
+              <a:rPr sz="1600">
                 <a:solidFill>
                   <a:srgbClr val="000000"/>
                 </a:solidFill>
@@ -5675,13 +5677,14 @@
             <a:endParaRPr lang="en-US" dirty="0"/>
           </a:p>
           <a:p>
-            <a:pPr>
-              <a:spcAft>
-                <a:spcPts val="1000"/>
-              </a:spcAft>
-            </a:pPr>
-            <a:r>
-              <a:rPr sz="1700" b="1">
+            <a:pPr indent="0" marL="0">
+              <a:spcAft>
+                <a:spcPts val="900"/>
+              </a:spcAft>
+              <a:buNone/>
+            </a:pPr>
+            <a:r>
+              <a:rPr sz="1600" b="1">
                 <a:solidFill>
                   <a:srgbClr val="000000"/>
                 </a:solidFill>
@@ -5690,7 +5693,7 @@
               <a:t>Problem Statement Title – </a:t>
             </a:r>
             <a:r>
-              <a:rPr sz="1700" b="0">
+              <a:rPr sz="1600">
                 <a:solidFill>
                   <a:srgbClr val="000000"/>
                 </a:solidFill>
@@ -5700,13 +5703,14 @@
             </a:r>
           </a:p>
           <a:p>
-            <a:pPr>
-              <a:spcAft>
-                <a:spcPts val="1000"/>
-              </a:spcAft>
-            </a:pPr>
-            <a:r>
-              <a:rPr sz="1700" b="1">
+            <a:pPr indent="0" marL="0">
+              <a:spcAft>
+                <a:spcPts val="900"/>
+              </a:spcAft>
+              <a:buNone/>
+            </a:pPr>
+            <a:r>
+              <a:rPr sz="1600" b="1">
                 <a:solidFill>
                   <a:srgbClr val="000000"/>
                 </a:solidFill>
@@ -5715,7 +5719,7 @@
               <a:t>Theme – </a:t>
             </a:r>
             <a:r>
-              <a:rPr sz="1700" b="0">
+              <a:rPr sz="1600">
                 <a:solidFill>
                   <a:srgbClr val="000000"/>
                 </a:solidFill>
@@ -5725,13 +5729,14 @@
             </a:r>
           </a:p>
           <a:p>
-            <a:pPr>
-              <a:spcAft>
-                <a:spcPts val="1000"/>
-              </a:spcAft>
-            </a:pPr>
-            <a:r>
-              <a:rPr sz="1700" b="1">
+            <a:pPr indent="0" marL="0">
+              <a:spcAft>
+                <a:spcPts val="900"/>
+              </a:spcAft>
+              <a:buNone/>
+            </a:pPr>
+            <a:r>
+              <a:rPr sz="1600" b="1">
                 <a:solidFill>
                   <a:srgbClr val="000000"/>
                 </a:solidFill>
@@ -5740,7 +5745,7 @@
               <a:t>PS Category – </a:t>
             </a:r>
             <a:r>
-              <a:rPr sz="1700" b="0">
+              <a:rPr sz="1600">
                 <a:solidFill>
                   <a:srgbClr val="000000"/>
                 </a:solidFill>
@@ -5750,13 +5755,14 @@
             </a:r>
           </a:p>
           <a:p>
-            <a:pPr>
-              <a:spcAft>
-                <a:spcPts val="1000"/>
-              </a:spcAft>
-            </a:pPr>
-            <a:r>
-              <a:rPr sz="1700" b="1">
+            <a:pPr indent="0" marL="0">
+              <a:spcAft>
+                <a:spcPts val="900"/>
+              </a:spcAft>
+              <a:buNone/>
+            </a:pPr>
+            <a:r>
+              <a:rPr sz="1600" b="1">
                 <a:solidFill>
                   <a:srgbClr val="000000"/>
                 </a:solidFill>
@@ -5765,7 +5771,7 @@
               <a:t>Team ID – </a:t>
             </a:r>
             <a:r>
-              <a:rPr sz="1700" b="0">
+              <a:rPr sz="1600">
                 <a:solidFill>
                   <a:srgbClr val="000000"/>
                 </a:solidFill>
@@ -5775,13 +5781,14 @@
             </a:r>
           </a:p>
           <a:p>
-            <a:pPr>
-              <a:spcAft>
-                <a:spcPts val="1000"/>
-              </a:spcAft>
-            </a:pPr>
-            <a:r>
-              <a:rPr sz="1700" b="1">
+            <a:pPr indent="0" marL="0">
+              <a:spcAft>
+                <a:spcPts val="900"/>
+              </a:spcAft>
+              <a:buNone/>
+            </a:pPr>
+            <a:r>
+              <a:rPr sz="1600" b="1">
                 <a:solidFill>
                   <a:srgbClr val="000000"/>
                 </a:solidFill>
@@ -5790,7 +5797,7 @@
               <a:t>Team Name (Registered on portal) – </a:t>
             </a:r>
             <a:r>
-              <a:rPr sz="1700" b="0">
+              <a:rPr sz="1600">
                 <a:solidFill>
                   <a:srgbClr val="000000"/>
                 </a:solidFill>
@@ -5963,8 +5970,8 @@
         </p:nvSpPr>
         <p:spPr bwMode="auto">
           <a:xfrm>
-            <a:off x="430000" y="1150000"/>
-            <a:ext cx="9250000" cy="5100000"/>
+            <a:off x="502920" y="1051560"/>
+            <a:ext cx="5532120" cy="4709160"/>
           </a:xfrm>
           <a:prstGeom prst="rect">
             <a:avLst/>
@@ -5984,6 +5991,9 @@
           <a:lstStyle/>
           <a:p>
             <a:pPr marL="0" indent="0" algn="l">
+              <a:lnSpc>
+                <a:spcPct val="115000"/>
+              </a:lnSpc>
               <a:spcAft>
                 <a:spcPts val="200"/>
               </a:spcAft>
@@ -5991,13 +6001,13 @@
               <a:buNone/>
             </a:pPr>
             <a:r>
-              <a:rPr sz="1600" b="1">
+              <a:rPr sz="1300" b="1">
                 <a:solidFill>
                   <a:srgbClr val="1F3064"/>
                 </a:solidFill>
                 <a:latin typeface="Times New Roman"/>
               </a:rPr>
-              <a:t>ChainID Vault — enforcement of identity, access and asset custody inside smart contracts, not inside an editable database.</a:t>
+              <a:t>ChainID Vault — identity, access and asset custody enforced inside smart contracts, not inside an editable database.</a:t>
             </a:r>
             <a:endParaRPr lang="en-US" sz="3200" u="sng" dirty="0">
               <a:solidFill>
@@ -6008,182 +6018,217 @@
             </a:endParaRPr>
           </a:p>
           <a:p>
-            <a:pPr algn="l">
-              <a:spcBef>
-                <a:spcPts val="1000"/>
-              </a:spcBef>
-              <a:spcAft>
-                <a:spcPts val="200"/>
-              </a:spcAft>
-            </a:pPr>
-            <a:r>
-              <a:rPr sz="1600" b="1">
-                <a:solidFill>
-                  <a:srgbClr val="000000"/>
-                </a:solidFill>
-                <a:latin typeface="Times New Roman"/>
-              </a:rPr>
-              <a:t>Proposed Solution (Describe your Idea/Solution/Prototype)</a:t>
-            </a:r>
-          </a:p>
-          <a:p>
-            <a:pPr algn="l">
-              <a:spcAft>
-                <a:spcPts val="200"/>
-              </a:spcAft>
-            </a:pPr>
-            <a:r>
-              <a:rPr sz="1350" b="0">
-                <a:solidFill>
-                  <a:srgbClr val="000000"/>
-                </a:solidFill>
-                <a:latin typeface="Times New Roman"/>
-              </a:rPr>
-              <a:t>•  Permissioned blockchain platform where every identity, role grant and asset-custody record is on-chain.</a:t>
-            </a:r>
-          </a:p>
-          <a:p>
-            <a:pPr algn="l">
-              <a:spcAft>
-                <a:spcPts val="200"/>
-              </a:spcAft>
-            </a:pPr>
-            <a:r>
-              <a:rPr sz="1350" b="0">
-                <a:solidFill>
-                  <a:srgbClr val="000000"/>
-                </a:solidFill>
-                <a:latin typeface="Times New Roman"/>
-              </a:rPr>
-              <a:t>•  Identity = cryptographic keypair + lifecycle status (Active / Suspended / Revoked) + hash of an off-chain personnel record.</a:t>
-            </a:r>
-          </a:p>
-          <a:p>
-            <a:pPr algn="l">
-              <a:spcAft>
-                <a:spcPts val="200"/>
-              </a:spcAft>
-            </a:pPr>
-            <a:r>
-              <a:rPr sz="1350" b="0">
-                <a:solidFill>
-                  <a:srgbClr val="000000"/>
-                </a:solidFill>
-                <a:latin typeface="Times New Roman"/>
-              </a:rPr>
-              <a:t>•  Asset = ERC-721 token representing one controlled item, bound to a verified identity.</a:t>
-            </a:r>
-          </a:p>
-          <a:p>
-            <a:pPr algn="l">
-              <a:spcAft>
-                <a:spcPts val="200"/>
-              </a:spcAft>
-            </a:pPr>
-            <a:r>
-              <a:rPr sz="1350" b="0">
-                <a:solidFill>
-                  <a:srgbClr val="000000"/>
-                </a:solidFill>
-                <a:latin typeface="Times New Roman"/>
-              </a:rPr>
-              <a:t>•  Sensitive documents stay off-chain; only their keccak256 fingerprint is anchored, so nothing private is published.</a:t>
-            </a:r>
-          </a:p>
-          <a:p>
-            <a:pPr algn="l">
+            <a:pPr algn="l" indent="0" marL="0">
               <a:spcBef>
                 <a:spcPts val="800"/>
               </a:spcBef>
               <a:spcAft>
                 <a:spcPts val="200"/>
               </a:spcAft>
-            </a:pPr>
-            <a:r>
-              <a:rPr sz="1600" b="1">
+              <a:buNone/>
+            </a:pPr>
+            <a:r>
+              <a:rPr sz="1300" b="1">
                 <a:solidFill>
                   <a:srgbClr val="000000"/>
                 </a:solidFill>
                 <a:latin typeface="Times New Roman"/>
               </a:rPr>
+              <a:t>Proposed Solution (Describe your Idea/Solution/Prototype)</a:t>
+            </a:r>
+          </a:p>
+          <a:p>
+            <a:pPr algn="l" indent="0" marL="0">
+              <a:lnSpc>
+                <a:spcPct val="110000"/>
+              </a:lnSpc>
+              <a:spcAft>
+                <a:spcPts val="200"/>
+              </a:spcAft>
+              <a:buNone/>
+            </a:pPr>
+            <a:r>
+              <a:rPr sz="1100" b="0">
+                <a:solidFill>
+                  <a:srgbClr val="000000"/>
+                </a:solidFill>
+                <a:latin typeface="Times New Roman"/>
+              </a:rPr>
+              <a:t>•  Every identity, role grant and custody record is written on a permissioned blockchain.</a:t>
+            </a:r>
+          </a:p>
+          <a:p>
+            <a:pPr algn="l" indent="0" marL="0">
+              <a:lnSpc>
+                <a:spcPct val="110000"/>
+              </a:lnSpc>
+              <a:spcAft>
+                <a:spcPts val="200"/>
+              </a:spcAft>
+              <a:buNone/>
+            </a:pPr>
+            <a:r>
+              <a:rPr sz="1100" b="0">
+                <a:solidFill>
+                  <a:srgbClr val="000000"/>
+                </a:solidFill>
+                <a:latin typeface="Times New Roman"/>
+              </a:rPr>
+              <a:t>•  Identity = keypair + lifecycle status (Active / Suspended / Revoked) + hash of an off-chain record.</a:t>
+            </a:r>
+          </a:p>
+          <a:p>
+            <a:pPr algn="l" indent="0" marL="0">
+              <a:lnSpc>
+                <a:spcPct val="110000"/>
+              </a:lnSpc>
+              <a:spcAft>
+                <a:spcPts val="200"/>
+              </a:spcAft>
+              <a:buNone/>
+            </a:pPr>
+            <a:r>
+              <a:rPr sz="1100" b="0">
+                <a:solidFill>
+                  <a:srgbClr val="000000"/>
+                </a:solidFill>
+                <a:latin typeface="Times New Roman"/>
+              </a:rPr>
+              <a:t>•  Asset = ERC-721 token for one controlled item, bound to a verified identity.</a:t>
+            </a:r>
+          </a:p>
+          <a:p>
+            <a:pPr algn="l" indent="0" marL="0">
+              <a:lnSpc>
+                <a:spcPct val="110000"/>
+              </a:lnSpc>
+              <a:spcAft>
+                <a:spcPts val="200"/>
+              </a:spcAft>
+              <a:buNone/>
+            </a:pPr>
+            <a:r>
+              <a:rPr sz="1100" b="0">
+                <a:solidFill>
+                  <a:srgbClr val="000000"/>
+                </a:solidFill>
+                <a:latin typeface="Times New Roman"/>
+              </a:rPr>
+              <a:t>•  Sensitive documents stay off-chain; only a keccak256 fingerprint is anchored.</a:t>
+            </a:r>
+          </a:p>
+          <a:p>
+            <a:pPr algn="l" indent="0" marL="0">
+              <a:spcBef>
+                <a:spcPts val="700"/>
+              </a:spcBef>
+              <a:spcAft>
+                <a:spcPts val="200"/>
+              </a:spcAft>
+              <a:buNone/>
+            </a:pPr>
+            <a:r>
+              <a:rPr sz="1300" b="1">
+                <a:solidFill>
+                  <a:srgbClr val="000000"/>
+                </a:solidFill>
+                <a:latin typeface="Times New Roman"/>
+              </a:rPr>
               <a:t>How it addresses the problem</a:t>
             </a:r>
           </a:p>
           <a:p>
-            <a:pPr algn="l">
+            <a:pPr algn="l" indent="0" marL="0">
+              <a:lnSpc>
+                <a:spcPct val="110000"/>
+              </a:lnSpc>
               <a:spcAft>
                 <a:spcPts val="200"/>
               </a:spcAft>
-            </a:pPr>
-            <a:r>
-              <a:rPr sz="1350" b="0">
+              <a:buNone/>
+            </a:pPr>
+            <a:r>
+              <a:rPr sz="1100" b="0">
                 <a:solidFill>
                   <a:srgbClr val="000000"/>
                 </a:solidFill>
                 <a:latin typeface="Times New Roman"/>
               </a:rPr>
-              <a:t>•  No central database to compromise — there is no editable row for a role, an owner or a log entry.</a:t>
-            </a:r>
-          </a:p>
-          <a:p>
-            <a:pPr algn="l">
+              <a:t>•  No database row exists for a role, an owner or a log entry, so none can be edited.</a:t>
+            </a:r>
+          </a:p>
+          <a:p>
+            <a:pPr algn="l" indent="0" marL="0">
+              <a:lnSpc>
+                <a:spcPct val="110000"/>
+              </a:lnSpc>
               <a:spcAft>
                 <a:spcPts val="200"/>
               </a:spcAft>
-            </a:pPr>
-            <a:r>
-              <a:rPr sz="1350" b="0">
+              <a:buNone/>
+            </a:pPr>
+            <a:r>
+              <a:rPr sz="1100" b="0">
                 <a:solidFill>
                   <a:srgbClr val="000000"/>
                 </a:solidFill>
                 <a:latin typeface="Times New Roman"/>
               </a:rPr>
-              <a:t>•  A revoked identity cannot receive an asset by any route; the rule is enforced at one chokepoint every transfer passes through.</a:t>
-            </a:r>
-          </a:p>
-          <a:p>
-            <a:pPr algn="l">
+              <a:t>•  A revoked identity cannot receive an asset by any route — one enforcement chokepoint.</a:t>
+            </a:r>
+          </a:p>
+          <a:p>
+            <a:pPr algn="l" indent="0" marL="0">
+              <a:lnSpc>
+                <a:spcPct val="110000"/>
+              </a:lnSpc>
               <a:spcAft>
                 <a:spcPts val="200"/>
               </a:spcAft>
-            </a:pPr>
-            <a:r>
-              <a:rPr sz="1350" b="0">
+              <a:buNone/>
+            </a:pPr>
+            <a:r>
+              <a:rPr sz="1100" b="0">
                 <a:solidFill>
                   <a:srgbClr val="000000"/>
                 </a:solidFill>
                 <a:latin typeface="Times New Roman"/>
               </a:rPr>
-              <a:t>•  The audit trail is the chain's own append-only event log, so it cannot be edited or selectively deleted.</a:t>
-            </a:r>
-          </a:p>
-          <a:p>
-            <a:pPr algn="l">
+              <a:t>•  The audit trail is the chain's append-only event log; it cannot be selectively deleted.</a:t>
+            </a:r>
+          </a:p>
+          <a:p>
+            <a:pPr algn="l" indent="0" marL="0">
+              <a:lnSpc>
+                <a:spcPct val="110000"/>
+              </a:lnSpc>
               <a:spcAft>
                 <a:spcPts val="200"/>
               </a:spcAft>
-            </a:pPr>
-            <a:r>
-              <a:rPr sz="1350" b="0">
+              <a:buNone/>
+            </a:pPr>
+            <a:r>
+              <a:rPr sz="1100" b="0">
                 <a:solidFill>
                   <a:srgbClr val="000000"/>
                 </a:solidFill>
                 <a:latin typeface="Times New Roman"/>
               </a:rPr>
-              <a:t>•  Any third party can verify an asset without an account and without trusting our operator.</a:t>
-            </a:r>
-          </a:p>
-          <a:p>
-            <a:pPr algn="l">
+              <a:t>•  Any third party verifies an asset with no account and no trust in the operator.</a:t>
+            </a:r>
+          </a:p>
+          <a:p>
+            <a:pPr algn="l" indent="0" marL="0">
               <a:spcBef>
-                <a:spcPts val="800"/>
+                <a:spcPts val="700"/>
               </a:spcBef>
               <a:spcAft>
                 <a:spcPts val="200"/>
               </a:spcAft>
-            </a:pPr>
-            <a:r>
-              <a:rPr sz="1600" b="1">
+              <a:buNone/>
+            </a:pPr>
+            <a:r>
+              <a:rPr sz="1300" b="1">
                 <a:solidFill>
                   <a:srgbClr val="000000"/>
                 </a:solidFill>
@@ -6193,67 +6238,63 @@
             </a:r>
           </a:p>
           <a:p>
-            <a:pPr algn="l">
+            <a:pPr algn="l" indent="0" marL="0">
+              <a:lnSpc>
+                <a:spcPct val="110000"/>
+              </a:lnSpc>
               <a:spcAft>
                 <a:spcPts val="200"/>
               </a:spcAft>
-            </a:pPr>
-            <a:r>
-              <a:rPr sz="1350" b="0">
+              <a:buNone/>
+            </a:pPr>
+            <a:r>
+              <a:rPr sz="1100" b="0">
                 <a:solidFill>
                   <a:srgbClr val="000000"/>
                 </a:solidFill>
                 <a:latin typeface="Times New Roman"/>
               </a:rPr>
-              <a:t>•  Single-chokepoint enforcement closes the standard ERC-721 transfer bypass that similar implementations leave open.</a:t>
-            </a:r>
-          </a:p>
-          <a:p>
-            <a:pPr algn="l">
+              <a:t>•  Single-chokepoint enforcement closes the ERC-721 transfer bypass most implementations leave open.</a:t>
+            </a:r>
+          </a:p>
+          <a:p>
+            <a:pPr algn="l" indent="0" marL="0">
+              <a:lnSpc>
+                <a:spcPct val="110000"/>
+              </a:lnSpc>
               <a:spcAft>
                 <a:spcPts val="200"/>
               </a:spcAft>
-            </a:pPr>
-            <a:r>
-              <a:rPr sz="1350" b="0">
+              <a:buNone/>
+            </a:pPr>
+            <a:r>
+              <a:rPr sz="1100" b="0">
                 <a:solidFill>
                   <a:srgbClr val="000000"/>
                 </a:solidFill>
                 <a:latin typeface="Times New Roman"/>
               </a:rPr>
-              <a:t>•  EIP-712 proof of control: single-use, time-bound and domain-separated, so a captured signature cannot be replayed.</a:t>
-            </a:r>
-          </a:p>
-          <a:p>
-            <a:pPr algn="l">
+              <a:t>•  EIP-712 proof of control: single-use, time-bound, domain-separated — replay-proof.</a:t>
+            </a:r>
+          </a:p>
+          <a:p>
+            <a:pPr algn="l" indent="0" marL="0">
+              <a:lnSpc>
+                <a:spcPct val="110000"/>
+              </a:lnSpc>
               <a:spcAft>
                 <a:spcPts val="200"/>
               </a:spcAft>
-            </a:pPr>
-            <a:r>
-              <a:rPr sz="1350" b="0">
+              <a:buNone/>
+            </a:pPr>
+            <a:r>
+              <a:rPr sz="1100" b="0">
                 <a:solidFill>
                   <a:srgbClr val="000000"/>
                 </a:solidFill>
                 <a:latin typeface="Times New Roman"/>
               </a:rPr>
-              <a:t>•  Hybrid design keeps personal data off-chain while retaining tamper-evidence through hash anchoring.</a:t>
-            </a:r>
-          </a:p>
-          <a:p>
-            <a:pPr algn="l">
-              <a:spcAft>
-                <a:spcPts val="200"/>
-              </a:spcAft>
-            </a:pPr>
-            <a:r>
-              <a:rPr sz="1350" b="0">
-                <a:solidFill>
-                  <a:srgbClr val="000000"/>
-                </a:solidFill>
-                <a:latin typeface="Times New Roman"/>
-              </a:rPr>
-              <a:t>•  Even the administrator who created an identity cannot override the rules — demonstrated live, not claimed.</a:t>
+              <a:t>•  Even the administrator who created an identity cannot override the rules.</a:t>
             </a:r>
           </a:p>
         </p:txBody>
@@ -6378,7 +6419,7 @@
               <a:buNone/>
             </a:pPr>
             <a:r>
-              <a:rPr sz="1100" b="1">
+              <a:rPr sz="1000" b="1">
                 <a:solidFill>
                   <a:srgbClr val="1F3064"/>
                 </a:solidFill>
@@ -6420,6 +6461,994 @@
           </a:prstGeom>
         </p:spPr>
       </p:pic>
+      <p:sp>
+        <p:nvSpPr>
+          <p:cNvPr id="15363" name="TextBox 15362"/>
+          <p:cNvSpPr txBox="1"/>
+          <p:nvPr/>
+        </p:nvSpPr>
+        <p:spPr>
+          <a:xfrm>
+            <a:off x="6355080" y="1051560"/>
+            <a:ext cx="5257800" cy="201168"/>
+          </a:xfrm>
+          <a:prstGeom prst="rect">
+            <a:avLst/>
+          </a:prstGeom>
+          <a:noFill/>
+        </p:spPr>
+        <p:txBody>
+          <a:bodyPr wrap="square" anchor="t" lIns="0" rIns="0" tIns="0" bIns="0">
+            <a:spAutoFit/>
+          </a:bodyPr>
+          <a:lstStyle/>
+          <a:p>
+            <a:pPr algn="l">
+              <a:spcAft>
+                <a:spcPts val="100"/>
+              </a:spcAft>
+            </a:pPr>
+            <a:r>
+              <a:rPr sz="1000" b="1">
+                <a:solidFill>
+                  <a:srgbClr val="1F3064"/>
+                </a:solidFill>
+                <a:latin typeface="Times New Roman"/>
+              </a:rPr>
+              <a:t>THE THREE GOVERNED ENTITIES</a:t>
+            </a:r>
+          </a:p>
+        </p:txBody>
+      </p:sp>
+      <p:sp>
+        <p:nvSpPr>
+          <p:cNvPr id="15364" name="Rectangle 15363"/>
+          <p:cNvSpPr/>
+          <p:nvPr/>
+        </p:nvSpPr>
+        <p:spPr>
+          <a:xfrm>
+            <a:off x="6355080" y="1325880"/>
+            <a:ext cx="5257800" cy="749808"/>
+          </a:xfrm>
+          <a:prstGeom prst="rect">
+            <a:avLst/>
+          </a:prstGeom>
+          <a:solidFill>
+            <a:srgbClr val="FFFFFF"/>
+          </a:solidFill>
+          <a:ln w="9525">
+            <a:solidFill>
+              <a:srgbClr val="1F3064"/>
+            </a:solidFill>
+          </a:ln>
+          <a:effectLst/>
+        </p:spPr>
+        <p:style>
+          <a:lnRef idx="1">
+            <a:schemeClr val="accent1"/>
+          </a:lnRef>
+          <a:fillRef idx="3">
+            <a:schemeClr val="accent1"/>
+          </a:fillRef>
+          <a:effectRef idx="2">
+            <a:schemeClr val="accent1"/>
+          </a:effectRef>
+          <a:fontRef idx="minor">
+            <a:schemeClr val="lt1"/>
+          </a:fontRef>
+        </p:style>
+        <p:txBody>
+          <a:bodyPr rtlCol="0" anchor="ctr"/>
+          <a:lstStyle/>
+          <a:p>
+            <a:pPr algn="ctr"/>
+          </a:p>
+        </p:txBody>
+      </p:sp>
+      <p:sp>
+        <p:nvSpPr>
+          <p:cNvPr id="15365" name="Rectangle 15364"/>
+          <p:cNvSpPr/>
+          <p:nvPr/>
+        </p:nvSpPr>
+        <p:spPr>
+          <a:xfrm>
+            <a:off x="6355080" y="1325880"/>
+            <a:ext cx="82296" cy="749808"/>
+          </a:xfrm>
+          <a:prstGeom prst="rect">
+            <a:avLst/>
+          </a:prstGeom>
+          <a:solidFill>
+            <a:srgbClr val="1F3064"/>
+          </a:solidFill>
+          <a:ln>
+            <a:noFill/>
+          </a:ln>
+          <a:effectLst/>
+        </p:spPr>
+        <p:style>
+          <a:lnRef idx="1">
+            <a:schemeClr val="accent1"/>
+          </a:lnRef>
+          <a:fillRef idx="3">
+            <a:schemeClr val="accent1"/>
+          </a:fillRef>
+          <a:effectRef idx="2">
+            <a:schemeClr val="accent1"/>
+          </a:effectRef>
+          <a:fontRef idx="minor">
+            <a:schemeClr val="lt1"/>
+          </a:fontRef>
+        </p:style>
+        <p:txBody>
+          <a:bodyPr rtlCol="0" anchor="ctr"/>
+          <a:lstStyle/>
+          <a:p>
+            <a:pPr algn="ctr"/>
+          </a:p>
+        </p:txBody>
+      </p:sp>
+      <p:sp>
+        <p:nvSpPr>
+          <p:cNvPr id="15366" name="TextBox 15365"/>
+          <p:cNvSpPr txBox="1"/>
+          <p:nvPr/>
+        </p:nvSpPr>
+        <p:spPr>
+          <a:xfrm>
+            <a:off x="6583680" y="1426464"/>
+            <a:ext cx="4892040" cy="201168"/>
+          </a:xfrm>
+          <a:prstGeom prst="rect">
+            <a:avLst/>
+          </a:prstGeom>
+          <a:noFill/>
+        </p:spPr>
+        <p:txBody>
+          <a:bodyPr wrap="square" anchor="t" lIns="0" rIns="0" tIns="0" bIns="0">
+            <a:spAutoFit/>
+          </a:bodyPr>
+          <a:lstStyle/>
+          <a:p>
+            <a:pPr algn="l">
+              <a:spcAft>
+                <a:spcPts val="100"/>
+              </a:spcAft>
+            </a:pPr>
+            <a:r>
+              <a:rPr sz="1200" b="1">
+                <a:solidFill>
+                  <a:srgbClr val="1F3064"/>
+                </a:solidFill>
+                <a:latin typeface="Times New Roman"/>
+              </a:rPr>
+              <a:t>IDENTITY</a:t>
+            </a:r>
+          </a:p>
+        </p:txBody>
+      </p:sp>
+      <p:sp>
+        <p:nvSpPr>
+          <p:cNvPr id="15367" name="TextBox 15366"/>
+          <p:cNvSpPr txBox="1"/>
+          <p:nvPr/>
+        </p:nvSpPr>
+        <p:spPr>
+          <a:xfrm>
+            <a:off x="6583680" y="1655064"/>
+            <a:ext cx="4892040" cy="384048"/>
+          </a:xfrm>
+          <a:prstGeom prst="rect">
+            <a:avLst/>
+          </a:prstGeom>
+          <a:noFill/>
+        </p:spPr>
+        <p:txBody>
+          <a:bodyPr wrap="square" anchor="t" lIns="0" rIns="0" tIns="0" bIns="0">
+            <a:spAutoFit/>
+          </a:bodyPr>
+          <a:lstStyle/>
+          <a:p>
+            <a:pPr algn="l">
+              <a:lnSpc>
+                <a:spcPct val="112000"/>
+              </a:lnSpc>
+              <a:spcAft>
+                <a:spcPts val="100"/>
+              </a:spcAft>
+            </a:pPr>
+            <a:r>
+              <a:rPr sz="1050" b="0">
+                <a:solidFill>
+                  <a:srgbClr val="5A5751"/>
+                </a:solidFill>
+                <a:latin typeface="Times New Roman"/>
+              </a:rPr>
+              <a:t>Recognised keypair</a:t>
+            </a:r>
+          </a:p>
+          <a:p>
+            <a:pPr algn="l">
+              <a:lnSpc>
+                <a:spcPct val="112000"/>
+              </a:lnSpc>
+              <a:spcAft>
+                <a:spcPts val="100"/>
+              </a:spcAft>
+            </a:pPr>
+            <a:r>
+              <a:rPr sz="1050" b="0">
+                <a:solidFill>
+                  <a:srgbClr val="5A5751"/>
+                </a:solidFill>
+                <a:latin typeface="Times New Roman"/>
+              </a:rPr>
+              <a:t>Active / Suspended / Revoked</a:t>
+            </a:r>
+          </a:p>
+        </p:txBody>
+      </p:sp>
+      <p:sp>
+        <p:nvSpPr>
+          <p:cNvPr id="15368" name="Rectangle 15367"/>
+          <p:cNvSpPr/>
+          <p:nvPr/>
+        </p:nvSpPr>
+        <p:spPr>
+          <a:xfrm>
+            <a:off x="6355080" y="2194560"/>
+            <a:ext cx="5257800" cy="749808"/>
+          </a:xfrm>
+          <a:prstGeom prst="rect">
+            <a:avLst/>
+          </a:prstGeom>
+          <a:solidFill>
+            <a:srgbClr val="FFFFFF"/>
+          </a:solidFill>
+          <a:ln w="9525">
+            <a:solidFill>
+              <a:srgbClr val="1E6B3A"/>
+            </a:solidFill>
+          </a:ln>
+          <a:effectLst/>
+        </p:spPr>
+        <p:style>
+          <a:lnRef idx="1">
+            <a:schemeClr val="accent1"/>
+          </a:lnRef>
+          <a:fillRef idx="3">
+            <a:schemeClr val="accent1"/>
+          </a:fillRef>
+          <a:effectRef idx="2">
+            <a:schemeClr val="accent1"/>
+          </a:effectRef>
+          <a:fontRef idx="minor">
+            <a:schemeClr val="lt1"/>
+          </a:fontRef>
+        </p:style>
+        <p:txBody>
+          <a:bodyPr rtlCol="0" anchor="ctr"/>
+          <a:lstStyle/>
+          <a:p>
+            <a:pPr algn="ctr"/>
+          </a:p>
+        </p:txBody>
+      </p:sp>
+      <p:sp>
+        <p:nvSpPr>
+          <p:cNvPr id="15369" name="Rectangle 15368"/>
+          <p:cNvSpPr/>
+          <p:nvPr/>
+        </p:nvSpPr>
+        <p:spPr>
+          <a:xfrm>
+            <a:off x="6355080" y="2194560"/>
+            <a:ext cx="82296" cy="749808"/>
+          </a:xfrm>
+          <a:prstGeom prst="rect">
+            <a:avLst/>
+          </a:prstGeom>
+          <a:solidFill>
+            <a:srgbClr val="1E6B3A"/>
+          </a:solidFill>
+          <a:ln>
+            <a:noFill/>
+          </a:ln>
+          <a:effectLst/>
+        </p:spPr>
+        <p:style>
+          <a:lnRef idx="1">
+            <a:schemeClr val="accent1"/>
+          </a:lnRef>
+          <a:fillRef idx="3">
+            <a:schemeClr val="accent1"/>
+          </a:fillRef>
+          <a:effectRef idx="2">
+            <a:schemeClr val="accent1"/>
+          </a:effectRef>
+          <a:fontRef idx="minor">
+            <a:schemeClr val="lt1"/>
+          </a:fontRef>
+        </p:style>
+        <p:txBody>
+          <a:bodyPr rtlCol="0" anchor="ctr"/>
+          <a:lstStyle/>
+          <a:p>
+            <a:pPr algn="ctr"/>
+          </a:p>
+        </p:txBody>
+      </p:sp>
+      <p:sp>
+        <p:nvSpPr>
+          <p:cNvPr id="15370" name="TextBox 15369"/>
+          <p:cNvSpPr txBox="1"/>
+          <p:nvPr/>
+        </p:nvSpPr>
+        <p:spPr>
+          <a:xfrm>
+            <a:off x="6583680" y="2295144"/>
+            <a:ext cx="4892040" cy="201168"/>
+          </a:xfrm>
+          <a:prstGeom prst="rect">
+            <a:avLst/>
+          </a:prstGeom>
+          <a:noFill/>
+        </p:spPr>
+        <p:txBody>
+          <a:bodyPr wrap="square" anchor="t" lIns="0" rIns="0" tIns="0" bIns="0">
+            <a:spAutoFit/>
+          </a:bodyPr>
+          <a:lstStyle/>
+          <a:p>
+            <a:pPr algn="l">
+              <a:spcAft>
+                <a:spcPts val="100"/>
+              </a:spcAft>
+            </a:pPr>
+            <a:r>
+              <a:rPr sz="1200" b="1">
+                <a:solidFill>
+                  <a:srgbClr val="1E6B3A"/>
+                </a:solidFill>
+                <a:latin typeface="Times New Roman"/>
+              </a:rPr>
+              <a:t>ASSET</a:t>
+            </a:r>
+          </a:p>
+        </p:txBody>
+      </p:sp>
+      <p:sp>
+        <p:nvSpPr>
+          <p:cNvPr id="15371" name="TextBox 15370"/>
+          <p:cNvSpPr txBox="1"/>
+          <p:nvPr/>
+        </p:nvSpPr>
+        <p:spPr>
+          <a:xfrm>
+            <a:off x="6583680" y="2523744"/>
+            <a:ext cx="4892040" cy="384048"/>
+          </a:xfrm>
+          <a:prstGeom prst="rect">
+            <a:avLst/>
+          </a:prstGeom>
+          <a:noFill/>
+        </p:spPr>
+        <p:txBody>
+          <a:bodyPr wrap="square" anchor="t" lIns="0" rIns="0" tIns="0" bIns="0">
+            <a:spAutoFit/>
+          </a:bodyPr>
+          <a:lstStyle/>
+          <a:p>
+            <a:pPr algn="l">
+              <a:lnSpc>
+                <a:spcPct val="112000"/>
+              </a:lnSpc>
+              <a:spcAft>
+                <a:spcPts val="100"/>
+              </a:spcAft>
+            </a:pPr>
+            <a:r>
+              <a:rPr sz="1050" b="0">
+                <a:solidFill>
+                  <a:srgbClr val="5A5751"/>
+                </a:solidFill>
+                <a:latin typeface="Times New Roman"/>
+              </a:rPr>
+              <a:t>ERC-721 token for one</a:t>
+            </a:r>
+          </a:p>
+          <a:p>
+            <a:pPr algn="l">
+              <a:lnSpc>
+                <a:spcPct val="112000"/>
+              </a:lnSpc>
+              <a:spcAft>
+                <a:spcPts val="100"/>
+              </a:spcAft>
+            </a:pPr>
+            <a:r>
+              <a:rPr sz="1050" b="0">
+                <a:solidFill>
+                  <a:srgbClr val="5A5751"/>
+                </a:solidFill>
+                <a:latin typeface="Times New Roman"/>
+              </a:rPr>
+              <a:t>controlled physical item</a:t>
+            </a:r>
+          </a:p>
+        </p:txBody>
+      </p:sp>
+      <p:sp>
+        <p:nvSpPr>
+          <p:cNvPr id="15372" name="Rectangle 15371"/>
+          <p:cNvSpPr/>
+          <p:nvPr/>
+        </p:nvSpPr>
+        <p:spPr>
+          <a:xfrm>
+            <a:off x="6355080" y="3063239"/>
+            <a:ext cx="5257800" cy="749808"/>
+          </a:xfrm>
+          <a:prstGeom prst="rect">
+            <a:avLst/>
+          </a:prstGeom>
+          <a:solidFill>
+            <a:srgbClr val="FFFFFF"/>
+          </a:solidFill>
+          <a:ln w="9525">
+            <a:solidFill>
+              <a:srgbClr val="B45309"/>
+            </a:solidFill>
+          </a:ln>
+          <a:effectLst/>
+        </p:spPr>
+        <p:style>
+          <a:lnRef idx="1">
+            <a:schemeClr val="accent1"/>
+          </a:lnRef>
+          <a:fillRef idx="3">
+            <a:schemeClr val="accent1"/>
+          </a:fillRef>
+          <a:effectRef idx="2">
+            <a:schemeClr val="accent1"/>
+          </a:effectRef>
+          <a:fontRef idx="minor">
+            <a:schemeClr val="lt1"/>
+          </a:fontRef>
+        </p:style>
+        <p:txBody>
+          <a:bodyPr rtlCol="0" anchor="ctr"/>
+          <a:lstStyle/>
+          <a:p>
+            <a:pPr algn="ctr"/>
+          </a:p>
+        </p:txBody>
+      </p:sp>
+      <p:sp>
+        <p:nvSpPr>
+          <p:cNvPr id="15373" name="Rectangle 15372"/>
+          <p:cNvSpPr/>
+          <p:nvPr/>
+        </p:nvSpPr>
+        <p:spPr>
+          <a:xfrm>
+            <a:off x="6355080" y="3063239"/>
+            <a:ext cx="82296" cy="749808"/>
+          </a:xfrm>
+          <a:prstGeom prst="rect">
+            <a:avLst/>
+          </a:prstGeom>
+          <a:solidFill>
+            <a:srgbClr val="B45309"/>
+          </a:solidFill>
+          <a:ln>
+            <a:noFill/>
+          </a:ln>
+          <a:effectLst/>
+        </p:spPr>
+        <p:style>
+          <a:lnRef idx="1">
+            <a:schemeClr val="accent1"/>
+          </a:lnRef>
+          <a:fillRef idx="3">
+            <a:schemeClr val="accent1"/>
+          </a:fillRef>
+          <a:effectRef idx="2">
+            <a:schemeClr val="accent1"/>
+          </a:effectRef>
+          <a:fontRef idx="minor">
+            <a:schemeClr val="lt1"/>
+          </a:fontRef>
+        </p:style>
+        <p:txBody>
+          <a:bodyPr rtlCol="0" anchor="ctr"/>
+          <a:lstStyle/>
+          <a:p>
+            <a:pPr algn="ctr"/>
+          </a:p>
+        </p:txBody>
+      </p:sp>
+      <p:sp>
+        <p:nvSpPr>
+          <p:cNvPr id="15374" name="TextBox 15373"/>
+          <p:cNvSpPr txBox="1"/>
+          <p:nvPr/>
+        </p:nvSpPr>
+        <p:spPr>
+          <a:xfrm>
+            <a:off x="6583680" y="3163823"/>
+            <a:ext cx="4892040" cy="201168"/>
+          </a:xfrm>
+          <a:prstGeom prst="rect">
+            <a:avLst/>
+          </a:prstGeom>
+          <a:noFill/>
+        </p:spPr>
+        <p:txBody>
+          <a:bodyPr wrap="square" anchor="t" lIns="0" rIns="0" tIns="0" bIns="0">
+            <a:spAutoFit/>
+          </a:bodyPr>
+          <a:lstStyle/>
+          <a:p>
+            <a:pPr algn="l">
+              <a:spcAft>
+                <a:spcPts val="100"/>
+              </a:spcAft>
+            </a:pPr>
+            <a:r>
+              <a:rPr sz="1200" b="1">
+                <a:solidFill>
+                  <a:srgbClr val="B45309"/>
+                </a:solidFill>
+                <a:latin typeface="Times New Roman"/>
+              </a:rPr>
+              <a:t>ROLE</a:t>
+            </a:r>
+          </a:p>
+        </p:txBody>
+      </p:sp>
+      <p:sp>
+        <p:nvSpPr>
+          <p:cNvPr id="15375" name="TextBox 15374"/>
+          <p:cNvSpPr txBox="1"/>
+          <p:nvPr/>
+        </p:nvSpPr>
+        <p:spPr>
+          <a:xfrm>
+            <a:off x="6583680" y="3392423"/>
+            <a:ext cx="4892040" cy="384048"/>
+          </a:xfrm>
+          <a:prstGeom prst="rect">
+            <a:avLst/>
+          </a:prstGeom>
+          <a:noFill/>
+        </p:spPr>
+        <p:txBody>
+          <a:bodyPr wrap="square" anchor="t" lIns="0" rIns="0" tIns="0" bIns="0">
+            <a:spAutoFit/>
+          </a:bodyPr>
+          <a:lstStyle/>
+          <a:p>
+            <a:pPr algn="l">
+              <a:lnSpc>
+                <a:spcPct val="112000"/>
+              </a:lnSpc>
+              <a:spcAft>
+                <a:spcPts val="100"/>
+              </a:spcAft>
+            </a:pPr>
+            <a:r>
+              <a:rPr sz="1050" b="0">
+                <a:solidFill>
+                  <a:srgbClr val="5A5751"/>
+                </a:solidFill>
+                <a:latin typeface="Times New Roman"/>
+              </a:rPr>
+              <a:t>Admin · Manager</a:t>
+            </a:r>
+          </a:p>
+          <a:p>
+            <a:pPr algn="l">
+              <a:lnSpc>
+                <a:spcPct val="112000"/>
+              </a:lnSpc>
+              <a:spcAft>
+                <a:spcPts val="100"/>
+              </a:spcAft>
+            </a:pPr>
+            <a:r>
+              <a:rPr sz="1050" b="0">
+                <a:solidFill>
+                  <a:srgbClr val="5A5751"/>
+                </a:solidFill>
+                <a:latin typeface="Times New Roman"/>
+              </a:rPr>
+              <a:t>Auditor · User</a:t>
+            </a:r>
+          </a:p>
+        </p:txBody>
+      </p:sp>
+      <p:sp>
+        <p:nvSpPr>
+          <p:cNvPr id="15376" name="Down Arrow 15375"/>
+          <p:cNvSpPr/>
+          <p:nvPr/>
+        </p:nvSpPr>
+        <p:spPr>
+          <a:xfrm>
+            <a:off x="8892540" y="1837943"/>
+            <a:ext cx="182880" cy="82296"/>
+          </a:xfrm>
+          <a:prstGeom prst="downArrow">
+            <a:avLst/>
+          </a:prstGeom>
+          <a:solidFill>
+            <a:srgbClr val="1F3064"/>
+          </a:solidFill>
+          <a:ln>
+            <a:noFill/>
+          </a:ln>
+          <a:effectLst/>
+        </p:spPr>
+        <p:style>
+          <a:lnRef idx="1">
+            <a:schemeClr val="accent1"/>
+          </a:lnRef>
+          <a:fillRef idx="3">
+            <a:schemeClr val="accent1"/>
+          </a:fillRef>
+          <a:effectRef idx="2">
+            <a:schemeClr val="accent1"/>
+          </a:effectRef>
+          <a:fontRef idx="minor">
+            <a:schemeClr val="lt1"/>
+          </a:fontRef>
+        </p:style>
+        <p:txBody>
+          <a:bodyPr rtlCol="0" anchor="ctr"/>
+          <a:lstStyle/>
+          <a:p>
+            <a:pPr algn="ctr"/>
+          </a:p>
+        </p:txBody>
+      </p:sp>
+      <p:sp>
+        <p:nvSpPr>
+          <p:cNvPr id="15377" name="Down Arrow 15376"/>
+          <p:cNvSpPr/>
+          <p:nvPr/>
+        </p:nvSpPr>
+        <p:spPr>
+          <a:xfrm>
+            <a:off x="8892540" y="2706624"/>
+            <a:ext cx="182880" cy="82296"/>
+          </a:xfrm>
+          <a:prstGeom prst="downArrow">
+            <a:avLst/>
+          </a:prstGeom>
+          <a:solidFill>
+            <a:srgbClr val="1F3064"/>
+          </a:solidFill>
+          <a:ln>
+            <a:noFill/>
+          </a:ln>
+          <a:effectLst/>
+        </p:spPr>
+        <p:style>
+          <a:lnRef idx="1">
+            <a:schemeClr val="accent1"/>
+          </a:lnRef>
+          <a:fillRef idx="3">
+            <a:schemeClr val="accent1"/>
+          </a:fillRef>
+          <a:effectRef idx="2">
+            <a:schemeClr val="accent1"/>
+          </a:effectRef>
+          <a:fontRef idx="minor">
+            <a:schemeClr val="lt1"/>
+          </a:fontRef>
+        </p:style>
+        <p:txBody>
+          <a:bodyPr rtlCol="0" anchor="ctr"/>
+          <a:lstStyle/>
+          <a:p>
+            <a:pPr algn="ctr"/>
+          </a:p>
+        </p:txBody>
+      </p:sp>
+      <p:sp>
+        <p:nvSpPr>
+          <p:cNvPr id="15378" name="Rectangle 15377"/>
+          <p:cNvSpPr/>
+          <p:nvPr/>
+        </p:nvSpPr>
+        <p:spPr>
+          <a:xfrm>
+            <a:off x="6355080" y="3977639"/>
+            <a:ext cx="5257800" cy="1371600"/>
+          </a:xfrm>
+          <a:prstGeom prst="rect">
+            <a:avLst/>
+          </a:prstGeom>
+          <a:solidFill>
+            <a:srgbClr val="F2F2F2"/>
+          </a:solidFill>
+          <a:ln w="9525">
+            <a:solidFill>
+              <a:srgbClr val="BFBFBF"/>
+            </a:solidFill>
+          </a:ln>
+          <a:effectLst/>
+        </p:spPr>
+        <p:style>
+          <a:lnRef idx="1">
+            <a:schemeClr val="accent1"/>
+          </a:lnRef>
+          <a:fillRef idx="3">
+            <a:schemeClr val="accent1"/>
+          </a:fillRef>
+          <a:effectRef idx="2">
+            <a:schemeClr val="accent1"/>
+          </a:effectRef>
+          <a:fontRef idx="minor">
+            <a:schemeClr val="lt1"/>
+          </a:fontRef>
+        </p:style>
+        <p:txBody>
+          <a:bodyPr rtlCol="0" anchor="ctr"/>
+          <a:lstStyle/>
+          <a:p>
+            <a:pPr algn="ctr"/>
+          </a:p>
+        </p:txBody>
+      </p:sp>
+      <p:sp>
+        <p:nvSpPr>
+          <p:cNvPr id="15379" name="TextBox 15378"/>
+          <p:cNvSpPr txBox="1"/>
+          <p:nvPr/>
+        </p:nvSpPr>
+        <p:spPr>
+          <a:xfrm>
+            <a:off x="6556248" y="4133087"/>
+            <a:ext cx="4855464" cy="228600"/>
+          </a:xfrm>
+          <a:prstGeom prst="rect">
+            <a:avLst/>
+          </a:prstGeom>
+          <a:noFill/>
+        </p:spPr>
+        <p:txBody>
+          <a:bodyPr wrap="square" anchor="t" lIns="0" rIns="0" tIns="0" bIns="0">
+            <a:spAutoFit/>
+          </a:bodyPr>
+          <a:lstStyle/>
+          <a:p>
+            <a:pPr algn="l">
+              <a:spcAft>
+                <a:spcPts val="100"/>
+              </a:spcAft>
+            </a:pPr>
+            <a:r>
+              <a:rPr sz="1000" b="1">
+                <a:solidFill>
+                  <a:srgbClr val="1F3064"/>
+                </a:solidFill>
+                <a:latin typeface="Times New Roman"/>
+              </a:rPr>
+              <a:t>THE INVARIANT</a:t>
+            </a:r>
+          </a:p>
+        </p:txBody>
+      </p:sp>
+      <p:sp>
+        <p:nvSpPr>
+          <p:cNvPr id="15380" name="TextBox 15379"/>
+          <p:cNvSpPr txBox="1"/>
+          <p:nvPr/>
+        </p:nvSpPr>
+        <p:spPr>
+          <a:xfrm>
+            <a:off x="6556248" y="4389120"/>
+            <a:ext cx="4855464" cy="822960"/>
+          </a:xfrm>
+          <a:prstGeom prst="rect">
+            <a:avLst/>
+          </a:prstGeom>
+          <a:noFill/>
+        </p:spPr>
+        <p:txBody>
+          <a:bodyPr wrap="square" anchor="t" lIns="0" rIns="0" tIns="0" bIns="0">
+            <a:spAutoFit/>
+          </a:bodyPr>
+          <a:lstStyle/>
+          <a:p>
+            <a:pPr algn="l">
+              <a:lnSpc>
+                <a:spcPct val="118000"/>
+              </a:lnSpc>
+              <a:spcAft>
+                <a:spcPts val="100"/>
+              </a:spcAft>
+            </a:pPr>
+            <a:r>
+              <a:rPr sz="1100" b="0">
+                <a:solidFill>
+                  <a:srgbClr val="000000"/>
+                </a:solidFill>
+                <a:latin typeface="Times New Roman"/>
+              </a:rPr>
+              <a:t>An asset may only ever be held by an</a:t>
+            </a:r>
+          </a:p>
+          <a:p>
+            <a:pPr algn="l">
+              <a:lnSpc>
+                <a:spcPct val="118000"/>
+              </a:lnSpc>
+              <a:spcAft>
+                <a:spcPts val="100"/>
+              </a:spcAft>
+            </a:pPr>
+            <a:r>
+              <a:rPr sz="1100" b="0">
+                <a:solidFill>
+                  <a:srgbClr val="000000"/>
+                </a:solidFill>
+                <a:latin typeface="Times New Roman"/>
+              </a:rPr>
+              <a:t>active identity — enforced in _update, the</a:t>
+            </a:r>
+          </a:p>
+          <a:p>
+            <a:pPr algn="l">
+              <a:lnSpc>
+                <a:spcPct val="118000"/>
+              </a:lnSpc>
+              <a:spcAft>
+                <a:spcPts val="100"/>
+              </a:spcAft>
+            </a:pPr>
+            <a:r>
+              <a:rPr sz="1100" b="0">
+                <a:solidFill>
+                  <a:srgbClr val="000000"/>
+                </a:solidFill>
+                <a:latin typeface="Times New Roman"/>
+              </a:rPr>
+              <a:t>one function every mint, transfer and burn</a:t>
+            </a:r>
+          </a:p>
+          <a:p>
+            <a:pPr algn="l">
+              <a:lnSpc>
+                <a:spcPct val="118000"/>
+              </a:lnSpc>
+              <a:spcAft>
+                <a:spcPts val="100"/>
+              </a:spcAft>
+            </a:pPr>
+            <a:r>
+              <a:rPr sz="1100" b="0">
+                <a:solidFill>
+                  <a:srgbClr val="000000"/>
+                </a:solidFill>
+                <a:latin typeface="Times New Roman"/>
+              </a:rPr>
+              <a:t>passes through.</a:t>
+            </a:r>
+          </a:p>
+        </p:txBody>
+      </p:sp>
+      <p:sp>
+        <p:nvSpPr>
+          <p:cNvPr id="15381" name="Rectangle 15380"/>
+          <p:cNvSpPr/>
+          <p:nvPr/>
+        </p:nvSpPr>
+        <p:spPr>
+          <a:xfrm>
+            <a:off x="6355080" y="5468112"/>
+            <a:ext cx="5257800" cy="658368"/>
+          </a:xfrm>
+          <a:prstGeom prst="rect">
+            <a:avLst/>
+          </a:prstGeom>
+          <a:solidFill>
+            <a:srgbClr val="E8F3EC"/>
+          </a:solidFill>
+          <a:ln w="9525">
+            <a:solidFill>
+              <a:srgbClr val="1E6B3A"/>
+            </a:solidFill>
+          </a:ln>
+          <a:effectLst/>
+        </p:spPr>
+        <p:style>
+          <a:lnRef idx="1">
+            <a:schemeClr val="accent1"/>
+          </a:lnRef>
+          <a:fillRef idx="3">
+            <a:schemeClr val="accent1"/>
+          </a:fillRef>
+          <a:effectRef idx="2">
+            <a:schemeClr val="accent1"/>
+          </a:effectRef>
+          <a:fontRef idx="minor">
+            <a:schemeClr val="lt1"/>
+          </a:fontRef>
+        </p:style>
+        <p:txBody>
+          <a:bodyPr rtlCol="0" anchor="ctr"/>
+          <a:lstStyle/>
+          <a:p>
+            <a:pPr algn="ctr"/>
+          </a:p>
+        </p:txBody>
+      </p:sp>
+      <p:sp>
+        <p:nvSpPr>
+          <p:cNvPr id="15382" name="TextBox 15381"/>
+          <p:cNvSpPr txBox="1"/>
+          <p:nvPr/>
+        </p:nvSpPr>
+        <p:spPr>
+          <a:xfrm>
+            <a:off x="6556248" y="5614416"/>
+            <a:ext cx="4855464" cy="411480"/>
+          </a:xfrm>
+          <a:prstGeom prst="rect">
+            <a:avLst/>
+          </a:prstGeom>
+          <a:noFill/>
+        </p:spPr>
+        <p:txBody>
+          <a:bodyPr wrap="square" anchor="t" lIns="0" rIns="0" tIns="0" bIns="0">
+            <a:spAutoFit/>
+          </a:bodyPr>
+          <a:lstStyle/>
+          <a:p>
+            <a:pPr algn="l">
+              <a:lnSpc>
+                <a:spcPct val="115000"/>
+              </a:lnSpc>
+              <a:spcAft>
+                <a:spcPts val="100"/>
+              </a:spcAft>
+            </a:pPr>
+            <a:r>
+              <a:rPr sz="1050" b="1">
+                <a:solidFill>
+                  <a:srgbClr val="1E6B3A"/>
+                </a:solidFill>
+                <a:latin typeface="Times New Roman"/>
+              </a:rPr>
+              <a:t>Working prototype · 45 automated contract tests passing</a:t>
+            </a:r>
+          </a:p>
+          <a:p>
+            <a:pPr algn="l">
+              <a:lnSpc>
+                <a:spcPct val="115000"/>
+              </a:lnSpc>
+              <a:spcAft>
+                <a:spcPts val="100"/>
+              </a:spcAft>
+            </a:pPr>
+            <a:r>
+              <a:rPr sz="1050" b="1">
+                <a:solidFill>
+                  <a:srgbClr val="1E6B3A"/>
+                </a:solidFill>
+                <a:latin typeface="Times New Roman"/>
+              </a:rPr>
+              <a:t>6 screens · full custody workflow demonstrated live</a:t>
+            </a:r>
+          </a:p>
+        </p:txBody>
+      </p:sp>
     </p:spTree>
   </p:cSld>
   <p:clrMapOvr>
@@ -6546,8 +7575,8 @@
         </p:nvSpPr>
         <p:spPr bwMode="auto">
           <a:xfrm>
-            <a:off x="610000" y="1150000"/>
-            <a:ext cx="9400000" cy="5100000"/>
+            <a:off x="502920" y="1051560"/>
+            <a:ext cx="5532120" cy="4709160"/>
           </a:xfrm>
           <a:prstGeom prst="rect">
             <a:avLst/>
@@ -6574,7 +7603,7 @@
               <a:buNone/>
             </a:pPr>
             <a:r>
-              <a:rPr sz="1600" b="1">
+              <a:rPr sz="1300" b="1">
                 <a:solidFill>
                   <a:srgbClr val="000000"/>
                 </a:solidFill>
@@ -6584,96 +7613,117 @@
             </a:r>
           </a:p>
           <a:p>
-            <a:pPr algn="l">
+            <a:pPr algn="l" indent="0" marL="0">
+              <a:lnSpc>
+                <a:spcPct val="110000"/>
+              </a:lnSpc>
               <a:spcAft>
                 <a:spcPts val="200"/>
               </a:spcAft>
-            </a:pPr>
-            <a:r>
-              <a:rPr sz="1350" b="0">
+              <a:buNone/>
+            </a:pPr>
+            <a:r>
+              <a:rPr sz="1100" b="0">
                 <a:solidFill>
                   <a:srgbClr val="000000"/>
                 </a:solidFill>
                 <a:latin typeface="Times New Roman"/>
               </a:rPr>
-              <a:t>•  Smart contracts: Solidity 0.8.24, OpenZeppelin 5.6 (AccessControl, ERC-721 Enumerable), Hardhat, Mocha/Chai.</a:t>
-            </a:r>
-          </a:p>
-          <a:p>
-            <a:pPr algn="l">
+              <a:t>•  Contracts: Solidity 0.8.24, OpenZeppelin 5.6 (AccessControl, ERC-721 Enumerable), Hardhat.</a:t>
+            </a:r>
+          </a:p>
+          <a:p>
+            <a:pPr algn="l" indent="0" marL="0">
+              <a:lnSpc>
+                <a:spcPct val="110000"/>
+              </a:lnSpc>
               <a:spcAft>
                 <a:spcPts val="200"/>
               </a:spcAft>
-            </a:pPr>
-            <a:r>
-              <a:rPr sz="1350" b="0">
+              <a:buNone/>
+            </a:pPr>
+            <a:r>
+              <a:rPr sz="1100" b="0">
                 <a:solidFill>
                   <a:srgbClr val="000000"/>
                 </a:solidFill>
                 <a:latin typeface="Times New Roman"/>
               </a:rPr>
-              <a:t>•  Frontend: React 18, Vite, Tailwind CSS, ethers.js v6 — the browser calls contracts directly.</a:t>
-            </a:r>
-          </a:p>
-          <a:p>
-            <a:pPr algn="l">
+              <a:t>•  Frontend: React 18, Vite, Tailwind, ethers.js v6 — the browser calls contracts directly.</a:t>
+            </a:r>
+          </a:p>
+          <a:p>
+            <a:pPr algn="l" indent="0" marL="0">
+              <a:lnSpc>
+                <a:spcPct val="110000"/>
+              </a:lnSpc>
               <a:spcAft>
                 <a:spcPts val="200"/>
               </a:spcAft>
-            </a:pPr>
-            <a:r>
-              <a:rPr sz="1350" b="0">
+              <a:buNone/>
+            </a:pPr>
+            <a:r>
+              <a:rPr sz="1100" b="0">
                 <a:solidFill>
                   <a:srgbClr val="000000"/>
                 </a:solidFill>
                 <a:latin typeface="Times New Roman"/>
               </a:rPr>
-              <a:t>•  Cryptography: EIP-712 typed-data signatures for proof of control; keccak256 for document anchoring.</a:t>
-            </a:r>
-          </a:p>
-          <a:p>
-            <a:pPr algn="l">
+              <a:t>•  Cryptography: EIP-712 typed-data signatures; keccak256 document anchoring.</a:t>
+            </a:r>
+          </a:p>
+          <a:p>
+            <a:pPr algn="l" indent="0" marL="0">
+              <a:lnSpc>
+                <a:spcPct val="110000"/>
+              </a:lnSpc>
               <a:spcAft>
                 <a:spcPts val="200"/>
               </a:spcAft>
-            </a:pPr>
-            <a:r>
-              <a:rPr sz="1350" b="0">
+              <a:buNone/>
+            </a:pPr>
+            <a:r>
+              <a:rPr sz="1100" b="0">
                 <a:solidFill>
                   <a:srgbClr val="000000"/>
                 </a:solidFill>
                 <a:latin typeface="Times New Roman"/>
               </a:rPr>
-              <a:t>•  No backend server and no database, by design — a database is the component whose editability the project removes.</a:t>
-            </a:r>
-          </a:p>
-          <a:p>
-            <a:pPr algn="l">
+              <a:t>•  No backend server and no database — deliberately, see the architecture opposite.</a:t>
+            </a:r>
+          </a:p>
+          <a:p>
+            <a:pPr algn="l" indent="0" marL="0">
+              <a:lnSpc>
+                <a:spcPct val="110000"/>
+              </a:lnSpc>
               <a:spcAft>
                 <a:spcPts val="200"/>
               </a:spcAft>
-            </a:pPr>
-            <a:r>
-              <a:rPr sz="1350" b="0">
+              <a:buNone/>
+            </a:pPr>
+            <a:r>
+              <a:rPr sz="1100" b="0">
                 <a:solidFill>
                   <a:srgbClr val="000000"/>
                 </a:solidFill>
                 <a:latin typeface="Times New Roman"/>
               </a:rPr>
-              <a:t>•  Deployment target: permissioned EVM chain (Hyperledger Besu / Quorum). Local node used for demonstration.</a:t>
-            </a:r>
-          </a:p>
-          <a:p>
-            <a:pPr algn="l">
+              <a:t>•  Deployment target: permissioned EVM chain (Hyperledger Besu / Quorum).</a:t>
+            </a:r>
+          </a:p>
+          <a:p>
+            <a:pPr algn="l" indent="0" marL="0">
               <a:spcBef>
-                <a:spcPts val="1000"/>
+                <a:spcPts val="800"/>
               </a:spcBef>
               <a:spcAft>
                 <a:spcPts val="200"/>
               </a:spcAft>
-            </a:pPr>
-            <a:r>
-              <a:rPr sz="1600" b="1">
+              <a:buNone/>
+            </a:pPr>
+            <a:r>
+              <a:rPr sz="1300" b="1">
                 <a:solidFill>
                   <a:srgbClr val="000000"/>
                 </a:solidFill>
@@ -6683,89 +7733,123 @@
             </a:r>
           </a:p>
           <a:p>
-            <a:pPr algn="l">
+            <a:pPr algn="l" indent="0" marL="0">
+              <a:lnSpc>
+                <a:spcPct val="110000"/>
+              </a:lnSpc>
               <a:spcAft>
                 <a:spcPts val="200"/>
               </a:spcAft>
-            </a:pPr>
-            <a:r>
-              <a:rPr sz="1350" b="0">
+              <a:buNone/>
+            </a:pPr>
+            <a:r>
+              <a:rPr sz="1100" b="0">
                 <a:solidFill>
                   <a:srgbClr val="000000"/>
                 </a:solidFill>
                 <a:latin typeface="Times New Roman"/>
               </a:rPr>
-              <a:t>•  Two contracts: IdentityRegistry governs the identity lifecycle and proof of control; AssetNFT governs custody and calls the registry before every issue or transfer.</a:t>
-            </a:r>
-          </a:p>
-          <a:p>
-            <a:pPr algn="l">
+              <a:t>•  Two contracts: IdentityRegistry governs lifecycle and proof of control; AssetNFT governs custody and calls the registry before every movement.</a:t>
+            </a:r>
+          </a:p>
+          <a:p>
+            <a:pPr algn="l" indent="0" marL="0">
+              <a:lnSpc>
+                <a:spcPct val="110000"/>
+              </a:lnSpc>
               <a:spcAft>
                 <a:spcPts val="200"/>
               </a:spcAft>
-            </a:pPr>
-            <a:r>
-              <a:rPr sz="1350" b="0">
+              <a:buNone/>
+            </a:pPr>
+            <a:r>
+              <a:rPr sz="1100" b="0">
                 <a:solidFill>
                   <a:srgbClr val="000000"/>
                 </a:solidFill>
                 <a:latin typeface="Times New Roman"/>
               </a:rPr>
-              <a:t>•  The system invariant — an asset may only be held by an active identity — is enforced inside _update, the one internal function every mint, transfer and burn passes through.</a:t>
-            </a:r>
-          </a:p>
-          <a:p>
-            <a:pPr algn="l">
+              <a:t>•  The full contractor custody pipeline runs live, end to end, in the prototype.</a:t>
+            </a:r>
+          </a:p>
+          <a:p>
+            <a:pPr algn="l" indent="0" marL="0">
+              <a:lnSpc>
+                <a:spcPct val="110000"/>
+              </a:lnSpc>
               <a:spcAft>
                 <a:spcPts val="200"/>
               </a:spcAft>
-            </a:pPr>
-            <a:r>
-              <a:rPr sz="1350" b="0">
+              <a:buNone/>
+            </a:pPr>
+            <a:r>
+              <a:rPr sz="1100" b="0">
                 <a:solidFill>
                   <a:srgbClr val="000000"/>
                 </a:solidFill>
                 <a:latin typeface="Times New Roman"/>
               </a:rPr>
-              <a:t>•  Working prototype implements the full contractor custody pipeline, run live end to end:</a:t>
-            </a:r>
-          </a:p>
-          <a:p>
-            <a:pPr algn="l">
+              <a:t>•  45 tests including negative cases: replay, impersonation, expiry, tampering.</a:t>
+            </a:r>
+          </a:p>
+          <a:p>
+            <a:pPr algn="l" indent="0" marL="0">
               <a:spcBef>
-                <a:spcPts val="400"/>
+                <a:spcPts val="800"/>
               </a:spcBef>
               <a:spcAft>
                 <a:spcPts val="200"/>
               </a:spcAft>
-            </a:pPr>
-            <a:r>
-              <a:rPr sz="1300" b="1">
-                <a:solidFill>
-                  <a:srgbClr val="1F3064"/>
-                </a:solidFill>
-                <a:latin typeface="Times New Roman"/>
-              </a:rPr>
-              <a:t>Onboard  →  Issue equipment  →  Prove identity at the gate  →  Verify item and paperwork  →  Offboard  →  Attempt refused on-chain</a:t>
-            </a:r>
-          </a:p>
-          <a:p>
-            <a:pPr algn="l">
-              <a:spcBef>
-                <a:spcPts val="400"/>
-              </a:spcBef>
+              <a:buNone/>
+            </a:pPr>
+            <a:r>
+              <a:rPr sz="1200" b="1">
+                <a:solidFill>
+                  <a:srgbClr val="A61B1B"/>
+                </a:solidFill>
+                <a:latin typeface="Times New Roman"/>
+              </a:rPr>
+              <a:t>Verified refusals demonstrated on-chain</a:t>
+            </a:r>
+          </a:p>
+          <a:p>
+            <a:pPr algn="l" indent="0" marL="0">
+              <a:lnSpc>
+                <a:spcPct val="110000"/>
+              </a:lnSpc>
               <a:spcAft>
                 <a:spcPts val="200"/>
               </a:spcAft>
-            </a:pPr>
-            <a:r>
-              <a:rPr sz="1250" b="0">
-                <a:solidFill>
-                  <a:srgbClr val="000000"/>
-                </a:solidFill>
-                <a:latin typeface="Times New Roman"/>
-              </a:rPr>
-              <a:t>•  Verification: 45 automated contract tests, including negative tests for replay, impersonation, expiry and tampering.</a:t>
+              <a:buNone/>
+            </a:pPr>
+            <a:r>
+              <a:rPr sz="1100" b="0">
+                <a:solidFill>
+                  <a:srgbClr val="A61B1B"/>
+                </a:solidFill>
+                <a:latin typeface="Times New Roman"/>
+              </a:rPr>
+              <a:t>•  Non-admin cannot issue · non-admin cannot suspend an identity</a:t>
+            </a:r>
+          </a:p>
+          <a:p>
+            <a:pPr algn="l" indent="0" marL="0">
+              <a:lnSpc>
+                <a:spcPct val="110000"/>
+              </a:lnSpc>
+              <a:spcAft>
+                <a:spcPts val="200"/>
+              </a:spcAft>
+              <a:buNone/>
+            </a:pPr>
+            <a:r>
+              <a:rPr sz="1100" b="0">
+                <a:solidFill>
+                  <a:srgbClr val="A61B1B"/>
+                </a:solidFill>
+                <a:latin typeface="Times New Roman"/>
+              </a:rPr>
+              <a:t>•  Suspended identity cannot receive · tampered document fails verification</a:t>
             </a:r>
           </a:p>
         </p:txBody>
@@ -6890,7 +7974,7 @@
               <a:buNone/>
             </a:pPr>
             <a:r>
-              <a:rPr sz="1100" b="1">
+              <a:rPr sz="1000" b="1">
                 <a:solidFill>
                   <a:srgbClr val="1F3064"/>
                 </a:solidFill>
@@ -6932,6 +8016,939 @@
           </a:prstGeom>
         </p:spPr>
       </p:pic>
+      <p:sp>
+        <p:nvSpPr>
+          <p:cNvPr id="17411" name="TextBox 17410"/>
+          <p:cNvSpPr txBox="1"/>
+          <p:nvPr/>
+        </p:nvSpPr>
+        <p:spPr>
+          <a:xfrm>
+            <a:off x="6355080" y="1051560"/>
+            <a:ext cx="5257800" cy="201168"/>
+          </a:xfrm>
+          <a:prstGeom prst="rect">
+            <a:avLst/>
+          </a:prstGeom>
+          <a:noFill/>
+        </p:spPr>
+        <p:txBody>
+          <a:bodyPr wrap="square" anchor="t" lIns="0" rIns="0" tIns="0" bIns="0">
+            <a:spAutoFit/>
+          </a:bodyPr>
+          <a:lstStyle/>
+          <a:p>
+            <a:pPr algn="l">
+              <a:spcAft>
+                <a:spcPts val="100"/>
+              </a:spcAft>
+            </a:pPr>
+            <a:r>
+              <a:rPr sz="1000" b="1">
+                <a:solidFill>
+                  <a:srgbClr val="1F3064"/>
+                </a:solidFill>
+                <a:latin typeface="Times New Roman"/>
+              </a:rPr>
+              <a:t>SYSTEM ARCHITECTURE</a:t>
+            </a:r>
+          </a:p>
+        </p:txBody>
+      </p:sp>
+      <p:sp>
+        <p:nvSpPr>
+          <p:cNvPr id="17412" name="Rectangle 17411"/>
+          <p:cNvSpPr/>
+          <p:nvPr/>
+        </p:nvSpPr>
+        <p:spPr>
+          <a:xfrm>
+            <a:off x="6355080" y="1325880"/>
+            <a:ext cx="5257800" cy="685800"/>
+          </a:xfrm>
+          <a:prstGeom prst="rect">
+            <a:avLst/>
+          </a:prstGeom>
+          <a:solidFill>
+            <a:srgbClr val="FFFFFF"/>
+          </a:solidFill>
+          <a:ln w="9525">
+            <a:solidFill>
+              <a:srgbClr val="BFBFBF"/>
+            </a:solidFill>
+          </a:ln>
+          <a:effectLst/>
+        </p:spPr>
+        <p:style>
+          <a:lnRef idx="1">
+            <a:schemeClr val="accent1"/>
+          </a:lnRef>
+          <a:fillRef idx="3">
+            <a:schemeClr val="accent1"/>
+          </a:fillRef>
+          <a:effectRef idx="2">
+            <a:schemeClr val="accent1"/>
+          </a:effectRef>
+          <a:fontRef idx="minor">
+            <a:schemeClr val="lt1"/>
+          </a:fontRef>
+        </p:style>
+        <p:txBody>
+          <a:bodyPr rtlCol="0" anchor="ctr"/>
+          <a:lstStyle/>
+          <a:p>
+            <a:pPr algn="ctr"/>
+          </a:p>
+        </p:txBody>
+      </p:sp>
+      <p:sp>
+        <p:nvSpPr>
+          <p:cNvPr id="17413" name="TextBox 17412"/>
+          <p:cNvSpPr txBox="1"/>
+          <p:nvPr/>
+        </p:nvSpPr>
+        <p:spPr>
+          <a:xfrm>
+            <a:off x="6537960" y="1435607"/>
+            <a:ext cx="4892040" cy="201168"/>
+          </a:xfrm>
+          <a:prstGeom prst="rect">
+            <a:avLst/>
+          </a:prstGeom>
+          <a:noFill/>
+        </p:spPr>
+        <p:txBody>
+          <a:bodyPr wrap="square" anchor="t" lIns="0" rIns="0" tIns="0" bIns="0">
+            <a:spAutoFit/>
+          </a:bodyPr>
+          <a:lstStyle/>
+          <a:p>
+            <a:pPr algn="l">
+              <a:spcAft>
+                <a:spcPts val="100"/>
+              </a:spcAft>
+            </a:pPr>
+            <a:r>
+              <a:rPr sz="1100" b="1">
+                <a:solidFill>
+                  <a:srgbClr val="000000"/>
+                </a:solidFill>
+                <a:latin typeface="Times New Roman"/>
+              </a:rPr>
+              <a:t>BROWSER — React + ethers.js</a:t>
+            </a:r>
+          </a:p>
+        </p:txBody>
+      </p:sp>
+      <p:sp>
+        <p:nvSpPr>
+          <p:cNvPr id="17414" name="TextBox 17413"/>
+          <p:cNvSpPr txBox="1"/>
+          <p:nvPr/>
+        </p:nvSpPr>
+        <p:spPr>
+          <a:xfrm>
+            <a:off x="6537960" y="1673352"/>
+            <a:ext cx="4892040" cy="274320"/>
+          </a:xfrm>
+          <a:prstGeom prst="rect">
+            <a:avLst/>
+          </a:prstGeom>
+          <a:noFill/>
+        </p:spPr>
+        <p:txBody>
+          <a:bodyPr wrap="square" anchor="t" lIns="0" rIns="0" tIns="0" bIns="0">
+            <a:spAutoFit/>
+          </a:bodyPr>
+          <a:lstStyle/>
+          <a:p>
+            <a:pPr algn="l">
+              <a:spcAft>
+                <a:spcPts val="100"/>
+              </a:spcAft>
+            </a:pPr>
+            <a:r>
+              <a:rPr sz="1000" b="0">
+                <a:solidFill>
+                  <a:srgbClr val="5A5751"/>
+                </a:solidFill>
+                <a:latin typeface="Times New Roman"/>
+              </a:rPr>
+              <a:t>Six screens. Holds no authority.</a:t>
+            </a:r>
+          </a:p>
+        </p:txBody>
+      </p:sp>
+      <p:sp>
+        <p:nvSpPr>
+          <p:cNvPr id="17415" name="Down Arrow 17414"/>
+          <p:cNvSpPr/>
+          <p:nvPr/>
+        </p:nvSpPr>
+        <p:spPr>
+          <a:xfrm>
+            <a:off x="8892540" y="2057400"/>
+            <a:ext cx="182880" cy="146304"/>
+          </a:xfrm>
+          <a:prstGeom prst="downArrow">
+            <a:avLst/>
+          </a:prstGeom>
+          <a:solidFill>
+            <a:srgbClr val="1F3064"/>
+          </a:solidFill>
+          <a:ln>
+            <a:noFill/>
+          </a:ln>
+          <a:effectLst/>
+        </p:spPr>
+        <p:style>
+          <a:lnRef idx="1">
+            <a:schemeClr val="accent1"/>
+          </a:lnRef>
+          <a:fillRef idx="3">
+            <a:schemeClr val="accent1"/>
+          </a:fillRef>
+          <a:effectRef idx="2">
+            <a:schemeClr val="accent1"/>
+          </a:effectRef>
+          <a:fontRef idx="minor">
+            <a:schemeClr val="lt1"/>
+          </a:fontRef>
+        </p:style>
+        <p:txBody>
+          <a:bodyPr rtlCol="0" anchor="ctr"/>
+          <a:lstStyle/>
+          <a:p>
+            <a:pPr algn="ctr"/>
+          </a:p>
+        </p:txBody>
+      </p:sp>
+      <p:sp>
+        <p:nvSpPr>
+          <p:cNvPr id="17416" name="TextBox 17415"/>
+          <p:cNvSpPr txBox="1"/>
+          <p:nvPr/>
+        </p:nvSpPr>
+        <p:spPr>
+          <a:xfrm>
+            <a:off x="9130284" y="2057400"/>
+            <a:ext cx="1463040" cy="182880"/>
+          </a:xfrm>
+          <a:prstGeom prst="rect">
+            <a:avLst/>
+          </a:prstGeom>
+          <a:noFill/>
+        </p:spPr>
+        <p:txBody>
+          <a:bodyPr wrap="square" anchor="t" lIns="0" rIns="0" tIns="0" bIns="0">
+            <a:spAutoFit/>
+          </a:bodyPr>
+          <a:lstStyle/>
+          <a:p>
+            <a:pPr algn="l">
+              <a:spcAft>
+                <a:spcPts val="100"/>
+              </a:spcAft>
+            </a:pPr>
+            <a:r>
+              <a:rPr sz="900" b="1">
+                <a:solidFill>
+                  <a:srgbClr val="5A5751"/>
+                </a:solidFill>
+                <a:latin typeface="Times New Roman"/>
+              </a:rPr>
+              <a:t>JSON-RPC</a:t>
+            </a:r>
+          </a:p>
+        </p:txBody>
+      </p:sp>
+      <p:sp>
+        <p:nvSpPr>
+          <p:cNvPr id="17417" name="Rectangle 17416"/>
+          <p:cNvSpPr/>
+          <p:nvPr/>
+        </p:nvSpPr>
+        <p:spPr>
+          <a:xfrm>
+            <a:off x="6355080" y="2286000"/>
+            <a:ext cx="5257800" cy="1143000"/>
+          </a:xfrm>
+          <a:prstGeom prst="rect">
+            <a:avLst/>
+          </a:prstGeom>
+          <a:solidFill>
+            <a:srgbClr val="1F3064"/>
+          </a:solidFill>
+          <a:ln>
+            <a:noFill/>
+          </a:ln>
+          <a:effectLst/>
+        </p:spPr>
+        <p:style>
+          <a:lnRef idx="1">
+            <a:schemeClr val="accent1"/>
+          </a:lnRef>
+          <a:fillRef idx="3">
+            <a:schemeClr val="accent1"/>
+          </a:fillRef>
+          <a:effectRef idx="2">
+            <a:schemeClr val="accent1"/>
+          </a:effectRef>
+          <a:fontRef idx="minor">
+            <a:schemeClr val="lt1"/>
+          </a:fontRef>
+        </p:style>
+        <p:txBody>
+          <a:bodyPr rtlCol="0" anchor="ctr"/>
+          <a:lstStyle/>
+          <a:p>
+            <a:pPr algn="ctr"/>
+          </a:p>
+        </p:txBody>
+      </p:sp>
+      <p:sp>
+        <p:nvSpPr>
+          <p:cNvPr id="17418" name="TextBox 17417"/>
+          <p:cNvSpPr txBox="1"/>
+          <p:nvPr/>
+        </p:nvSpPr>
+        <p:spPr>
+          <a:xfrm>
+            <a:off x="6537960" y="2404872"/>
+            <a:ext cx="4892040" cy="201168"/>
+          </a:xfrm>
+          <a:prstGeom prst="rect">
+            <a:avLst/>
+          </a:prstGeom>
+          <a:noFill/>
+        </p:spPr>
+        <p:txBody>
+          <a:bodyPr wrap="square" anchor="t" lIns="0" rIns="0" tIns="0" bIns="0">
+            <a:spAutoFit/>
+          </a:bodyPr>
+          <a:lstStyle/>
+          <a:p>
+            <a:pPr algn="l">
+              <a:spcAft>
+                <a:spcPts val="100"/>
+              </a:spcAft>
+            </a:pPr>
+            <a:r>
+              <a:rPr sz="1000" b="1">
+                <a:solidFill>
+                  <a:srgbClr val="FFFFFF"/>
+                </a:solidFill>
+                <a:latin typeface="Times New Roman"/>
+              </a:rPr>
+              <a:t>PERMISSIONED CHAIN</a:t>
+            </a:r>
+          </a:p>
+        </p:txBody>
+      </p:sp>
+      <p:sp>
+        <p:nvSpPr>
+          <p:cNvPr id="17419" name="TextBox 17418"/>
+          <p:cNvSpPr txBox="1"/>
+          <p:nvPr/>
+        </p:nvSpPr>
+        <p:spPr>
+          <a:xfrm>
+            <a:off x="6537960" y="2651760"/>
+            <a:ext cx="4892040" cy="201168"/>
+          </a:xfrm>
+          <a:prstGeom prst="rect">
+            <a:avLst/>
+          </a:prstGeom>
+          <a:noFill/>
+        </p:spPr>
+        <p:txBody>
+          <a:bodyPr wrap="square" anchor="t" lIns="0" rIns="0" tIns="0" bIns="0">
+            <a:spAutoFit/>
+          </a:bodyPr>
+          <a:lstStyle/>
+          <a:p>
+            <a:pPr algn="l">
+              <a:spcAft>
+                <a:spcPts val="100"/>
+              </a:spcAft>
+            </a:pPr>
+            <a:r>
+              <a:rPr sz="1150" b="1">
+                <a:solidFill>
+                  <a:srgbClr val="FFFFFF"/>
+                </a:solidFill>
+                <a:latin typeface="Times New Roman"/>
+              </a:rPr>
+              <a:t>IdentityRegistry.sol</a:t>
+            </a:r>
+          </a:p>
+        </p:txBody>
+      </p:sp>
+      <p:sp>
+        <p:nvSpPr>
+          <p:cNvPr id="17420" name="TextBox 17419"/>
+          <p:cNvSpPr txBox="1"/>
+          <p:nvPr/>
+        </p:nvSpPr>
+        <p:spPr>
+          <a:xfrm>
+            <a:off x="6537960" y="2880360"/>
+            <a:ext cx="4892040" cy="201168"/>
+          </a:xfrm>
+          <a:prstGeom prst="rect">
+            <a:avLst/>
+          </a:prstGeom>
+          <a:noFill/>
+        </p:spPr>
+        <p:txBody>
+          <a:bodyPr wrap="square" anchor="t" lIns="0" rIns="0" tIns="0" bIns="0">
+            <a:spAutoFit/>
+          </a:bodyPr>
+          <a:lstStyle/>
+          <a:p>
+            <a:pPr algn="l">
+              <a:spcAft>
+                <a:spcPts val="100"/>
+              </a:spcAft>
+            </a:pPr>
+            <a:r>
+              <a:rPr sz="1150" b="1">
+                <a:solidFill>
+                  <a:srgbClr val="FFFFFF"/>
+                </a:solidFill>
+                <a:latin typeface="Times New Roman"/>
+              </a:rPr>
+              <a:t>AssetNFT.sol</a:t>
+            </a:r>
+          </a:p>
+        </p:txBody>
+      </p:sp>
+      <p:sp>
+        <p:nvSpPr>
+          <p:cNvPr id="17421" name="TextBox 17420"/>
+          <p:cNvSpPr txBox="1"/>
+          <p:nvPr/>
+        </p:nvSpPr>
+        <p:spPr>
+          <a:xfrm>
+            <a:off x="6537960" y="3136391"/>
+            <a:ext cx="4892040" cy="201168"/>
+          </a:xfrm>
+          <a:prstGeom prst="rect">
+            <a:avLst/>
+          </a:prstGeom>
+          <a:noFill/>
+        </p:spPr>
+        <p:txBody>
+          <a:bodyPr wrap="square" anchor="t" lIns="0" rIns="0" tIns="0" bIns="0">
+            <a:spAutoFit/>
+          </a:bodyPr>
+          <a:lstStyle/>
+          <a:p>
+            <a:pPr algn="l">
+              <a:spcAft>
+                <a:spcPts val="100"/>
+              </a:spcAft>
+            </a:pPr>
+            <a:r>
+              <a:rPr sz="950" b="0">
+                <a:solidFill>
+                  <a:srgbClr val="C8CEDC"/>
+                </a:solidFill>
+                <a:latin typeface="Times New Roman"/>
+              </a:rPr>
+              <a:t>All authority lives here</a:t>
+            </a:r>
+          </a:p>
+        </p:txBody>
+      </p:sp>
+      <p:sp>
+        <p:nvSpPr>
+          <p:cNvPr id="17422" name="Down Arrow 17421"/>
+          <p:cNvSpPr/>
+          <p:nvPr/>
+        </p:nvSpPr>
+        <p:spPr>
+          <a:xfrm>
+            <a:off x="8892540" y="3474720"/>
+            <a:ext cx="182880" cy="146304"/>
+          </a:xfrm>
+          <a:prstGeom prst="downArrow">
+            <a:avLst/>
+          </a:prstGeom>
+          <a:solidFill>
+            <a:srgbClr val="1F3064"/>
+          </a:solidFill>
+          <a:ln>
+            <a:noFill/>
+          </a:ln>
+          <a:effectLst/>
+        </p:spPr>
+        <p:style>
+          <a:lnRef idx="1">
+            <a:schemeClr val="accent1"/>
+          </a:lnRef>
+          <a:fillRef idx="3">
+            <a:schemeClr val="accent1"/>
+          </a:fillRef>
+          <a:effectRef idx="2">
+            <a:schemeClr val="accent1"/>
+          </a:effectRef>
+          <a:fontRef idx="minor">
+            <a:schemeClr val="lt1"/>
+          </a:fontRef>
+        </p:style>
+        <p:txBody>
+          <a:bodyPr rtlCol="0" anchor="ctr"/>
+          <a:lstStyle/>
+          <a:p>
+            <a:pPr algn="ctr"/>
+          </a:p>
+        </p:txBody>
+      </p:sp>
+      <p:sp>
+        <p:nvSpPr>
+          <p:cNvPr id="17423" name="Rectangle 17422"/>
+          <p:cNvSpPr/>
+          <p:nvPr/>
+        </p:nvSpPr>
+        <p:spPr>
+          <a:xfrm>
+            <a:off x="6355080" y="3703320"/>
+            <a:ext cx="5257800" cy="658368"/>
+          </a:xfrm>
+          <a:prstGeom prst="rect">
+            <a:avLst/>
+          </a:prstGeom>
+          <a:solidFill>
+            <a:srgbClr val="F2F2F2"/>
+          </a:solidFill>
+          <a:ln w="9525">
+            <a:solidFill>
+              <a:srgbClr val="BFBFBF"/>
+            </a:solidFill>
+          </a:ln>
+          <a:effectLst/>
+        </p:spPr>
+        <p:style>
+          <a:lnRef idx="1">
+            <a:schemeClr val="accent1"/>
+          </a:lnRef>
+          <a:fillRef idx="3">
+            <a:schemeClr val="accent1"/>
+          </a:fillRef>
+          <a:effectRef idx="2">
+            <a:schemeClr val="accent1"/>
+          </a:effectRef>
+          <a:fontRef idx="minor">
+            <a:schemeClr val="lt1"/>
+          </a:fontRef>
+        </p:style>
+        <p:txBody>
+          <a:bodyPr rtlCol="0" anchor="ctr"/>
+          <a:lstStyle/>
+          <a:p>
+            <a:pPr algn="ctr"/>
+          </a:p>
+        </p:txBody>
+      </p:sp>
+      <p:sp>
+        <p:nvSpPr>
+          <p:cNvPr id="17424" name="TextBox 17423"/>
+          <p:cNvSpPr txBox="1"/>
+          <p:nvPr/>
+        </p:nvSpPr>
+        <p:spPr>
+          <a:xfrm>
+            <a:off x="6537960" y="3813048"/>
+            <a:ext cx="4892040" cy="201168"/>
+          </a:xfrm>
+          <a:prstGeom prst="rect">
+            <a:avLst/>
+          </a:prstGeom>
+          <a:noFill/>
+        </p:spPr>
+        <p:txBody>
+          <a:bodyPr wrap="square" anchor="t" lIns="0" rIns="0" tIns="0" bIns="0">
+            <a:spAutoFit/>
+          </a:bodyPr>
+          <a:lstStyle/>
+          <a:p>
+            <a:pPr algn="l">
+              <a:spcAft>
+                <a:spcPts val="100"/>
+              </a:spcAft>
+            </a:pPr>
+            <a:r>
+              <a:rPr sz="1100" b="1">
+                <a:solidFill>
+                  <a:srgbClr val="000000"/>
+                </a:solidFill>
+                <a:latin typeface="Times New Roman"/>
+              </a:rPr>
+              <a:t>ANY VERIFIER — no account required</a:t>
+            </a:r>
+          </a:p>
+        </p:txBody>
+      </p:sp>
+      <p:sp>
+        <p:nvSpPr>
+          <p:cNvPr id="17425" name="TextBox 17424"/>
+          <p:cNvSpPr txBox="1"/>
+          <p:nvPr/>
+        </p:nvSpPr>
+        <p:spPr>
+          <a:xfrm>
+            <a:off x="6537960" y="4050791"/>
+            <a:ext cx="4892040" cy="274320"/>
+          </a:xfrm>
+          <a:prstGeom prst="rect">
+            <a:avLst/>
+          </a:prstGeom>
+          <a:noFill/>
+        </p:spPr>
+        <p:txBody>
+          <a:bodyPr wrap="square" anchor="t" lIns="0" rIns="0" tIns="0" bIns="0">
+            <a:spAutoFit/>
+          </a:bodyPr>
+          <a:lstStyle/>
+          <a:p>
+            <a:pPr algn="l">
+              <a:spcAft>
+                <a:spcPts val="100"/>
+              </a:spcAft>
+            </a:pPr>
+            <a:r>
+              <a:rPr sz="1000" b="0">
+                <a:solidFill>
+                  <a:srgbClr val="5A5751"/>
+                </a:solidFill>
+                <a:latin typeface="Times New Roman"/>
+              </a:rPr>
+              <a:t>Reads the same record without trusting us.</a:t>
+            </a:r>
+          </a:p>
+        </p:txBody>
+      </p:sp>
+      <p:sp>
+        <p:nvSpPr>
+          <p:cNvPr id="17426" name="Rectangle 17425"/>
+          <p:cNvSpPr/>
+          <p:nvPr/>
+        </p:nvSpPr>
+        <p:spPr>
+          <a:xfrm>
+            <a:off x="6355080" y="4507992"/>
+            <a:ext cx="5257800" cy="1234440"/>
+          </a:xfrm>
+          <a:prstGeom prst="rect">
+            <a:avLst/>
+          </a:prstGeom>
+          <a:solidFill>
+            <a:srgbClr val="FBE9E9"/>
+          </a:solidFill>
+          <a:ln w="9525">
+            <a:solidFill>
+              <a:srgbClr val="A61B1B"/>
+            </a:solidFill>
+          </a:ln>
+          <a:effectLst/>
+        </p:spPr>
+        <p:style>
+          <a:lnRef idx="1">
+            <a:schemeClr val="accent1"/>
+          </a:lnRef>
+          <a:fillRef idx="3">
+            <a:schemeClr val="accent1"/>
+          </a:fillRef>
+          <a:effectRef idx="2">
+            <a:schemeClr val="accent1"/>
+          </a:effectRef>
+          <a:fontRef idx="minor">
+            <a:schemeClr val="lt1"/>
+          </a:fontRef>
+        </p:style>
+        <p:txBody>
+          <a:bodyPr rtlCol="0" anchor="ctr"/>
+          <a:lstStyle/>
+          <a:p>
+            <a:pPr algn="ctr"/>
+          </a:p>
+        </p:txBody>
+      </p:sp>
+      <p:sp>
+        <p:nvSpPr>
+          <p:cNvPr id="17427" name="TextBox 17426"/>
+          <p:cNvSpPr txBox="1"/>
+          <p:nvPr/>
+        </p:nvSpPr>
+        <p:spPr>
+          <a:xfrm>
+            <a:off x="6537960" y="4636008"/>
+            <a:ext cx="4892040" cy="201168"/>
+          </a:xfrm>
+          <a:prstGeom prst="rect">
+            <a:avLst/>
+          </a:prstGeom>
+          <a:noFill/>
+        </p:spPr>
+        <p:txBody>
+          <a:bodyPr wrap="square" anchor="t" lIns="0" rIns="0" tIns="0" bIns="0">
+            <a:spAutoFit/>
+          </a:bodyPr>
+          <a:lstStyle/>
+          <a:p>
+            <a:pPr algn="l">
+              <a:spcAft>
+                <a:spcPts val="100"/>
+              </a:spcAft>
+            </a:pPr>
+            <a:r>
+              <a:rPr sz="1000" b="1">
+                <a:solidFill>
+                  <a:srgbClr val="A61B1B"/>
+                </a:solidFill>
+                <a:latin typeface="Times New Roman"/>
+              </a:rPr>
+              <a:t>DELIBERATELY ABSENT</a:t>
+            </a:r>
+          </a:p>
+        </p:txBody>
+      </p:sp>
+      <p:sp>
+        <p:nvSpPr>
+          <p:cNvPr id="17428" name="TextBox 17427"/>
+          <p:cNvSpPr txBox="1"/>
+          <p:nvPr/>
+        </p:nvSpPr>
+        <p:spPr>
+          <a:xfrm>
+            <a:off x="6537960" y="4873752"/>
+            <a:ext cx="1828800" cy="201168"/>
+          </a:xfrm>
+          <a:prstGeom prst="rect">
+            <a:avLst/>
+          </a:prstGeom>
+          <a:noFill/>
+        </p:spPr>
+        <p:txBody>
+          <a:bodyPr wrap="square" anchor="t" lIns="0" rIns="0" tIns="0" bIns="0">
+            <a:spAutoFit/>
+          </a:bodyPr>
+          <a:lstStyle/>
+          <a:p>
+            <a:pPr algn="l">
+              <a:spcAft>
+                <a:spcPts val="100"/>
+              </a:spcAft>
+            </a:pPr>
+            <a:r>
+              <a:rPr sz="1050" b="1">
+                <a:solidFill>
+                  <a:srgbClr val="000000"/>
+                </a:solidFill>
+                <a:latin typeface="Times New Roman"/>
+              </a:rPr>
+              <a:t>No backend server</a:t>
+            </a:r>
+          </a:p>
+        </p:txBody>
+      </p:sp>
+      <p:sp>
+        <p:nvSpPr>
+          <p:cNvPr id="17429" name="TextBox 17428"/>
+          <p:cNvSpPr txBox="1"/>
+          <p:nvPr/>
+        </p:nvSpPr>
+        <p:spPr>
+          <a:xfrm>
+            <a:off x="8321040" y="4882896"/>
+            <a:ext cx="3108960" cy="201168"/>
+          </a:xfrm>
+          <a:prstGeom prst="rect">
+            <a:avLst/>
+          </a:prstGeom>
+          <a:noFill/>
+        </p:spPr>
+        <p:txBody>
+          <a:bodyPr wrap="square" anchor="t" lIns="0" rIns="0" tIns="0" bIns="0">
+            <a:spAutoFit/>
+          </a:bodyPr>
+          <a:lstStyle/>
+          <a:p>
+            <a:pPr algn="l">
+              <a:spcAft>
+                <a:spcPts val="100"/>
+              </a:spcAft>
+            </a:pPr>
+            <a:r>
+              <a:rPr sz="950" b="0">
+                <a:solidFill>
+                  <a:srgbClr val="5A5751"/>
+                </a:solidFill>
+                <a:latin typeface="Times New Roman"/>
+              </a:rPr>
+              <a:t>nothing between user and chain</a:t>
+            </a:r>
+          </a:p>
+        </p:txBody>
+      </p:sp>
+      <p:sp>
+        <p:nvSpPr>
+          <p:cNvPr id="17430" name="TextBox 17429"/>
+          <p:cNvSpPr txBox="1"/>
+          <p:nvPr/>
+        </p:nvSpPr>
+        <p:spPr>
+          <a:xfrm>
+            <a:off x="6537960" y="5148072"/>
+            <a:ext cx="1828800" cy="201168"/>
+          </a:xfrm>
+          <a:prstGeom prst="rect">
+            <a:avLst/>
+          </a:prstGeom>
+          <a:noFill/>
+        </p:spPr>
+        <p:txBody>
+          <a:bodyPr wrap="square" anchor="t" lIns="0" rIns="0" tIns="0" bIns="0">
+            <a:spAutoFit/>
+          </a:bodyPr>
+          <a:lstStyle/>
+          <a:p>
+            <a:pPr algn="l">
+              <a:spcAft>
+                <a:spcPts val="100"/>
+              </a:spcAft>
+            </a:pPr>
+            <a:r>
+              <a:rPr sz="1050" b="1">
+                <a:solidFill>
+                  <a:srgbClr val="000000"/>
+                </a:solidFill>
+                <a:latin typeface="Times New Roman"/>
+              </a:rPr>
+              <a:t>No database</a:t>
+            </a:r>
+          </a:p>
+        </p:txBody>
+      </p:sp>
+      <p:sp>
+        <p:nvSpPr>
+          <p:cNvPr id="17431" name="TextBox 17430"/>
+          <p:cNvSpPr txBox="1"/>
+          <p:nvPr/>
+        </p:nvSpPr>
+        <p:spPr>
+          <a:xfrm>
+            <a:off x="8321040" y="5157216"/>
+            <a:ext cx="3108960" cy="201168"/>
+          </a:xfrm>
+          <a:prstGeom prst="rect">
+            <a:avLst/>
+          </a:prstGeom>
+          <a:noFill/>
+        </p:spPr>
+        <p:txBody>
+          <a:bodyPr wrap="square" anchor="t" lIns="0" rIns="0" tIns="0" bIns="0">
+            <a:spAutoFit/>
+          </a:bodyPr>
+          <a:lstStyle/>
+          <a:p>
+            <a:pPr algn="l">
+              <a:spcAft>
+                <a:spcPts val="100"/>
+              </a:spcAft>
+            </a:pPr>
+            <a:r>
+              <a:rPr sz="950" b="0">
+                <a:solidFill>
+                  <a:srgbClr val="5A5751"/>
+                </a:solidFill>
+                <a:latin typeface="Times New Roman"/>
+              </a:rPr>
+              <a:t>no editable row for role, owner or log</a:t>
+            </a:r>
+          </a:p>
+        </p:txBody>
+      </p:sp>
+      <p:sp>
+        <p:nvSpPr>
+          <p:cNvPr id="17432" name="TextBox 17431"/>
+          <p:cNvSpPr txBox="1"/>
+          <p:nvPr/>
+        </p:nvSpPr>
+        <p:spPr>
+          <a:xfrm>
+            <a:off x="6537960" y="5422392"/>
+            <a:ext cx="1828800" cy="201168"/>
+          </a:xfrm>
+          <a:prstGeom prst="rect">
+            <a:avLst/>
+          </a:prstGeom>
+          <a:noFill/>
+        </p:spPr>
+        <p:txBody>
+          <a:bodyPr wrap="square" anchor="t" lIns="0" rIns="0" tIns="0" bIns="0">
+            <a:spAutoFit/>
+          </a:bodyPr>
+          <a:lstStyle/>
+          <a:p>
+            <a:pPr algn="l">
+              <a:spcAft>
+                <a:spcPts val="100"/>
+              </a:spcAft>
+            </a:pPr>
+            <a:r>
+              <a:rPr sz="1050" b="1">
+                <a:solidFill>
+                  <a:srgbClr val="000000"/>
+                </a:solidFill>
+                <a:latin typeface="Times New Roman"/>
+              </a:rPr>
+              <a:t>No public network</a:t>
+            </a:r>
+          </a:p>
+        </p:txBody>
+      </p:sp>
+      <p:sp>
+        <p:nvSpPr>
+          <p:cNvPr id="17433" name="TextBox 17432"/>
+          <p:cNvSpPr txBox="1"/>
+          <p:nvPr/>
+        </p:nvSpPr>
+        <p:spPr>
+          <a:xfrm>
+            <a:off x="8321040" y="5431536"/>
+            <a:ext cx="3108960" cy="201168"/>
+          </a:xfrm>
+          <a:prstGeom prst="rect">
+            <a:avLst/>
+          </a:prstGeom>
+          <a:noFill/>
+        </p:spPr>
+        <p:txBody>
+          <a:bodyPr wrap="square" anchor="t" lIns="0" rIns="0" tIns="0" bIns="0">
+            <a:spAutoFit/>
+          </a:bodyPr>
+          <a:lstStyle/>
+          <a:p>
+            <a:pPr algn="l">
+              <a:spcAft>
+                <a:spcPts val="100"/>
+              </a:spcAft>
+            </a:pPr>
+            <a:r>
+              <a:rPr sz="950" b="0">
+                <a:solidFill>
+                  <a:srgbClr val="5A5751"/>
+                </a:solidFill>
+                <a:latin typeface="Times New Roman"/>
+              </a:rPr>
+              <a:t>permissioned chain, no gas, no exposure</a:t>
+            </a:r>
+          </a:p>
+        </p:txBody>
+      </p:sp>
     </p:spTree>
   </p:cSld>
   <p:clrMapOvr>
@@ -7073,8 +9090,8 @@
         </p:nvSpPr>
         <p:spPr bwMode="auto">
           <a:xfrm>
-            <a:off x="610000" y="1150000"/>
-            <a:ext cx="9400000" cy="5100000"/>
+            <a:off x="502920" y="1051560"/>
+            <a:ext cx="5532120" cy="4709160"/>
           </a:xfrm>
           <a:prstGeom prst="rect">
             <a:avLst/>
@@ -7111,7 +9128,7 @@
               <a:buNone/>
             </a:pPr>
             <a:r>
-              <a:rPr sz="1600" b="1">
+              <a:rPr sz="1300" b="1">
                 <a:solidFill>
                   <a:srgbClr val="000000"/>
                 </a:solidFill>
@@ -7135,80 +9152,97 @@
             </a:endParaRPr>
           </a:p>
           <a:p>
-            <a:pPr algn="l">
+            <a:pPr algn="l" indent="0" marL="0">
+              <a:lnSpc>
+                <a:spcPct val="110000"/>
+              </a:lnSpc>
               <a:spcAft>
                 <a:spcPts val="200"/>
               </a:spcAft>
-            </a:pPr>
-            <a:r>
-              <a:rPr sz="1350" b="0">
+              <a:buNone/>
+            </a:pPr>
+            <a:r>
+              <a:rPr sz="1100" b="0">
                 <a:solidFill>
                   <a:srgbClr val="000000"/>
                 </a:solidFill>
                 <a:latin typeface="Times New Roman"/>
               </a:rPr>
-              <a:t>•  A working prototype already exists: both contracts, the full workflow interface, and 45 passing tests.</a:t>
-            </a:r>
-          </a:p>
-          <a:p>
-            <a:pPr algn="l">
+              <a:t>•  Working prototype exists: two contracts, six screens, 45 passing tests.</a:t>
+            </a:r>
+          </a:p>
+          <a:p>
+            <a:pPr algn="l" indent="0" marL="0">
+              <a:lnSpc>
+                <a:spcPct val="110000"/>
+              </a:lnSpc>
               <a:spcAft>
                 <a:spcPts val="200"/>
               </a:spcAft>
-            </a:pPr>
-            <a:r>
-              <a:rPr sz="1350" b="0">
+              <a:buNone/>
+            </a:pPr>
+            <a:r>
+              <a:rPr sz="1100" b="0">
                 <a:solidFill>
                   <a:srgbClr val="000000"/>
                 </a:solidFill>
                 <a:latin typeface="Times New Roman"/>
               </a:rPr>
-              <a:t>•  Built entirely on audited, widely used libraries — no novel cryptography and no unproven components.</a:t>
-            </a:r>
-          </a:p>
-          <a:p>
-            <a:pPr algn="l">
+              <a:t>•  Built on audited OpenZeppelin libraries — no novel cryptography.</a:t>
+            </a:r>
+          </a:p>
+          <a:p>
+            <a:pPr algn="l" indent="0" marL="0">
+              <a:lnSpc>
+                <a:spcPct val="110000"/>
+              </a:lnSpc>
               <a:spcAft>
                 <a:spcPts val="200"/>
               </a:spcAft>
-            </a:pPr>
-            <a:r>
-              <a:rPr sz="1350" b="0">
+              <a:buNone/>
+            </a:pPr>
+            <a:r>
+              <a:rPr sz="1100" b="0">
                 <a:solidFill>
                   <a:srgbClr val="000000"/>
                 </a:solidFill>
                 <a:latin typeface="Times New Roman"/>
               </a:rPr>
-              <a:t>•  Runs on a permissioned chain, so there is no public-network gas cost and no external dependency.</a:t>
-            </a:r>
-          </a:p>
-          <a:p>
-            <a:pPr algn="l">
+              <a:t>•  Runs on a permissioned chain: no public network, no gas cost, no external dependency.</a:t>
+            </a:r>
+          </a:p>
+          <a:p>
+            <a:pPr algn="l" indent="0" marL="0">
+              <a:lnSpc>
+                <a:spcPct val="110000"/>
+              </a:lnSpc>
               <a:spcAft>
                 <a:spcPts val="200"/>
               </a:spcAft>
-            </a:pPr>
-            <a:r>
-              <a:rPr sz="1350" b="0">
+              <a:buNone/>
+            </a:pPr>
+            <a:r>
+              <a:rPr sz="1100" b="0">
                 <a:solidFill>
                   <a:srgbClr val="000000"/>
                 </a:solidFill>
                 <a:latin typeface="Times New Roman"/>
               </a:rPr>
-              <a:t>•  Adoption is incremental: it can run alongside an existing asset register before replacing it.</a:t>
-            </a:r>
-          </a:p>
-          <a:p>
-            <a:pPr algn="l">
+              <a:t>•  Adoption is incremental — can run alongside an existing stores register before replacing it.</a:t>
+            </a:r>
+          </a:p>
+          <a:p>
+            <a:pPr algn="l" indent="0" marL="0">
               <a:spcBef>
-                <a:spcPts val="1000"/>
+                <a:spcPts val="800"/>
               </a:spcBef>
               <a:spcAft>
                 <a:spcPts val="200"/>
               </a:spcAft>
-            </a:pPr>
-            <a:r>
-              <a:rPr sz="1600" b="1">
+              <a:buNone/>
+            </a:pPr>
+            <a:r>
+              <a:rPr sz="1300" b="1">
                 <a:solidFill>
                   <a:srgbClr val="000000"/>
                 </a:solidFill>
@@ -7218,45 +9252,57 @@
             </a:r>
           </a:p>
           <a:p>
-            <a:pPr algn="l">
+            <a:pPr algn="l" indent="0" marL="0">
+              <a:lnSpc>
+                <a:spcPct val="110000"/>
+              </a:lnSpc>
               <a:spcAft>
                 <a:spcPts val="200"/>
               </a:spcAft>
-            </a:pPr>
-            <a:r>
-              <a:rPr sz="1350" b="0">
+              <a:buNone/>
+            </a:pPr>
+            <a:r>
+              <a:rPr sz="1100" b="0">
                 <a:solidFill>
                   <a:srgbClr val="000000"/>
                 </a:solidFill>
                 <a:latin typeface="Times New Roman"/>
               </a:rPr>
-              <a:t>•  Administrator key compromise — a single key currently holds full administrative authority.</a:t>
-            </a:r>
-          </a:p>
-          <a:p>
-            <a:pPr algn="l">
+              <a:t>•  Administrator key compromise — one key currently holds full authority.</a:t>
+            </a:r>
+          </a:p>
+          <a:p>
+            <a:pPr algn="l" indent="0" marL="0">
+              <a:lnSpc>
+                <a:spcPct val="110000"/>
+              </a:lnSpc>
               <a:spcAft>
                 <a:spcPts val="200"/>
               </a:spcAft>
-            </a:pPr>
-            <a:r>
-              <a:rPr sz="1350" b="0">
+              <a:buNone/>
+            </a:pPr>
+            <a:r>
+              <a:rPr sz="1100" b="0">
                 <a:solidFill>
                   <a:srgbClr val="000000"/>
                 </a:solidFill>
                 <a:latin typeface="Times New Roman"/>
               </a:rPr>
-              <a:t>•  On-chain read cost grows with registry size; an unbounded read becomes uncallable at scale.</a:t>
-            </a:r>
-          </a:p>
-          <a:p>
-            <a:pPr algn="l">
+              <a:t>•  On-chain read cost grows with registry size.</a:t>
+            </a:r>
+          </a:p>
+          <a:p>
+            <a:pPr algn="l" indent="0" marL="0">
+              <a:lnSpc>
+                <a:spcPct val="110000"/>
+              </a:lnSpc>
               <a:spcAft>
                 <a:spcPts val="200"/>
               </a:spcAft>
-            </a:pPr>
-            <a:r>
-              <a:rPr sz="1350" b="0">
+              <a:buNone/>
+            </a:pPr>
+            <a:r>
+              <a:rPr sz="1100" b="0">
                 <a:solidFill>
                   <a:srgbClr val="000000"/>
                 </a:solidFill>
@@ -7266,32 +9312,37 @@
             </a:r>
           </a:p>
           <a:p>
-            <a:pPr algn="l">
+            <a:pPr algn="l" indent="0" marL="0">
+              <a:lnSpc>
+                <a:spcPct val="110000"/>
+              </a:lnSpc>
               <a:spcAft>
                 <a:spcPts val="200"/>
               </a:spcAft>
-            </a:pPr>
-            <a:r>
-              <a:rPr sz="1350" b="0">
+              <a:buNone/>
+            </a:pPr>
+            <a:r>
+              <a:rPr sz="1100" b="0">
                 <a:solidFill>
                   <a:srgbClr val="000000"/>
                 </a:solidFill>
                 <a:latin typeface="Times New Roman"/>
               </a:rPr>
-              <a:t>•  Key loss would otherwise strand an identity and every asset it holds.</a:t>
-            </a:r>
-          </a:p>
-          <a:p>
-            <a:pPr algn="l">
+              <a:t>•  Key loss would otherwise strand an identity and the assets it holds.</a:t>
+            </a:r>
+          </a:p>
+          <a:p>
+            <a:pPr algn="l" indent="0" marL="0">
               <a:spcBef>
-                <a:spcPts val="1000"/>
+                <a:spcPts val="800"/>
               </a:spcBef>
               <a:spcAft>
                 <a:spcPts val="200"/>
               </a:spcAft>
-            </a:pPr>
-            <a:r>
-              <a:rPr sz="1600" b="1">
+              <a:buNone/>
+            </a:pPr>
+            <a:r>
+              <a:rPr sz="1300" b="1">
                 <a:solidFill>
                   <a:srgbClr val="000000"/>
                 </a:solidFill>
@@ -7301,67 +9352,83 @@
             </a:r>
           </a:p>
           <a:p>
-            <a:pPr algn="l">
+            <a:pPr algn="l" indent="0" marL="0">
+              <a:lnSpc>
+                <a:spcPct val="110000"/>
+              </a:lnSpc>
               <a:spcAft>
                 <a:spcPts val="200"/>
               </a:spcAft>
-            </a:pPr>
-            <a:r>
-              <a:rPr sz="1350" b="0">
+              <a:buNone/>
+            </a:pPr>
+            <a:r>
+              <a:rPr sz="1100" b="0">
                 <a:solidFill>
                   <a:srgbClr val="000000"/>
                 </a:solidFill>
                 <a:latin typeface="Times New Roman"/>
               </a:rPr>
-              <a:t>•  Multi-signature control with a timelock for the administrative role, removing the single point of failure.</a:t>
-            </a:r>
-          </a:p>
-          <a:p>
-            <a:pPr algn="l">
+              <a:t>•  Multi-signature control with a timelock for the administrative role.</a:t>
+            </a:r>
+          </a:p>
+          <a:p>
+            <a:pPr algn="l" indent="0" marL="0">
+              <a:lnSpc>
+                <a:spcPct val="110000"/>
+              </a:lnSpc>
               <a:spcAft>
                 <a:spcPts val="200"/>
               </a:spcAft>
-            </a:pPr>
-            <a:r>
-              <a:rPr sz="1350" b="0">
+              <a:buNone/>
+            </a:pPr>
+            <a:r>
+              <a:rPr sz="1100" b="0">
                 <a:solidFill>
                   <a:srgbClr val="000000"/>
                 </a:solidFill>
                 <a:latin typeface="Times New Roman"/>
               </a:rPr>
-              <a:t>•  Paginated on-chain reads (implemented) plus an off-chain indexer for large registries.</a:t>
-            </a:r>
-          </a:p>
-          <a:p>
-            <a:pPr algn="l">
+              <a:t>•  Paginated on-chain reads (implemented) plus an off-chain indexer at scale.</a:t>
+            </a:r>
+          </a:p>
+          <a:p>
+            <a:pPr algn="l" indent="0" marL="0">
+              <a:lnSpc>
+                <a:spcPct val="110000"/>
+              </a:lnSpc>
               <a:spcAft>
                 <a:spcPts val="200"/>
               </a:spcAft>
-            </a:pPr>
-            <a:r>
-              <a:rPr sz="1350" b="0">
+              <a:buNone/>
+            </a:pPr>
+            <a:r>
+              <a:rPr sz="1100" b="0">
                 <a:solidFill>
                   <a:srgbClr val="000000"/>
                 </a:solidFill>
                 <a:latin typeface="Times New Roman"/>
               </a:rPr>
-              <a:t>•  Tamper-evident physical tagging bound to the asset identifier, closing the object-to-record gap.</a:t>
-            </a:r>
-          </a:p>
-          <a:p>
-            <a:pPr algn="l">
+              <a:t>•  Tamper-evident physical tagging bound to the asset identifier.</a:t>
+            </a:r>
+          </a:p>
+          <a:p>
+            <a:pPr algn="l" indent="0" marL="0">
+              <a:lnSpc>
+                <a:spcPct val="110000"/>
+              </a:lnSpc>
               <a:spcAft>
                 <a:spcPts val="200"/>
               </a:spcAft>
-            </a:pPr>
-            <a:r>
-              <a:rPr sz="1350" b="0">
+              <a:buNone/>
+            </a:pPr>
+            <a:r>
+              <a:rPr sz="1100" b="0">
                 <a:solidFill>
                   <a:srgbClr val="000000"/>
                 </a:solidFill>
                 <a:latin typeface="Times New Roman"/>
               </a:rPr>
-              <a:t>•  On-chain key rotation that preserves identity continuity (implemented), so key loss is recoverable.</a:t>
+              <a:t>•  On-chain key rotation preserving identity continuity (implemented).</a:t>
             </a:r>
           </a:p>
         </p:txBody>
@@ -7569,7 +9636,7 @@
               <a:buNone/>
             </a:pPr>
             <a:r>
-              <a:rPr sz="1100" b="1">
+              <a:rPr sz="1000" b="1">
                 <a:solidFill>
                   <a:srgbClr val="1F3064"/>
                 </a:solidFill>
@@ -7611,6 +9678,705 @@
           </a:prstGeom>
         </p:spPr>
       </p:pic>
+      <p:sp>
+        <p:nvSpPr>
+          <p:cNvPr id="17411" name="TextBox 17410"/>
+          <p:cNvSpPr txBox="1"/>
+          <p:nvPr/>
+        </p:nvSpPr>
+        <p:spPr>
+          <a:xfrm>
+            <a:off x="6355080" y="1051560"/>
+            <a:ext cx="5257800" cy="201168"/>
+          </a:xfrm>
+          <a:prstGeom prst="rect">
+            <a:avLst/>
+          </a:prstGeom>
+          <a:noFill/>
+        </p:spPr>
+        <p:txBody>
+          <a:bodyPr wrap="square" anchor="t" lIns="0" rIns="0" tIns="0" bIns="0">
+            <a:spAutoFit/>
+          </a:bodyPr>
+          <a:lstStyle/>
+          <a:p>
+            <a:pPr algn="l">
+              <a:spcAft>
+                <a:spcPts val="100"/>
+              </a:spcAft>
+            </a:pPr>
+            <a:r>
+              <a:rPr sz="1000" b="1">
+                <a:solidFill>
+                  <a:srgbClr val="1F3064"/>
+                </a:solidFill>
+                <a:latin typeface="Times New Roman"/>
+              </a:rPr>
+              <a:t>THE DOCUMENTED CASE THIS IS BUILT FOR</a:t>
+            </a:r>
+          </a:p>
+        </p:txBody>
+      </p:sp>
+      <p:sp>
+        <p:nvSpPr>
+          <p:cNvPr id="17412" name="Rectangle 17411"/>
+          <p:cNvSpPr/>
+          <p:nvPr/>
+        </p:nvSpPr>
+        <p:spPr>
+          <a:xfrm>
+            <a:off x="6355080" y="1307592"/>
+            <a:ext cx="5257800" cy="1481328"/>
+          </a:xfrm>
+          <a:prstGeom prst="rect">
+            <a:avLst/>
+          </a:prstGeom>
+          <a:solidFill>
+            <a:srgbClr val="FBE9E9"/>
+          </a:solidFill>
+          <a:ln w="9525">
+            <a:solidFill>
+              <a:srgbClr val="A61B1B"/>
+            </a:solidFill>
+          </a:ln>
+          <a:effectLst/>
+        </p:spPr>
+        <p:style>
+          <a:lnRef idx="1">
+            <a:schemeClr val="accent1"/>
+          </a:lnRef>
+          <a:fillRef idx="3">
+            <a:schemeClr val="accent1"/>
+          </a:fillRef>
+          <a:effectRef idx="2">
+            <a:schemeClr val="accent1"/>
+          </a:effectRef>
+          <a:fontRef idx="minor">
+            <a:schemeClr val="lt1"/>
+          </a:fontRef>
+        </p:style>
+        <p:txBody>
+          <a:bodyPr rtlCol="0" anchor="ctr"/>
+          <a:lstStyle/>
+          <a:p>
+            <a:pPr algn="ctr"/>
+          </a:p>
+        </p:txBody>
+      </p:sp>
+      <p:sp>
+        <p:nvSpPr>
+          <p:cNvPr id="17413" name="TextBox 17412"/>
+          <p:cNvSpPr txBox="1"/>
+          <p:nvPr/>
+        </p:nvSpPr>
+        <p:spPr>
+          <a:xfrm>
+            <a:off x="6537960" y="1435607"/>
+            <a:ext cx="4892040" cy="228600"/>
+          </a:xfrm>
+          <a:prstGeom prst="rect">
+            <a:avLst/>
+          </a:prstGeom>
+          <a:noFill/>
+        </p:spPr>
+        <p:txBody>
+          <a:bodyPr wrap="square" anchor="t" lIns="0" rIns="0" tIns="0" bIns="0">
+            <a:spAutoFit/>
+          </a:bodyPr>
+          <a:lstStyle/>
+          <a:p>
+            <a:pPr algn="l">
+              <a:spcAft>
+                <a:spcPts val="100"/>
+              </a:spcAft>
+            </a:pPr>
+            <a:r>
+              <a:rPr sz="1200" b="1">
+                <a:solidFill>
+                  <a:srgbClr val="A61B1B"/>
+                </a:solidFill>
+                <a:latin typeface="Times New Roman"/>
+              </a:rPr>
+              <a:t>Ordnance Factory Board (now seven defence PSUs)</a:t>
+            </a:r>
+          </a:p>
+        </p:txBody>
+      </p:sp>
+      <p:sp>
+        <p:nvSpPr>
+          <p:cNvPr id="17414" name="TextBox 17413"/>
+          <p:cNvSpPr txBox="1"/>
+          <p:nvPr/>
+        </p:nvSpPr>
+        <p:spPr>
+          <a:xfrm>
+            <a:off x="6537960" y="1709928"/>
+            <a:ext cx="4892040" cy="960120"/>
+          </a:xfrm>
+          <a:prstGeom prst="rect">
+            <a:avLst/>
+          </a:prstGeom>
+          <a:noFill/>
+        </p:spPr>
+        <p:txBody>
+          <a:bodyPr wrap="square" anchor="t" lIns="0" rIns="0" tIns="0" bIns="0">
+            <a:spAutoFit/>
+          </a:bodyPr>
+          <a:lstStyle/>
+          <a:p>
+            <a:pPr algn="l">
+              <a:lnSpc>
+                <a:spcPct val="120000"/>
+              </a:lnSpc>
+              <a:spcAft>
+                <a:spcPts val="100"/>
+              </a:spcAft>
+            </a:pPr>
+            <a:r>
+              <a:rPr sz="1050" b="0">
+                <a:solidFill>
+                  <a:srgbClr val="000000"/>
+                </a:solidFill>
+                <a:latin typeface="Times New Roman"/>
+              </a:rPr>
+              <a:t>CAG Audit Report No. 10 of 2024 found stores-in-hand of</a:t>
+            </a:r>
+          </a:p>
+          <a:p>
+            <a:pPr algn="l">
+              <a:lnSpc>
+                <a:spcPct val="120000"/>
+              </a:lnSpc>
+              <a:spcAft>
+                <a:spcPts val="100"/>
+              </a:spcAft>
+            </a:pPr>
+            <a:r>
+              <a:rPr sz="1050" b="0">
+                <a:solidFill>
+                  <a:srgbClr val="000000"/>
+                </a:solidFill>
+                <a:latin typeface="Times New Roman"/>
+              </a:rPr>
+              <a:t>₹6,172 crore at 31 March 2021, of which ₹1,237 crore was</a:t>
+            </a:r>
+          </a:p>
+          <a:p>
+            <a:pPr algn="l">
+              <a:lnSpc>
+                <a:spcPct val="120000"/>
+              </a:lnSpc>
+              <a:spcAft>
+                <a:spcPts val="100"/>
+              </a:spcAft>
+            </a:pPr>
+            <a:r>
+              <a:rPr sz="1050" b="0">
+                <a:solidFill>
+                  <a:srgbClr val="000000"/>
+                </a:solidFill>
+                <a:latin typeface="Times New Roman"/>
+              </a:rPr>
+              <a:t>non-active — non-moving, slow-moving, surplus, scrap or</a:t>
+            </a:r>
+          </a:p>
+          <a:p>
+            <a:pPr algn="l">
+              <a:lnSpc>
+                <a:spcPct val="120000"/>
+              </a:lnSpc>
+              <a:spcAft>
+                <a:spcPts val="100"/>
+              </a:spcAft>
+            </a:pPr>
+            <a:r>
+              <a:rPr sz="1050" b="0">
+                <a:solidFill>
+                  <a:srgbClr val="000000"/>
+                </a:solidFill>
+                <a:latin typeface="Times New Roman"/>
+              </a:rPr>
+              <a:t>obsolete. Holding rose from 214 to 344 days of consumption.</a:t>
+            </a:r>
+          </a:p>
+        </p:txBody>
+      </p:sp>
+      <p:sp>
+        <p:nvSpPr>
+          <p:cNvPr id="17415" name="Rectangle 17414"/>
+          <p:cNvSpPr/>
+          <p:nvPr/>
+        </p:nvSpPr>
+        <p:spPr>
+          <a:xfrm>
+            <a:off x="6355080" y="2880360"/>
+            <a:ext cx="5257800" cy="749808"/>
+          </a:xfrm>
+          <a:prstGeom prst="rect">
+            <a:avLst/>
+          </a:prstGeom>
+          <a:solidFill>
+            <a:srgbClr val="FBE9E9"/>
+          </a:solidFill>
+          <a:ln w="9525">
+            <a:solidFill>
+              <a:srgbClr val="A61B1B"/>
+            </a:solidFill>
+          </a:ln>
+          <a:effectLst/>
+        </p:spPr>
+        <p:style>
+          <a:lnRef idx="1">
+            <a:schemeClr val="accent1"/>
+          </a:lnRef>
+          <a:fillRef idx="3">
+            <a:schemeClr val="accent1"/>
+          </a:fillRef>
+          <a:effectRef idx="2">
+            <a:schemeClr val="accent1"/>
+          </a:effectRef>
+          <a:fontRef idx="minor">
+            <a:schemeClr val="lt1"/>
+          </a:fontRef>
+        </p:style>
+        <p:txBody>
+          <a:bodyPr rtlCol="0" anchor="ctr"/>
+          <a:lstStyle/>
+          <a:p>
+            <a:pPr algn="ctr"/>
+          </a:p>
+        </p:txBody>
+      </p:sp>
+      <p:sp>
+        <p:nvSpPr>
+          <p:cNvPr id="17416" name="TextBox 17415"/>
+          <p:cNvSpPr txBox="1"/>
+          <p:nvPr/>
+        </p:nvSpPr>
+        <p:spPr>
+          <a:xfrm>
+            <a:off x="6537960" y="2999232"/>
+            <a:ext cx="4892040" cy="228600"/>
+          </a:xfrm>
+          <a:prstGeom prst="rect">
+            <a:avLst/>
+          </a:prstGeom>
+          <a:noFill/>
+        </p:spPr>
+        <p:txBody>
+          <a:bodyPr wrap="square" anchor="t" lIns="0" rIns="0" tIns="0" bIns="0">
+            <a:spAutoFit/>
+          </a:bodyPr>
+          <a:lstStyle/>
+          <a:p>
+            <a:pPr algn="l">
+              <a:spcAft>
+                <a:spcPts val="100"/>
+              </a:spcAft>
+            </a:pPr>
+            <a:r>
+              <a:rPr sz="1150" b="1">
+                <a:solidFill>
+                  <a:srgbClr val="A61B1B"/>
+                </a:solidFill>
+                <a:latin typeface="Times New Roman"/>
+              </a:rPr>
+              <a:t>And it persists after corporatisation</a:t>
+            </a:r>
+          </a:p>
+        </p:txBody>
+      </p:sp>
+      <p:sp>
+        <p:nvSpPr>
+          <p:cNvPr id="17417" name="TextBox 17416"/>
+          <p:cNvSpPr txBox="1"/>
+          <p:nvPr/>
+        </p:nvSpPr>
+        <p:spPr>
+          <a:xfrm>
+            <a:off x="6537960" y="3246120"/>
+            <a:ext cx="4892040" cy="347472"/>
+          </a:xfrm>
+          <a:prstGeom prst="rect">
+            <a:avLst/>
+          </a:prstGeom>
+          <a:noFill/>
+        </p:spPr>
+        <p:txBody>
+          <a:bodyPr wrap="square" anchor="t" lIns="0" rIns="0" tIns="0" bIns="0">
+            <a:spAutoFit/>
+          </a:bodyPr>
+          <a:lstStyle/>
+          <a:p>
+            <a:pPr algn="l">
+              <a:lnSpc>
+                <a:spcPct val="118000"/>
+              </a:lnSpc>
+              <a:spcAft>
+                <a:spcPts val="100"/>
+              </a:spcAft>
+            </a:pPr>
+            <a:r>
+              <a:rPr sz="1050" b="0">
+                <a:solidFill>
+                  <a:srgbClr val="000000"/>
+                </a:solidFill>
+                <a:latin typeface="Times New Roman"/>
+              </a:rPr>
+              <a:t>CAG Report No. 34: 21% of stores-in-hand — ₹330 crore across</a:t>
+            </a:r>
+          </a:p>
+          <a:p>
+            <a:pPr algn="l">
+              <a:lnSpc>
+                <a:spcPct val="118000"/>
+              </a:lnSpc>
+              <a:spcAft>
+                <a:spcPts val="100"/>
+              </a:spcAft>
+            </a:pPr>
+            <a:r>
+              <a:rPr sz="1050" b="0">
+                <a:solidFill>
+                  <a:srgbClr val="000000"/>
+                </a:solidFill>
+                <a:latin typeface="Times New Roman"/>
+              </a:rPr>
+              <a:t>four sampled factories — still non-active at 31 March 2023.</a:t>
+            </a:r>
+          </a:p>
+        </p:txBody>
+      </p:sp>
+      <p:sp>
+        <p:nvSpPr>
+          <p:cNvPr id="17418" name="Rectangle 17417"/>
+          <p:cNvSpPr/>
+          <p:nvPr/>
+        </p:nvSpPr>
+        <p:spPr>
+          <a:xfrm>
+            <a:off x="6355080" y="3739896"/>
+            <a:ext cx="5257800" cy="960120"/>
+          </a:xfrm>
+          <a:prstGeom prst="rect">
+            <a:avLst/>
+          </a:prstGeom>
+          <a:solidFill>
+            <a:srgbClr val="F2F2F2"/>
+          </a:solidFill>
+          <a:ln w="9525">
+            <a:solidFill>
+              <a:srgbClr val="BFBFBF"/>
+            </a:solidFill>
+          </a:ln>
+          <a:effectLst/>
+        </p:spPr>
+        <p:style>
+          <a:lnRef idx="1">
+            <a:schemeClr val="accent1"/>
+          </a:lnRef>
+          <a:fillRef idx="3">
+            <a:schemeClr val="accent1"/>
+          </a:fillRef>
+          <a:effectRef idx="2">
+            <a:schemeClr val="accent1"/>
+          </a:effectRef>
+          <a:fontRef idx="minor">
+            <a:schemeClr val="lt1"/>
+          </a:fontRef>
+        </p:style>
+        <p:txBody>
+          <a:bodyPr rtlCol="0" anchor="ctr"/>
+          <a:lstStyle/>
+          <a:p>
+            <a:pPr algn="ctr"/>
+          </a:p>
+        </p:txBody>
+      </p:sp>
+      <p:sp>
+        <p:nvSpPr>
+          <p:cNvPr id="17419" name="TextBox 17418"/>
+          <p:cNvSpPr txBox="1"/>
+          <p:nvPr/>
+        </p:nvSpPr>
+        <p:spPr>
+          <a:xfrm>
+            <a:off x="6537960" y="3858768"/>
+            <a:ext cx="4892040" cy="228600"/>
+          </a:xfrm>
+          <a:prstGeom prst="rect">
+            <a:avLst/>
+          </a:prstGeom>
+          <a:noFill/>
+        </p:spPr>
+        <p:txBody>
+          <a:bodyPr wrap="square" anchor="t" lIns="0" rIns="0" tIns="0" bIns="0">
+            <a:spAutoFit/>
+          </a:bodyPr>
+          <a:lstStyle/>
+          <a:p>
+            <a:pPr algn="l">
+              <a:spcAft>
+                <a:spcPts val="100"/>
+              </a:spcAft>
+            </a:pPr>
+            <a:r>
+              <a:rPr sz="1000" b="1">
+                <a:solidFill>
+                  <a:srgbClr val="1F3064"/>
+                </a:solidFill>
+                <a:latin typeface="Times New Roman"/>
+              </a:rPr>
+              <a:t>WHY THIS IS OUR PROBLEM STATEMENT</a:t>
+            </a:r>
+          </a:p>
+        </p:txBody>
+      </p:sp>
+      <p:sp>
+        <p:nvSpPr>
+          <p:cNvPr id="17420" name="TextBox 17419"/>
+          <p:cNvSpPr txBox="1"/>
+          <p:nvPr/>
+        </p:nvSpPr>
+        <p:spPr>
+          <a:xfrm>
+            <a:off x="6537960" y="4105656"/>
+            <a:ext cx="4892040" cy="530352"/>
+          </a:xfrm>
+          <a:prstGeom prst="rect">
+            <a:avLst/>
+          </a:prstGeom>
+          <a:noFill/>
+        </p:spPr>
+        <p:txBody>
+          <a:bodyPr wrap="square" anchor="t" lIns="0" rIns="0" tIns="0" bIns="0">
+            <a:spAutoFit/>
+          </a:bodyPr>
+          <a:lstStyle/>
+          <a:p>
+            <a:pPr algn="l">
+              <a:lnSpc>
+                <a:spcPct val="120000"/>
+              </a:lnSpc>
+              <a:spcAft>
+                <a:spcPts val="100"/>
+              </a:spcAft>
+            </a:pPr>
+            <a:r>
+              <a:rPr sz="1050" b="0">
+                <a:solidFill>
+                  <a:srgbClr val="000000"/>
+                </a:solidFill>
+                <a:latin typeface="Times New Roman"/>
+              </a:rPr>
+              <a:t>Stock nobody can reconcile is a custody-record failure, not a</a:t>
+            </a:r>
+          </a:p>
+          <a:p>
+            <a:pPr algn="l">
+              <a:lnSpc>
+                <a:spcPct val="120000"/>
+              </a:lnSpc>
+              <a:spcAft>
+                <a:spcPts val="100"/>
+              </a:spcAft>
+            </a:pPr>
+            <a:r>
+              <a:rPr sz="1050" b="0">
+                <a:solidFill>
+                  <a:srgbClr val="000000"/>
+                </a:solidFill>
+                <a:latin typeface="Times New Roman"/>
+              </a:rPr>
+              <a:t>warehouse failure. The register and the physical reality diverged,</a:t>
+            </a:r>
+          </a:p>
+          <a:p>
+            <a:pPr algn="l">
+              <a:lnSpc>
+                <a:spcPct val="120000"/>
+              </a:lnSpc>
+              <a:spcAft>
+                <a:spcPts val="100"/>
+              </a:spcAft>
+            </a:pPr>
+            <a:r>
+              <a:rPr sz="1050" b="0">
+                <a:solidFill>
+                  <a:srgbClr val="000000"/>
+                </a:solidFill>
+                <a:latin typeface="Times New Roman"/>
+              </a:rPr>
+              <a:t>and no party could independently prove which was correct.</a:t>
+            </a:r>
+          </a:p>
+        </p:txBody>
+      </p:sp>
+      <p:sp>
+        <p:nvSpPr>
+          <p:cNvPr id="17421" name="Rectangle 17420"/>
+          <p:cNvSpPr/>
+          <p:nvPr/>
+        </p:nvSpPr>
+        <p:spPr>
+          <a:xfrm>
+            <a:off x="6355080" y="4809744"/>
+            <a:ext cx="5257800" cy="932688"/>
+          </a:xfrm>
+          <a:prstGeom prst="rect">
+            <a:avLst/>
+          </a:prstGeom>
+          <a:solidFill>
+            <a:srgbClr val="E8F3EC"/>
+          </a:solidFill>
+          <a:ln w="9525">
+            <a:solidFill>
+              <a:srgbClr val="1E6B3A"/>
+            </a:solidFill>
+          </a:ln>
+          <a:effectLst/>
+        </p:spPr>
+        <p:style>
+          <a:lnRef idx="1">
+            <a:schemeClr val="accent1"/>
+          </a:lnRef>
+          <a:fillRef idx="3">
+            <a:schemeClr val="accent1"/>
+          </a:fillRef>
+          <a:effectRef idx="2">
+            <a:schemeClr val="accent1"/>
+          </a:effectRef>
+          <a:fontRef idx="minor">
+            <a:schemeClr val="lt1"/>
+          </a:fontRef>
+        </p:style>
+        <p:txBody>
+          <a:bodyPr rtlCol="0" anchor="ctr"/>
+          <a:lstStyle/>
+          <a:p>
+            <a:pPr algn="ctr"/>
+          </a:p>
+        </p:txBody>
+      </p:sp>
+      <p:sp>
+        <p:nvSpPr>
+          <p:cNvPr id="17422" name="TextBox 17421"/>
+          <p:cNvSpPr txBox="1"/>
+          <p:nvPr/>
+        </p:nvSpPr>
+        <p:spPr>
+          <a:xfrm>
+            <a:off x="6537960" y="4928616"/>
+            <a:ext cx="4892040" cy="228600"/>
+          </a:xfrm>
+          <a:prstGeom prst="rect">
+            <a:avLst/>
+          </a:prstGeom>
+          <a:noFill/>
+        </p:spPr>
+        <p:txBody>
+          <a:bodyPr wrap="square" anchor="t" lIns="0" rIns="0" tIns="0" bIns="0">
+            <a:spAutoFit/>
+          </a:bodyPr>
+          <a:lstStyle/>
+          <a:p>
+            <a:pPr algn="l">
+              <a:spcAft>
+                <a:spcPts val="100"/>
+              </a:spcAft>
+            </a:pPr>
+            <a:r>
+              <a:rPr sz="1000" b="1">
+                <a:solidFill>
+                  <a:srgbClr val="1E6B3A"/>
+                </a:solidFill>
+                <a:latin typeface="Times New Roman"/>
+              </a:rPr>
+              <a:t>THE ACCESS SIDE OF THE SAME PROBLEM</a:t>
+            </a:r>
+          </a:p>
+        </p:txBody>
+      </p:sp>
+      <p:sp>
+        <p:nvSpPr>
+          <p:cNvPr id="17423" name="TextBox 17422"/>
+          <p:cNvSpPr txBox="1"/>
+          <p:nvPr/>
+        </p:nvSpPr>
+        <p:spPr>
+          <a:xfrm>
+            <a:off x="6537960" y="5175504"/>
+            <a:ext cx="4892040" cy="502920"/>
+          </a:xfrm>
+          <a:prstGeom prst="rect">
+            <a:avLst/>
+          </a:prstGeom>
+          <a:noFill/>
+        </p:spPr>
+        <p:txBody>
+          <a:bodyPr wrap="square" anchor="t" lIns="0" rIns="0" tIns="0" bIns="0">
+            <a:spAutoFit/>
+          </a:bodyPr>
+          <a:lstStyle/>
+          <a:p>
+            <a:pPr algn="l">
+              <a:lnSpc>
+                <a:spcPct val="118000"/>
+              </a:lnSpc>
+              <a:spcAft>
+                <a:spcPts val="100"/>
+              </a:spcAft>
+            </a:pPr>
+            <a:r>
+              <a:rPr sz="1000" b="0">
+                <a:solidFill>
+                  <a:srgbClr val="000000"/>
+                </a:solidFill>
+                <a:latin typeface="Times New Roman"/>
+              </a:rPr>
+              <a:t>Only 48% of organisations know whether former staff still hold</a:t>
+            </a:r>
+          </a:p>
+          <a:p>
+            <a:pPr algn="l">
+              <a:lnSpc>
+                <a:spcPct val="118000"/>
+              </a:lnSpc>
+              <a:spcAft>
+                <a:spcPts val="100"/>
+              </a:spcAft>
+            </a:pPr>
+            <a:r>
+              <a:rPr sz="1000" b="0">
+                <a:solidFill>
+                  <a:srgbClr val="000000"/>
+                </a:solidFill>
+                <a:latin typeface="Times New Roman"/>
+              </a:rPr>
+              <a:t>access; 20% suffered a breach as a result (USENIX Security, 2025).</a:t>
+            </a:r>
+          </a:p>
+          <a:p>
+            <a:pPr algn="l">
+              <a:lnSpc>
+                <a:spcPct val="118000"/>
+              </a:lnSpc>
+              <a:spcAft>
+                <a:spcPts val="100"/>
+              </a:spcAft>
+            </a:pPr>
+            <a:r>
+              <a:rPr sz="1000" b="0">
+                <a:solidFill>
+                  <a:srgbClr val="000000"/>
+                </a:solidFill>
+                <a:latin typeface="Times New Roman"/>
+              </a:rPr>
+              <a:t>Stolen credentials are the top initial vector — 22% (Verizon DBIR 2025).</a:t>
+            </a:r>
+          </a:p>
+        </p:txBody>
+      </p:sp>
     </p:spTree>
     <p:extLst>
       <p:ext uri="{BB962C8B-B14F-4D97-AF65-F5344CB8AC3E}">
@@ -7757,8 +10523,8 @@
         </p:nvSpPr>
         <p:spPr bwMode="auto">
           <a:xfrm>
-            <a:off x="610000" y="1150000"/>
-            <a:ext cx="9400000" cy="5100000"/>
+            <a:off x="502920" y="1051560"/>
+            <a:ext cx="5532120" cy="4709160"/>
           </a:xfrm>
           <a:prstGeom prst="rect">
             <a:avLst/>
@@ -7795,7 +10561,7 @@
               <a:buNone/>
             </a:pPr>
             <a:r>
-              <a:rPr sz="1600" b="1">
+              <a:rPr sz="1300" b="1">
                 <a:solidFill>
                   <a:srgbClr val="000000"/>
                 </a:solidFill>
@@ -7805,80 +10571,97 @@
             </a:r>
           </a:p>
           <a:p>
-            <a:pPr algn="l">
+            <a:pPr algn="l" indent="0" marL="0">
+              <a:lnSpc>
+                <a:spcPct val="110000"/>
+              </a:lnSpc>
               <a:spcAft>
                 <a:spcPts val="200"/>
               </a:spcAft>
-            </a:pPr>
-            <a:r>
-              <a:rPr sz="1350" b="0">
+              <a:buNone/>
+            </a:pPr>
+            <a:r>
+              <a:rPr sz="1100" b="0">
                 <a:solidFill>
                   <a:srgbClr val="000000"/>
                 </a:solidFill>
                 <a:latin typeface="Times New Roman"/>
               </a:rPr>
-              <a:t>•  Security administrators: revocation takes effect immediately and cannot be bypassed, including by themselves.</a:t>
-            </a:r>
-          </a:p>
-          <a:p>
-            <a:pPr algn="l">
+              <a:t>•  Security administrators: revocation is immediate and cannot be bypassed, including by them.</a:t>
+            </a:r>
+          </a:p>
+          <a:p>
+            <a:pPr algn="l" indent="0" marL="0">
+              <a:lnSpc>
+                <a:spcPct val="110000"/>
+              </a:lnSpc>
               <a:spcAft>
                 <a:spcPts val="200"/>
               </a:spcAft>
-            </a:pPr>
-            <a:r>
-              <a:rPr sz="1350" b="0">
+              <a:buNone/>
+            </a:pPr>
+            <a:r>
+              <a:rPr sz="1100" b="0">
                 <a:solidFill>
                   <a:srgbClr val="000000"/>
                 </a:solidFill>
                 <a:latin typeface="Times New Roman"/>
               </a:rPr>
-              <a:t>•  Stores and custody officers: one verifiable custody record instead of a register plus paper forms that can disagree.</a:t>
-            </a:r>
-          </a:p>
-          <a:p>
-            <a:pPr algn="l">
+              <a:t>•  Stores and custody officers: one verifiable record instead of a register and paperwork that disagree.</a:t>
+            </a:r>
+          </a:p>
+          <a:p>
+            <a:pPr algn="l" indent="0" marL="0">
+              <a:lnSpc>
+                <a:spcPct val="110000"/>
+              </a:lnSpc>
               <a:spcAft>
                 <a:spcPts val="200"/>
               </a:spcAft>
-            </a:pPr>
-            <a:r>
-              <a:rPr sz="1350" b="0">
+              <a:buNone/>
+            </a:pPr>
+            <a:r>
+              <a:rPr sz="1100" b="0">
                 <a:solidFill>
                   <a:srgbClr val="000000"/>
                 </a:solidFill>
                 <a:latin typeface="Times New Roman"/>
               </a:rPr>
-              <a:t>•  Internal auditors: complete history reconstructable from the chain, without trusting the system operator.</a:t>
-            </a:r>
-          </a:p>
-          <a:p>
-            <a:pPr algn="l">
+              <a:t>•  Internal auditors: full history reconstructable without trusting the operator's own copy.</a:t>
+            </a:r>
+          </a:p>
+          <a:p>
+            <a:pPr algn="l" indent="0" marL="0">
+              <a:lnSpc>
+                <a:spcPct val="110000"/>
+              </a:lnSpc>
               <a:spcAft>
                 <a:spcPts val="200"/>
               </a:spcAft>
-            </a:pPr>
-            <a:r>
-              <a:rPr sz="1350" b="0">
+              <a:buNone/>
+            </a:pPr>
+            <a:r>
+              <a:rPr sz="1100" b="0">
                 <a:solidFill>
                   <a:srgbClr val="000000"/>
                 </a:solidFill>
                 <a:latin typeface="Times New Roman"/>
               </a:rPr>
-              <a:t>•  External verifiers and receiving officers: can confirm authenticity and current custody with no account and no login.</a:t>
-            </a:r>
-          </a:p>
-          <a:p>
-            <a:pPr algn="l">
+              <a:t>•  External verifiers and receiving officers: confirm authenticity with no account and no login.</a:t>
+            </a:r>
+          </a:p>
+          <a:p>
+            <a:pPr algn="l" indent="0" marL="0">
               <a:spcBef>
-                <a:spcPts val="1000"/>
+                <a:spcPts val="800"/>
               </a:spcBef>
               <a:spcAft>
                 <a:spcPts val="200"/>
               </a:spcAft>
-            </a:pPr>
-            <a:r>
-              <a:rPr sz="1600" b="1">
+              <a:buNone/>
+            </a:pPr>
+            <a:r>
+              <a:rPr sz="1300" b="1">
                 <a:solidFill>
                   <a:srgbClr val="000000"/>
                 </a:solidFill>
@@ -7888,83 +10671,103 @@
             </a:r>
           </a:p>
           <a:p>
-            <a:pPr algn="l">
+            <a:pPr algn="l" indent="0" marL="0">
+              <a:lnSpc>
+                <a:spcPct val="110000"/>
+              </a:lnSpc>
               <a:spcAft>
                 <a:spcPts val="200"/>
               </a:spcAft>
-            </a:pPr>
-            <a:r>
-              <a:rPr sz="1350" b="0">
+              <a:buNone/>
+            </a:pPr>
+            <a:r>
+              <a:rPr sz="1100" b="0">
                 <a:solidFill>
                   <a:srgbClr val="000000"/>
                 </a:solidFill>
                 <a:latin typeface="Times New Roman"/>
               </a:rPr>
-              <a:t>•  Security: authorisation lives in contract code, so a compromised database or insider cannot grant privilege or rewrite history.</a:t>
-            </a:r>
-          </a:p>
-          <a:p>
-            <a:pPr algn="l">
+              <a:t>•  Security: authorisation lives in contract code — a compromised database cannot grant privilege or rewrite history.</a:t>
+            </a:r>
+          </a:p>
+          <a:p>
+            <a:pPr algn="l" indent="0" marL="0">
+              <a:lnSpc>
+                <a:spcPct val="110000"/>
+              </a:lnSpc>
               <a:spcAft>
                 <a:spcPts val="200"/>
               </a:spcAft>
-            </a:pPr>
-            <a:r>
-              <a:rPr sz="1350" b="0">
+              <a:buNone/>
+            </a:pPr>
+            <a:r>
+              <a:rPr sz="1100" b="0">
                 <a:solidFill>
                   <a:srgbClr val="000000"/>
                 </a:solidFill>
                 <a:latin typeface="Times New Roman"/>
               </a:rPr>
-              <a:t>•  Operational: instant, enforced offboarding removes orphaned custody records — the gap that follows every departure today.</a:t>
-            </a:r>
-          </a:p>
-          <a:p>
-            <a:pPr algn="l">
+              <a:t>•  Economic: directly targets the reconciliation failure behind ₹1,237 crore of non-active defence stores (CAG, 2024).</a:t>
+            </a:r>
+          </a:p>
+          <a:p>
+            <a:pPr algn="l" indent="0" marL="0">
+              <a:lnSpc>
+                <a:spcPct val="110000"/>
+              </a:lnSpc>
               <a:spcAft>
                 <a:spcPts val="200"/>
               </a:spcAft>
-            </a:pPr>
-            <a:r>
-              <a:rPr sz="1350" b="0">
+              <a:buNone/>
+            </a:pPr>
+            <a:r>
+              <a:rPr sz="1100" b="0">
                 <a:solidFill>
                   <a:srgbClr val="000000"/>
                 </a:solidFill>
                 <a:latin typeface="Times New Roman"/>
               </a:rPr>
-              <a:t>•  Economic: less manual audit effort, fewer disputes over custody, and reduced loss of controlled equipment.</a:t>
-            </a:r>
-          </a:p>
-          <a:p>
-            <a:pPr algn="l">
+              <a:t>•  Operational: enforced offboarding closes the gap that opens every time somebody leaves.</a:t>
+            </a:r>
+          </a:p>
+          <a:p>
+            <a:pPr algn="l" indent="0" marL="0">
+              <a:lnSpc>
+                <a:spcPct val="110000"/>
+              </a:lnSpc>
               <a:spcAft>
                 <a:spcPts val="200"/>
               </a:spcAft>
-            </a:pPr>
-            <a:r>
-              <a:rPr sz="1350" b="0">
+              <a:buNone/>
+            </a:pPr>
+            <a:r>
+              <a:rPr sz="1100" b="0">
                 <a:solidFill>
                   <a:srgbClr val="000000"/>
                 </a:solidFill>
                 <a:latin typeface="Times New Roman"/>
               </a:rPr>
-              <a:t>•  Compliance and privacy: a tamper-evident chain of custody, while personal data stays off-chain and erasable.</a:t>
-            </a:r>
-          </a:p>
-          <a:p>
-            <a:pPr algn="l">
+              <a:t>•  Compliance and privacy: tamper-evident custody chain, while personal data stays off-chain and erasable.</a:t>
+            </a:r>
+          </a:p>
+          <a:p>
+            <a:pPr algn="l" indent="0" marL="0">
+              <a:lnSpc>
+                <a:spcPct val="110000"/>
+              </a:lnSpc>
               <a:spcAft>
                 <a:spcPts val="200"/>
               </a:spcAft>
-            </a:pPr>
-            <a:r>
-              <a:rPr sz="1350" b="0">
+              <a:buNone/>
+            </a:pPr>
+            <a:r>
+              <a:rPr sz="1100" b="0">
                 <a:solidFill>
                   <a:srgbClr val="000000"/>
                 </a:solidFill>
                 <a:latin typeface="Times New Roman"/>
               </a:rPr>
-              <a:t>•  Strategic: a defensible custody trail for sensitive and defence-related equipment across sites and contractors.</a:t>
+              <a:t>•  Strategic: a defensible custody trail for sensitive equipment across sites, contractors and vendors.</a:t>
             </a:r>
           </a:p>
         </p:txBody>
@@ -8172,7 +10975,7 @@
               <a:buNone/>
             </a:pPr>
             <a:r>
-              <a:rPr sz="1100" b="1">
+              <a:rPr sz="1000" b="1">
                 <a:solidFill>
                   <a:srgbClr val="1F3064"/>
                 </a:solidFill>
@@ -8214,6 +11017,1528 @@
           </a:prstGeom>
         </p:spPr>
       </p:pic>
+      <p:sp>
+        <p:nvSpPr>
+          <p:cNvPr id="17411" name="TextBox 17410"/>
+          <p:cNvSpPr txBox="1"/>
+          <p:nvPr/>
+        </p:nvSpPr>
+        <p:spPr>
+          <a:xfrm>
+            <a:off x="6355080" y="1051560"/>
+            <a:ext cx="5257800" cy="201168"/>
+          </a:xfrm>
+          <a:prstGeom prst="rect">
+            <a:avLst/>
+          </a:prstGeom>
+          <a:noFill/>
+        </p:spPr>
+        <p:txBody>
+          <a:bodyPr wrap="square" anchor="t" lIns="0" rIns="0" tIns="0" bIns="0">
+            <a:spAutoFit/>
+          </a:bodyPr>
+          <a:lstStyle/>
+          <a:p>
+            <a:pPr algn="l">
+              <a:spcAft>
+                <a:spcPts val="100"/>
+              </a:spcAft>
+            </a:pPr>
+            <a:r>
+              <a:rPr sz="1000" b="1">
+                <a:solidFill>
+                  <a:srgbClr val="1F3064"/>
+                </a:solidFill>
+                <a:latin typeface="Times New Roman"/>
+              </a:rPr>
+              <a:t>BEFORE AND AFTER, ON THE SAME KPIS</a:t>
+            </a:r>
+          </a:p>
+        </p:txBody>
+      </p:sp>
+      <p:sp>
+        <p:nvSpPr>
+          <p:cNvPr id="17412" name="Rectangle 17411"/>
+          <p:cNvSpPr/>
+          <p:nvPr/>
+        </p:nvSpPr>
+        <p:spPr>
+          <a:xfrm>
+            <a:off x="6355080" y="1325880"/>
+            <a:ext cx="5257800" cy="274320"/>
+          </a:xfrm>
+          <a:prstGeom prst="rect">
+            <a:avLst/>
+          </a:prstGeom>
+          <a:solidFill>
+            <a:srgbClr val="1F3064"/>
+          </a:solidFill>
+          <a:ln>
+            <a:noFill/>
+          </a:ln>
+          <a:effectLst/>
+        </p:spPr>
+        <p:style>
+          <a:lnRef idx="1">
+            <a:schemeClr val="accent1"/>
+          </a:lnRef>
+          <a:fillRef idx="3">
+            <a:schemeClr val="accent1"/>
+          </a:fillRef>
+          <a:effectRef idx="2">
+            <a:schemeClr val="accent1"/>
+          </a:effectRef>
+          <a:fontRef idx="minor">
+            <a:schemeClr val="lt1"/>
+          </a:fontRef>
+        </p:style>
+        <p:txBody>
+          <a:bodyPr rtlCol="0" anchor="ctr"/>
+          <a:lstStyle/>
+          <a:p>
+            <a:pPr algn="ctr"/>
+          </a:p>
+        </p:txBody>
+      </p:sp>
+      <p:sp>
+        <p:nvSpPr>
+          <p:cNvPr id="17413" name="TextBox 17412"/>
+          <p:cNvSpPr txBox="1"/>
+          <p:nvPr/>
+        </p:nvSpPr>
+        <p:spPr>
+          <a:xfrm>
+            <a:off x="6464808" y="1380744"/>
+            <a:ext cx="1874519" cy="182880"/>
+          </a:xfrm>
+          <a:prstGeom prst="rect">
+            <a:avLst/>
+          </a:prstGeom>
+          <a:noFill/>
+        </p:spPr>
+        <p:txBody>
+          <a:bodyPr wrap="square" anchor="t" lIns="0" rIns="0" tIns="0" bIns="0">
+            <a:spAutoFit/>
+          </a:bodyPr>
+          <a:lstStyle/>
+          <a:p>
+            <a:pPr algn="l">
+              <a:spcAft>
+                <a:spcPts val="100"/>
+              </a:spcAft>
+            </a:pPr>
+            <a:r>
+              <a:rPr sz="950" b="1">
+                <a:solidFill>
+                  <a:srgbClr val="FFFFFF"/>
+                </a:solidFill>
+                <a:latin typeface="Times New Roman"/>
+              </a:rPr>
+              <a:t>KPI</a:t>
+            </a:r>
+          </a:p>
+        </p:txBody>
+      </p:sp>
+      <p:sp>
+        <p:nvSpPr>
+          <p:cNvPr id="17414" name="TextBox 17413"/>
+          <p:cNvSpPr txBox="1"/>
+          <p:nvPr/>
+        </p:nvSpPr>
+        <p:spPr>
+          <a:xfrm>
+            <a:off x="8366760" y="1380744"/>
+            <a:ext cx="1554480" cy="182880"/>
+          </a:xfrm>
+          <a:prstGeom prst="rect">
+            <a:avLst/>
+          </a:prstGeom>
+          <a:noFill/>
+        </p:spPr>
+        <p:txBody>
+          <a:bodyPr wrap="square" anchor="t" lIns="0" rIns="0" tIns="0" bIns="0">
+            <a:spAutoFit/>
+          </a:bodyPr>
+          <a:lstStyle/>
+          <a:p>
+            <a:pPr algn="l">
+              <a:spcAft>
+                <a:spcPts val="100"/>
+              </a:spcAft>
+            </a:pPr>
+            <a:r>
+              <a:rPr sz="950" b="1">
+                <a:solidFill>
+                  <a:srgbClr val="FFFFFF"/>
+                </a:solidFill>
+                <a:latin typeface="Times New Roman"/>
+              </a:rPr>
+              <a:t>TODAY</a:t>
+            </a:r>
+          </a:p>
+        </p:txBody>
+      </p:sp>
+      <p:sp>
+        <p:nvSpPr>
+          <p:cNvPr id="17415" name="TextBox 17414"/>
+          <p:cNvSpPr txBox="1"/>
+          <p:nvPr/>
+        </p:nvSpPr>
+        <p:spPr>
+          <a:xfrm>
+            <a:off x="10012680" y="1380744"/>
+            <a:ext cx="1554480" cy="182880"/>
+          </a:xfrm>
+          <a:prstGeom prst="rect">
+            <a:avLst/>
+          </a:prstGeom>
+          <a:noFill/>
+        </p:spPr>
+        <p:txBody>
+          <a:bodyPr wrap="square" anchor="t" lIns="0" rIns="0" tIns="0" bIns="0">
+            <a:spAutoFit/>
+          </a:bodyPr>
+          <a:lstStyle/>
+          <a:p>
+            <a:pPr algn="l">
+              <a:spcAft>
+                <a:spcPts val="100"/>
+              </a:spcAft>
+            </a:pPr>
+            <a:r>
+              <a:rPr sz="950" b="1">
+                <a:solidFill>
+                  <a:srgbClr val="FFFFFF"/>
+                </a:solidFill>
+                <a:latin typeface="Times New Roman"/>
+              </a:rPr>
+              <a:t>WITH CHAINID VAULT</a:t>
+            </a:r>
+          </a:p>
+        </p:txBody>
+      </p:sp>
+      <p:sp>
+        <p:nvSpPr>
+          <p:cNvPr id="17416" name="Rectangle 17415"/>
+          <p:cNvSpPr/>
+          <p:nvPr/>
+        </p:nvSpPr>
+        <p:spPr>
+          <a:xfrm>
+            <a:off x="6355080" y="1600200"/>
+            <a:ext cx="5257800" cy="301752"/>
+          </a:xfrm>
+          <a:prstGeom prst="rect">
+            <a:avLst/>
+          </a:prstGeom>
+          <a:solidFill>
+            <a:srgbClr val="FFFFFF"/>
+          </a:solidFill>
+          <a:ln w="9525">
+            <a:solidFill>
+              <a:srgbClr val="BFBFBF"/>
+            </a:solidFill>
+          </a:ln>
+          <a:effectLst/>
+        </p:spPr>
+        <p:style>
+          <a:lnRef idx="1">
+            <a:schemeClr val="accent1"/>
+          </a:lnRef>
+          <a:fillRef idx="3">
+            <a:schemeClr val="accent1"/>
+          </a:fillRef>
+          <a:effectRef idx="2">
+            <a:schemeClr val="accent1"/>
+          </a:effectRef>
+          <a:fontRef idx="minor">
+            <a:schemeClr val="lt1"/>
+          </a:fontRef>
+        </p:style>
+        <p:txBody>
+          <a:bodyPr rtlCol="0" anchor="ctr"/>
+          <a:lstStyle/>
+          <a:p>
+            <a:pPr algn="ctr"/>
+          </a:p>
+        </p:txBody>
+      </p:sp>
+      <p:sp>
+        <p:nvSpPr>
+          <p:cNvPr id="17417" name="TextBox 17416"/>
+          <p:cNvSpPr txBox="1"/>
+          <p:nvPr/>
+        </p:nvSpPr>
+        <p:spPr>
+          <a:xfrm>
+            <a:off x="6464808" y="1655064"/>
+            <a:ext cx="1828800" cy="210312"/>
+          </a:xfrm>
+          <a:prstGeom prst="rect">
+            <a:avLst/>
+          </a:prstGeom>
+          <a:noFill/>
+        </p:spPr>
+        <p:txBody>
+          <a:bodyPr wrap="square" anchor="t" lIns="0" rIns="0" tIns="0" bIns="0">
+            <a:spAutoFit/>
+          </a:bodyPr>
+          <a:lstStyle/>
+          <a:p>
+            <a:pPr algn="l">
+              <a:lnSpc>
+                <a:spcPct val="105000"/>
+              </a:lnSpc>
+              <a:spcAft>
+                <a:spcPts val="100"/>
+              </a:spcAft>
+            </a:pPr>
+            <a:r>
+              <a:rPr sz="950" b="1">
+                <a:solidFill>
+                  <a:srgbClr val="000000"/>
+                </a:solidFill>
+                <a:latin typeface="Times New Roman"/>
+              </a:rPr>
+              <a:t>Custody record</a:t>
+            </a:r>
+          </a:p>
+        </p:txBody>
+      </p:sp>
+      <p:sp>
+        <p:nvSpPr>
+          <p:cNvPr id="17418" name="TextBox 17417"/>
+          <p:cNvSpPr txBox="1"/>
+          <p:nvPr/>
+        </p:nvSpPr>
+        <p:spPr>
+          <a:xfrm>
+            <a:off x="8366760" y="1655064"/>
+            <a:ext cx="1600200" cy="210312"/>
+          </a:xfrm>
+          <a:prstGeom prst="rect">
+            <a:avLst/>
+          </a:prstGeom>
+          <a:noFill/>
+        </p:spPr>
+        <p:txBody>
+          <a:bodyPr wrap="square" anchor="t" lIns="0" rIns="0" tIns="0" bIns="0">
+            <a:spAutoFit/>
+          </a:bodyPr>
+          <a:lstStyle/>
+          <a:p>
+            <a:pPr algn="l">
+              <a:lnSpc>
+                <a:spcPct val="105000"/>
+              </a:lnSpc>
+              <a:spcAft>
+                <a:spcPts val="100"/>
+              </a:spcAft>
+            </a:pPr>
+            <a:r>
+              <a:rPr sz="950" b="0">
+                <a:solidFill>
+                  <a:srgbClr val="A61B1B"/>
+                </a:solidFill>
+                <a:latin typeface="Times New Roman"/>
+              </a:rPr>
+              <a:t>Editable row</a:t>
+            </a:r>
+          </a:p>
+        </p:txBody>
+      </p:sp>
+      <p:sp>
+        <p:nvSpPr>
+          <p:cNvPr id="17419" name="TextBox 17418"/>
+          <p:cNvSpPr txBox="1"/>
+          <p:nvPr/>
+        </p:nvSpPr>
+        <p:spPr>
+          <a:xfrm>
+            <a:off x="10012680" y="1655064"/>
+            <a:ext cx="1508760" cy="210312"/>
+          </a:xfrm>
+          <a:prstGeom prst="rect">
+            <a:avLst/>
+          </a:prstGeom>
+          <a:noFill/>
+        </p:spPr>
+        <p:txBody>
+          <a:bodyPr wrap="square" anchor="t" lIns="0" rIns="0" tIns="0" bIns="0">
+            <a:spAutoFit/>
+          </a:bodyPr>
+          <a:lstStyle/>
+          <a:p>
+            <a:pPr algn="l">
+              <a:lnSpc>
+                <a:spcPct val="105000"/>
+              </a:lnSpc>
+              <a:spcAft>
+                <a:spcPts val="100"/>
+              </a:spcAft>
+            </a:pPr>
+            <a:r>
+              <a:rPr sz="950" b="0">
+                <a:solidFill>
+                  <a:srgbClr val="1E6B3A"/>
+                </a:solidFill>
+                <a:latin typeface="Times New Roman"/>
+              </a:rPr>
+              <a:t>Append-only ledger</a:t>
+            </a:r>
+          </a:p>
+        </p:txBody>
+      </p:sp>
+      <p:sp>
+        <p:nvSpPr>
+          <p:cNvPr id="17420" name="Rectangle 17419"/>
+          <p:cNvSpPr/>
+          <p:nvPr/>
+        </p:nvSpPr>
+        <p:spPr>
+          <a:xfrm>
+            <a:off x="6355080" y="1901952"/>
+            <a:ext cx="5257800" cy="301752"/>
+          </a:xfrm>
+          <a:prstGeom prst="rect">
+            <a:avLst/>
+          </a:prstGeom>
+          <a:solidFill>
+            <a:srgbClr val="F2F2F2"/>
+          </a:solidFill>
+          <a:ln w="9525">
+            <a:solidFill>
+              <a:srgbClr val="BFBFBF"/>
+            </a:solidFill>
+          </a:ln>
+          <a:effectLst/>
+        </p:spPr>
+        <p:style>
+          <a:lnRef idx="1">
+            <a:schemeClr val="accent1"/>
+          </a:lnRef>
+          <a:fillRef idx="3">
+            <a:schemeClr val="accent1"/>
+          </a:fillRef>
+          <a:effectRef idx="2">
+            <a:schemeClr val="accent1"/>
+          </a:effectRef>
+          <a:fontRef idx="minor">
+            <a:schemeClr val="lt1"/>
+          </a:fontRef>
+        </p:style>
+        <p:txBody>
+          <a:bodyPr rtlCol="0" anchor="ctr"/>
+          <a:lstStyle/>
+          <a:p>
+            <a:pPr algn="ctr"/>
+          </a:p>
+        </p:txBody>
+      </p:sp>
+      <p:sp>
+        <p:nvSpPr>
+          <p:cNvPr id="17421" name="TextBox 17420"/>
+          <p:cNvSpPr txBox="1"/>
+          <p:nvPr/>
+        </p:nvSpPr>
+        <p:spPr>
+          <a:xfrm>
+            <a:off x="6464808" y="1956816"/>
+            <a:ext cx="1828800" cy="210312"/>
+          </a:xfrm>
+          <a:prstGeom prst="rect">
+            <a:avLst/>
+          </a:prstGeom>
+          <a:noFill/>
+        </p:spPr>
+        <p:txBody>
+          <a:bodyPr wrap="square" anchor="t" lIns="0" rIns="0" tIns="0" bIns="0">
+            <a:spAutoFit/>
+          </a:bodyPr>
+          <a:lstStyle/>
+          <a:p>
+            <a:pPr algn="l">
+              <a:lnSpc>
+                <a:spcPct val="105000"/>
+              </a:lnSpc>
+              <a:spcAft>
+                <a:spcPts val="100"/>
+              </a:spcAft>
+            </a:pPr>
+            <a:r>
+              <a:rPr sz="950" b="1">
+                <a:solidFill>
+                  <a:srgbClr val="000000"/>
+                </a:solidFill>
+                <a:latin typeface="Times New Roman"/>
+              </a:rPr>
+              <a:t>Reconciliation</a:t>
+            </a:r>
+          </a:p>
+        </p:txBody>
+      </p:sp>
+      <p:sp>
+        <p:nvSpPr>
+          <p:cNvPr id="17422" name="TextBox 17421"/>
+          <p:cNvSpPr txBox="1"/>
+          <p:nvPr/>
+        </p:nvSpPr>
+        <p:spPr>
+          <a:xfrm>
+            <a:off x="8366760" y="1956816"/>
+            <a:ext cx="1600200" cy="210312"/>
+          </a:xfrm>
+          <a:prstGeom prst="rect">
+            <a:avLst/>
+          </a:prstGeom>
+          <a:noFill/>
+        </p:spPr>
+        <p:txBody>
+          <a:bodyPr wrap="square" anchor="t" lIns="0" rIns="0" tIns="0" bIns="0">
+            <a:spAutoFit/>
+          </a:bodyPr>
+          <a:lstStyle/>
+          <a:p>
+            <a:pPr algn="l">
+              <a:lnSpc>
+                <a:spcPct val="105000"/>
+              </a:lnSpc>
+              <a:spcAft>
+                <a:spcPts val="100"/>
+              </a:spcAft>
+            </a:pPr>
+            <a:r>
+              <a:rPr sz="950" b="0">
+                <a:solidFill>
+                  <a:srgbClr val="A61B1B"/>
+                </a:solidFill>
+                <a:latin typeface="Times New Roman"/>
+              </a:rPr>
+              <a:t>Periodic, manual</a:t>
+            </a:r>
+          </a:p>
+        </p:txBody>
+      </p:sp>
+      <p:sp>
+        <p:nvSpPr>
+          <p:cNvPr id="17423" name="TextBox 17422"/>
+          <p:cNvSpPr txBox="1"/>
+          <p:nvPr/>
+        </p:nvSpPr>
+        <p:spPr>
+          <a:xfrm>
+            <a:off x="10012680" y="1956816"/>
+            <a:ext cx="1508760" cy="210312"/>
+          </a:xfrm>
+          <a:prstGeom prst="rect">
+            <a:avLst/>
+          </a:prstGeom>
+          <a:noFill/>
+        </p:spPr>
+        <p:txBody>
+          <a:bodyPr wrap="square" anchor="t" lIns="0" rIns="0" tIns="0" bIns="0">
+            <a:spAutoFit/>
+          </a:bodyPr>
+          <a:lstStyle/>
+          <a:p>
+            <a:pPr algn="l">
+              <a:lnSpc>
+                <a:spcPct val="105000"/>
+              </a:lnSpc>
+              <a:spcAft>
+                <a:spcPts val="100"/>
+              </a:spcAft>
+            </a:pPr>
+            <a:r>
+              <a:rPr sz="950" b="0">
+                <a:solidFill>
+                  <a:srgbClr val="1E6B3A"/>
+                </a:solidFill>
+                <a:latin typeface="Times New Roman"/>
+              </a:rPr>
+              <a:t>Continuous — the ledger is the record</a:t>
+            </a:r>
+          </a:p>
+        </p:txBody>
+      </p:sp>
+      <p:sp>
+        <p:nvSpPr>
+          <p:cNvPr id="17424" name="Rectangle 17423"/>
+          <p:cNvSpPr/>
+          <p:nvPr/>
+        </p:nvSpPr>
+        <p:spPr>
+          <a:xfrm>
+            <a:off x="6355080" y="2203704"/>
+            <a:ext cx="5257800" cy="420624"/>
+          </a:xfrm>
+          <a:prstGeom prst="rect">
+            <a:avLst/>
+          </a:prstGeom>
+          <a:solidFill>
+            <a:srgbClr val="FFFFFF"/>
+          </a:solidFill>
+          <a:ln w="9525">
+            <a:solidFill>
+              <a:srgbClr val="BFBFBF"/>
+            </a:solidFill>
+          </a:ln>
+          <a:effectLst/>
+        </p:spPr>
+        <p:style>
+          <a:lnRef idx="1">
+            <a:schemeClr val="accent1"/>
+          </a:lnRef>
+          <a:fillRef idx="3">
+            <a:schemeClr val="accent1"/>
+          </a:fillRef>
+          <a:effectRef idx="2">
+            <a:schemeClr val="accent1"/>
+          </a:effectRef>
+          <a:fontRef idx="minor">
+            <a:schemeClr val="lt1"/>
+          </a:fontRef>
+        </p:style>
+        <p:txBody>
+          <a:bodyPr rtlCol="0" anchor="ctr"/>
+          <a:lstStyle/>
+          <a:p>
+            <a:pPr algn="ctr"/>
+          </a:p>
+        </p:txBody>
+      </p:sp>
+      <p:sp>
+        <p:nvSpPr>
+          <p:cNvPr id="17425" name="TextBox 17424"/>
+          <p:cNvSpPr txBox="1"/>
+          <p:nvPr/>
+        </p:nvSpPr>
+        <p:spPr>
+          <a:xfrm>
+            <a:off x="6464808" y="2258568"/>
+            <a:ext cx="1828800" cy="329184"/>
+          </a:xfrm>
+          <a:prstGeom prst="rect">
+            <a:avLst/>
+          </a:prstGeom>
+          <a:noFill/>
+        </p:spPr>
+        <p:txBody>
+          <a:bodyPr wrap="square" anchor="t" lIns="0" rIns="0" tIns="0" bIns="0">
+            <a:spAutoFit/>
+          </a:bodyPr>
+          <a:lstStyle/>
+          <a:p>
+            <a:pPr algn="l">
+              <a:lnSpc>
+                <a:spcPct val="105000"/>
+              </a:lnSpc>
+              <a:spcAft>
+                <a:spcPts val="100"/>
+              </a:spcAft>
+            </a:pPr>
+            <a:r>
+              <a:rPr sz="950" b="1">
+                <a:solidFill>
+                  <a:srgbClr val="000000"/>
+                </a:solidFill>
+                <a:latin typeface="Times New Roman"/>
+              </a:rPr>
+              <a:t>Offboarding gap</a:t>
+            </a:r>
+          </a:p>
+        </p:txBody>
+      </p:sp>
+      <p:sp>
+        <p:nvSpPr>
+          <p:cNvPr id="17426" name="TextBox 17425"/>
+          <p:cNvSpPr txBox="1"/>
+          <p:nvPr/>
+        </p:nvSpPr>
+        <p:spPr>
+          <a:xfrm>
+            <a:off x="8366760" y="2258568"/>
+            <a:ext cx="1600200" cy="329184"/>
+          </a:xfrm>
+          <a:prstGeom prst="rect">
+            <a:avLst/>
+          </a:prstGeom>
+          <a:noFill/>
+        </p:spPr>
+        <p:txBody>
+          <a:bodyPr wrap="square" anchor="t" lIns="0" rIns="0" tIns="0" bIns="0">
+            <a:spAutoFit/>
+          </a:bodyPr>
+          <a:lstStyle/>
+          <a:p>
+            <a:pPr algn="l">
+              <a:lnSpc>
+                <a:spcPct val="105000"/>
+              </a:lnSpc>
+              <a:spcAft>
+                <a:spcPts val="100"/>
+              </a:spcAft>
+            </a:pPr>
+            <a:r>
+              <a:rPr sz="950" b="0">
+                <a:solidFill>
+                  <a:srgbClr val="A61B1B"/>
+                </a:solidFill>
+                <a:latin typeface="Times New Roman"/>
+              </a:rPr>
+              <a:t>Access removed,</a:t>
+            </a:r>
+          </a:p>
+          <a:p>
+            <a:pPr algn="l">
+              <a:lnSpc>
+                <a:spcPct val="105000"/>
+              </a:lnSpc>
+              <a:spcAft>
+                <a:spcPts val="100"/>
+              </a:spcAft>
+            </a:pPr>
+            <a:r>
+              <a:rPr sz="950" b="0">
+                <a:solidFill>
+                  <a:srgbClr val="A61B1B"/>
+                </a:solidFill>
+                <a:latin typeface="Times New Roman"/>
+              </a:rPr>
+              <a:t>assets still held</a:t>
+            </a:r>
+          </a:p>
+        </p:txBody>
+      </p:sp>
+      <p:sp>
+        <p:nvSpPr>
+          <p:cNvPr id="17427" name="TextBox 17426"/>
+          <p:cNvSpPr txBox="1"/>
+          <p:nvPr/>
+        </p:nvSpPr>
+        <p:spPr>
+          <a:xfrm>
+            <a:off x="10012680" y="2258568"/>
+            <a:ext cx="1508760" cy="329184"/>
+          </a:xfrm>
+          <a:prstGeom prst="rect">
+            <a:avLst/>
+          </a:prstGeom>
+          <a:noFill/>
+        </p:spPr>
+        <p:txBody>
+          <a:bodyPr wrap="square" anchor="t" lIns="0" rIns="0" tIns="0" bIns="0">
+            <a:spAutoFit/>
+          </a:bodyPr>
+          <a:lstStyle/>
+          <a:p>
+            <a:pPr algn="l">
+              <a:lnSpc>
+                <a:spcPct val="105000"/>
+              </a:lnSpc>
+              <a:spcAft>
+                <a:spcPts val="100"/>
+              </a:spcAft>
+            </a:pPr>
+            <a:r>
+              <a:rPr sz="950" b="0">
+                <a:solidFill>
+                  <a:srgbClr val="1E6B3A"/>
+                </a:solidFill>
+                <a:latin typeface="Times New Roman"/>
+              </a:rPr>
+              <a:t>Revoked identity cannot</a:t>
+            </a:r>
+          </a:p>
+          <a:p>
+            <a:pPr algn="l">
+              <a:lnSpc>
+                <a:spcPct val="105000"/>
+              </a:lnSpc>
+              <a:spcAft>
+                <a:spcPts val="100"/>
+              </a:spcAft>
+            </a:pPr>
+            <a:r>
+              <a:rPr sz="950" b="0">
+                <a:solidFill>
+                  <a:srgbClr val="1E6B3A"/>
+                </a:solidFill>
+                <a:latin typeface="Times New Roman"/>
+              </a:rPr>
+              <a:t>hold or receive</a:t>
+            </a:r>
+          </a:p>
+        </p:txBody>
+      </p:sp>
+      <p:sp>
+        <p:nvSpPr>
+          <p:cNvPr id="17428" name="Rectangle 17427"/>
+          <p:cNvSpPr/>
+          <p:nvPr/>
+        </p:nvSpPr>
+        <p:spPr>
+          <a:xfrm>
+            <a:off x="6355080" y="2624328"/>
+            <a:ext cx="5257800" cy="301752"/>
+          </a:xfrm>
+          <a:prstGeom prst="rect">
+            <a:avLst/>
+          </a:prstGeom>
+          <a:solidFill>
+            <a:srgbClr val="F2F2F2"/>
+          </a:solidFill>
+          <a:ln w="9525">
+            <a:solidFill>
+              <a:srgbClr val="BFBFBF"/>
+            </a:solidFill>
+          </a:ln>
+          <a:effectLst/>
+        </p:spPr>
+        <p:style>
+          <a:lnRef idx="1">
+            <a:schemeClr val="accent1"/>
+          </a:lnRef>
+          <a:fillRef idx="3">
+            <a:schemeClr val="accent1"/>
+          </a:fillRef>
+          <a:effectRef idx="2">
+            <a:schemeClr val="accent1"/>
+          </a:effectRef>
+          <a:fontRef idx="minor">
+            <a:schemeClr val="lt1"/>
+          </a:fontRef>
+        </p:style>
+        <p:txBody>
+          <a:bodyPr rtlCol="0" anchor="ctr"/>
+          <a:lstStyle/>
+          <a:p>
+            <a:pPr algn="ctr"/>
+          </a:p>
+        </p:txBody>
+      </p:sp>
+      <p:sp>
+        <p:nvSpPr>
+          <p:cNvPr id="17429" name="TextBox 17428"/>
+          <p:cNvSpPr txBox="1"/>
+          <p:nvPr/>
+        </p:nvSpPr>
+        <p:spPr>
+          <a:xfrm>
+            <a:off x="6464808" y="2679192"/>
+            <a:ext cx="1828800" cy="210312"/>
+          </a:xfrm>
+          <a:prstGeom prst="rect">
+            <a:avLst/>
+          </a:prstGeom>
+          <a:noFill/>
+        </p:spPr>
+        <p:txBody>
+          <a:bodyPr wrap="square" anchor="t" lIns="0" rIns="0" tIns="0" bIns="0">
+            <a:spAutoFit/>
+          </a:bodyPr>
+          <a:lstStyle/>
+          <a:p>
+            <a:pPr algn="l">
+              <a:lnSpc>
+                <a:spcPct val="105000"/>
+              </a:lnSpc>
+              <a:spcAft>
+                <a:spcPts val="100"/>
+              </a:spcAft>
+            </a:pPr>
+            <a:r>
+              <a:rPr sz="950" b="1">
+                <a:solidFill>
+                  <a:srgbClr val="000000"/>
+                </a:solidFill>
+                <a:latin typeface="Times New Roman"/>
+              </a:rPr>
+              <a:t>Independent check</a:t>
+            </a:r>
+          </a:p>
+        </p:txBody>
+      </p:sp>
+      <p:sp>
+        <p:nvSpPr>
+          <p:cNvPr id="17430" name="TextBox 17429"/>
+          <p:cNvSpPr txBox="1"/>
+          <p:nvPr/>
+        </p:nvSpPr>
+        <p:spPr>
+          <a:xfrm>
+            <a:off x="8366760" y="2679192"/>
+            <a:ext cx="1600200" cy="210312"/>
+          </a:xfrm>
+          <a:prstGeom prst="rect">
+            <a:avLst/>
+          </a:prstGeom>
+          <a:noFill/>
+        </p:spPr>
+        <p:txBody>
+          <a:bodyPr wrap="square" anchor="t" lIns="0" rIns="0" tIns="0" bIns="0">
+            <a:spAutoFit/>
+          </a:bodyPr>
+          <a:lstStyle/>
+          <a:p>
+            <a:pPr algn="l">
+              <a:lnSpc>
+                <a:spcPct val="105000"/>
+              </a:lnSpc>
+              <a:spcAft>
+                <a:spcPts val="100"/>
+              </a:spcAft>
+            </a:pPr>
+            <a:r>
+              <a:rPr sz="950" b="0">
+                <a:solidFill>
+                  <a:srgbClr val="A61B1B"/>
+                </a:solidFill>
+                <a:latin typeface="Times New Roman"/>
+              </a:rPr>
+              <a:t>Not possible</a:t>
+            </a:r>
+          </a:p>
+        </p:txBody>
+      </p:sp>
+      <p:sp>
+        <p:nvSpPr>
+          <p:cNvPr id="17431" name="TextBox 17430"/>
+          <p:cNvSpPr txBox="1"/>
+          <p:nvPr/>
+        </p:nvSpPr>
+        <p:spPr>
+          <a:xfrm>
+            <a:off x="10012680" y="2679192"/>
+            <a:ext cx="1508760" cy="210312"/>
+          </a:xfrm>
+          <a:prstGeom prst="rect">
+            <a:avLst/>
+          </a:prstGeom>
+          <a:noFill/>
+        </p:spPr>
+        <p:txBody>
+          <a:bodyPr wrap="square" anchor="t" lIns="0" rIns="0" tIns="0" bIns="0">
+            <a:spAutoFit/>
+          </a:bodyPr>
+          <a:lstStyle/>
+          <a:p>
+            <a:pPr algn="l">
+              <a:lnSpc>
+                <a:spcPct val="105000"/>
+              </a:lnSpc>
+              <a:spcAft>
+                <a:spcPts val="100"/>
+              </a:spcAft>
+            </a:pPr>
+            <a:r>
+              <a:rPr sz="950" b="0">
+                <a:solidFill>
+                  <a:srgbClr val="1E6B3A"/>
+                </a:solidFill>
+                <a:latin typeface="Times New Roman"/>
+              </a:rPr>
+              <a:t>Any party, no login</a:t>
+            </a:r>
+          </a:p>
+        </p:txBody>
+      </p:sp>
+      <p:sp>
+        <p:nvSpPr>
+          <p:cNvPr id="17432" name="Rectangle 17431"/>
+          <p:cNvSpPr/>
+          <p:nvPr/>
+        </p:nvSpPr>
+        <p:spPr>
+          <a:xfrm>
+            <a:off x="6355080" y="2926080"/>
+            <a:ext cx="5257800" cy="420624"/>
+          </a:xfrm>
+          <a:prstGeom prst="rect">
+            <a:avLst/>
+          </a:prstGeom>
+          <a:solidFill>
+            <a:srgbClr val="FFFFFF"/>
+          </a:solidFill>
+          <a:ln w="9525">
+            <a:solidFill>
+              <a:srgbClr val="BFBFBF"/>
+            </a:solidFill>
+          </a:ln>
+          <a:effectLst/>
+        </p:spPr>
+        <p:style>
+          <a:lnRef idx="1">
+            <a:schemeClr val="accent1"/>
+          </a:lnRef>
+          <a:fillRef idx="3">
+            <a:schemeClr val="accent1"/>
+          </a:fillRef>
+          <a:effectRef idx="2">
+            <a:schemeClr val="accent1"/>
+          </a:effectRef>
+          <a:fontRef idx="minor">
+            <a:schemeClr val="lt1"/>
+          </a:fontRef>
+        </p:style>
+        <p:txBody>
+          <a:bodyPr rtlCol="0" anchor="ctr"/>
+          <a:lstStyle/>
+          <a:p>
+            <a:pPr algn="ctr"/>
+          </a:p>
+        </p:txBody>
+      </p:sp>
+      <p:sp>
+        <p:nvSpPr>
+          <p:cNvPr id="17433" name="TextBox 17432"/>
+          <p:cNvSpPr txBox="1"/>
+          <p:nvPr/>
+        </p:nvSpPr>
+        <p:spPr>
+          <a:xfrm>
+            <a:off x="6464808" y="2980944"/>
+            <a:ext cx="1828800" cy="329184"/>
+          </a:xfrm>
+          <a:prstGeom prst="rect">
+            <a:avLst/>
+          </a:prstGeom>
+          <a:noFill/>
+        </p:spPr>
+        <p:txBody>
+          <a:bodyPr wrap="square" anchor="t" lIns="0" rIns="0" tIns="0" bIns="0">
+            <a:spAutoFit/>
+          </a:bodyPr>
+          <a:lstStyle/>
+          <a:p>
+            <a:pPr algn="l">
+              <a:lnSpc>
+                <a:spcPct val="105000"/>
+              </a:lnSpc>
+              <a:spcAft>
+                <a:spcPts val="100"/>
+              </a:spcAft>
+            </a:pPr>
+            <a:r>
+              <a:rPr sz="950" b="1">
+                <a:solidFill>
+                  <a:srgbClr val="000000"/>
+                </a:solidFill>
+                <a:latin typeface="Times New Roman"/>
+              </a:rPr>
+              <a:t>Time to block a</a:t>
+            </a:r>
+          </a:p>
+          <a:p>
+            <a:pPr algn="l">
+              <a:lnSpc>
+                <a:spcPct val="105000"/>
+              </a:lnSpc>
+              <a:spcAft>
+                <a:spcPts val="100"/>
+              </a:spcAft>
+            </a:pPr>
+            <a:r>
+              <a:rPr sz="950" b="1">
+                <a:solidFill>
+                  <a:srgbClr val="000000"/>
+                </a:solidFill>
+                <a:latin typeface="Times New Roman"/>
+              </a:rPr>
+              <a:t>revoked holder</a:t>
+            </a:r>
+          </a:p>
+        </p:txBody>
+      </p:sp>
+      <p:sp>
+        <p:nvSpPr>
+          <p:cNvPr id="17434" name="TextBox 17433"/>
+          <p:cNvSpPr txBox="1"/>
+          <p:nvPr/>
+        </p:nvSpPr>
+        <p:spPr>
+          <a:xfrm>
+            <a:off x="8366760" y="2980944"/>
+            <a:ext cx="1600200" cy="329184"/>
+          </a:xfrm>
+          <a:prstGeom prst="rect">
+            <a:avLst/>
+          </a:prstGeom>
+          <a:noFill/>
+        </p:spPr>
+        <p:txBody>
+          <a:bodyPr wrap="square" anchor="t" lIns="0" rIns="0" tIns="0" bIns="0">
+            <a:spAutoFit/>
+          </a:bodyPr>
+          <a:lstStyle/>
+          <a:p>
+            <a:pPr algn="l">
+              <a:lnSpc>
+                <a:spcPct val="105000"/>
+              </a:lnSpc>
+              <a:spcAft>
+                <a:spcPts val="100"/>
+              </a:spcAft>
+            </a:pPr>
+            <a:r>
+              <a:rPr sz="950" b="0">
+                <a:solidFill>
+                  <a:srgbClr val="A61B1B"/>
+                </a:solidFill>
+                <a:latin typeface="Times New Roman"/>
+              </a:rPr>
+              <a:t>Process-dependent</a:t>
+            </a:r>
+          </a:p>
+        </p:txBody>
+      </p:sp>
+      <p:sp>
+        <p:nvSpPr>
+          <p:cNvPr id="17435" name="TextBox 17434"/>
+          <p:cNvSpPr txBox="1"/>
+          <p:nvPr/>
+        </p:nvSpPr>
+        <p:spPr>
+          <a:xfrm>
+            <a:off x="10012680" y="2980944"/>
+            <a:ext cx="1508760" cy="329184"/>
+          </a:xfrm>
+          <a:prstGeom prst="rect">
+            <a:avLst/>
+          </a:prstGeom>
+          <a:noFill/>
+        </p:spPr>
+        <p:txBody>
+          <a:bodyPr wrap="square" anchor="t" lIns="0" rIns="0" tIns="0" bIns="0">
+            <a:spAutoFit/>
+          </a:bodyPr>
+          <a:lstStyle/>
+          <a:p>
+            <a:pPr algn="l">
+              <a:lnSpc>
+                <a:spcPct val="105000"/>
+              </a:lnSpc>
+              <a:spcAft>
+                <a:spcPts val="100"/>
+              </a:spcAft>
+            </a:pPr>
+            <a:r>
+              <a:rPr sz="950" b="0">
+                <a:solidFill>
+                  <a:srgbClr val="1E6B3A"/>
+                </a:solidFill>
+                <a:latin typeface="Times New Roman"/>
+              </a:rPr>
+              <a:t>One transaction</a:t>
+            </a:r>
+          </a:p>
+        </p:txBody>
+      </p:sp>
+      <p:sp>
+        <p:nvSpPr>
+          <p:cNvPr id="17436" name="Rectangle 17435"/>
+          <p:cNvSpPr/>
+          <p:nvPr/>
+        </p:nvSpPr>
+        <p:spPr>
+          <a:xfrm>
+            <a:off x="6355080" y="3346704"/>
+            <a:ext cx="5257800" cy="301752"/>
+          </a:xfrm>
+          <a:prstGeom prst="rect">
+            <a:avLst/>
+          </a:prstGeom>
+          <a:solidFill>
+            <a:srgbClr val="F2F2F2"/>
+          </a:solidFill>
+          <a:ln w="9525">
+            <a:solidFill>
+              <a:srgbClr val="BFBFBF"/>
+            </a:solidFill>
+          </a:ln>
+          <a:effectLst/>
+        </p:spPr>
+        <p:style>
+          <a:lnRef idx="1">
+            <a:schemeClr val="accent1"/>
+          </a:lnRef>
+          <a:fillRef idx="3">
+            <a:schemeClr val="accent1"/>
+          </a:fillRef>
+          <a:effectRef idx="2">
+            <a:schemeClr val="accent1"/>
+          </a:effectRef>
+          <a:fontRef idx="minor">
+            <a:schemeClr val="lt1"/>
+          </a:fontRef>
+        </p:style>
+        <p:txBody>
+          <a:bodyPr rtlCol="0" anchor="ctr"/>
+          <a:lstStyle/>
+          <a:p>
+            <a:pPr algn="ctr"/>
+          </a:p>
+        </p:txBody>
+      </p:sp>
+      <p:sp>
+        <p:nvSpPr>
+          <p:cNvPr id="17437" name="TextBox 17436"/>
+          <p:cNvSpPr txBox="1"/>
+          <p:nvPr/>
+        </p:nvSpPr>
+        <p:spPr>
+          <a:xfrm>
+            <a:off x="6464808" y="3401568"/>
+            <a:ext cx="1828800" cy="210312"/>
+          </a:xfrm>
+          <a:prstGeom prst="rect">
+            <a:avLst/>
+          </a:prstGeom>
+          <a:noFill/>
+        </p:spPr>
+        <p:txBody>
+          <a:bodyPr wrap="square" anchor="t" lIns="0" rIns="0" tIns="0" bIns="0">
+            <a:spAutoFit/>
+          </a:bodyPr>
+          <a:lstStyle/>
+          <a:p>
+            <a:pPr algn="l">
+              <a:lnSpc>
+                <a:spcPct val="105000"/>
+              </a:lnSpc>
+              <a:spcAft>
+                <a:spcPts val="100"/>
+              </a:spcAft>
+            </a:pPr>
+            <a:r>
+              <a:rPr sz="950" b="1">
+                <a:solidFill>
+                  <a:srgbClr val="000000"/>
+                </a:solidFill>
+                <a:latin typeface="Times New Roman"/>
+              </a:rPr>
+              <a:t>Audit evidence</a:t>
+            </a:r>
+          </a:p>
+        </p:txBody>
+      </p:sp>
+      <p:sp>
+        <p:nvSpPr>
+          <p:cNvPr id="17438" name="TextBox 17437"/>
+          <p:cNvSpPr txBox="1"/>
+          <p:nvPr/>
+        </p:nvSpPr>
+        <p:spPr>
+          <a:xfrm>
+            <a:off x="8366760" y="3401568"/>
+            <a:ext cx="1600200" cy="210312"/>
+          </a:xfrm>
+          <a:prstGeom prst="rect">
+            <a:avLst/>
+          </a:prstGeom>
+          <a:noFill/>
+        </p:spPr>
+        <p:txBody>
+          <a:bodyPr wrap="square" anchor="t" lIns="0" rIns="0" tIns="0" bIns="0">
+            <a:spAutoFit/>
+          </a:bodyPr>
+          <a:lstStyle/>
+          <a:p>
+            <a:pPr algn="l">
+              <a:lnSpc>
+                <a:spcPct val="105000"/>
+              </a:lnSpc>
+              <a:spcAft>
+                <a:spcPts val="100"/>
+              </a:spcAft>
+            </a:pPr>
+            <a:r>
+              <a:rPr sz="950" b="0">
+                <a:solidFill>
+                  <a:srgbClr val="A61B1B"/>
+                </a:solidFill>
+                <a:latin typeface="Times New Roman"/>
+              </a:rPr>
+              <a:t>Operator's own copy</a:t>
+            </a:r>
+          </a:p>
+        </p:txBody>
+      </p:sp>
+      <p:sp>
+        <p:nvSpPr>
+          <p:cNvPr id="17439" name="TextBox 17438"/>
+          <p:cNvSpPr txBox="1"/>
+          <p:nvPr/>
+        </p:nvSpPr>
+        <p:spPr>
+          <a:xfrm>
+            <a:off x="10012680" y="3401568"/>
+            <a:ext cx="1508760" cy="210312"/>
+          </a:xfrm>
+          <a:prstGeom prst="rect">
+            <a:avLst/>
+          </a:prstGeom>
+          <a:noFill/>
+        </p:spPr>
+        <p:txBody>
+          <a:bodyPr wrap="square" anchor="t" lIns="0" rIns="0" tIns="0" bIns="0">
+            <a:spAutoFit/>
+          </a:bodyPr>
+          <a:lstStyle/>
+          <a:p>
+            <a:pPr algn="l">
+              <a:lnSpc>
+                <a:spcPct val="105000"/>
+              </a:lnSpc>
+              <a:spcAft>
+                <a:spcPts val="100"/>
+              </a:spcAft>
+            </a:pPr>
+            <a:r>
+              <a:rPr sz="950" b="0">
+                <a:solidFill>
+                  <a:srgbClr val="1E6B3A"/>
+                </a:solidFill>
+                <a:latin typeface="Times New Roman"/>
+              </a:rPr>
+              <a:t>Chain, verifiable by anyone</a:t>
+            </a:r>
+          </a:p>
+        </p:txBody>
+      </p:sp>
+      <p:sp>
+        <p:nvSpPr>
+          <p:cNvPr id="17440" name="Rectangle 17439"/>
+          <p:cNvSpPr/>
+          <p:nvPr/>
+        </p:nvSpPr>
+        <p:spPr>
+          <a:xfrm>
+            <a:off x="6355080" y="3758184"/>
+            <a:ext cx="5257800" cy="658368"/>
+          </a:xfrm>
+          <a:prstGeom prst="rect">
+            <a:avLst/>
+          </a:prstGeom>
+          <a:solidFill>
+            <a:srgbClr val="F2F2F2"/>
+          </a:solidFill>
+          <a:ln w="9525">
+            <a:solidFill>
+              <a:srgbClr val="BFBFBF"/>
+            </a:solidFill>
+          </a:ln>
+          <a:effectLst/>
+        </p:spPr>
+        <p:style>
+          <a:lnRef idx="1">
+            <a:schemeClr val="accent1"/>
+          </a:lnRef>
+          <a:fillRef idx="3">
+            <a:schemeClr val="accent1"/>
+          </a:fillRef>
+          <a:effectRef idx="2">
+            <a:schemeClr val="accent1"/>
+          </a:effectRef>
+          <a:fontRef idx="minor">
+            <a:schemeClr val="lt1"/>
+          </a:fontRef>
+        </p:style>
+        <p:txBody>
+          <a:bodyPr rtlCol="0" anchor="ctr"/>
+          <a:lstStyle/>
+          <a:p>
+            <a:pPr algn="ctr"/>
+          </a:p>
+        </p:txBody>
+      </p:sp>
+      <p:sp>
+        <p:nvSpPr>
+          <p:cNvPr id="17441" name="TextBox 17440"/>
+          <p:cNvSpPr txBox="1"/>
+          <p:nvPr/>
+        </p:nvSpPr>
+        <p:spPr>
+          <a:xfrm>
+            <a:off x="6492240" y="3867912"/>
+            <a:ext cx="4983480" cy="457200"/>
+          </a:xfrm>
+          <a:prstGeom prst="rect">
+            <a:avLst/>
+          </a:prstGeom>
+          <a:noFill/>
+        </p:spPr>
+        <p:txBody>
+          <a:bodyPr wrap="square" anchor="t" lIns="0" rIns="0" tIns="0" bIns="0">
+            <a:spAutoFit/>
+          </a:bodyPr>
+          <a:lstStyle/>
+          <a:p>
+            <a:pPr algn="l">
+              <a:lnSpc>
+                <a:spcPct val="118000"/>
+              </a:lnSpc>
+              <a:spcAft>
+                <a:spcPts val="100"/>
+              </a:spcAft>
+            </a:pPr>
+            <a:r>
+              <a:rPr sz="950" b="0">
+                <a:solidFill>
+                  <a:srgbClr val="5A5751"/>
+                </a:solidFill>
+                <a:latin typeface="Times New Roman"/>
+              </a:rPr>
+              <a:t>The right-hand column states properties the system enforces</a:t>
+            </a:r>
+          </a:p>
+          <a:p>
+            <a:pPr algn="l">
+              <a:lnSpc>
+                <a:spcPct val="118000"/>
+              </a:lnSpc>
+              <a:spcAft>
+                <a:spcPts val="100"/>
+              </a:spcAft>
+            </a:pPr>
+            <a:r>
+              <a:rPr sz="950" b="0">
+                <a:solidFill>
+                  <a:srgbClr val="5A5751"/>
+                </a:solidFill>
+                <a:latin typeface="Times New Roman"/>
+              </a:rPr>
+              <a:t>structurally. They are design guarantees, not measured field results —</a:t>
+            </a:r>
+          </a:p>
+          <a:p>
+            <a:pPr algn="l">
+              <a:lnSpc>
+                <a:spcPct val="118000"/>
+              </a:lnSpc>
+              <a:spcAft>
+                <a:spcPts val="100"/>
+              </a:spcAft>
+            </a:pPr>
+            <a:r>
+              <a:rPr sz="950" b="0">
+                <a:solidFill>
+                  <a:srgbClr val="5A5751"/>
+                </a:solidFill>
+                <a:latin typeface="Times New Roman"/>
+              </a:rPr>
+              <a:t>there is no deployment yet.</a:t>
+            </a:r>
+          </a:p>
+        </p:txBody>
+      </p:sp>
+      <p:sp>
+        <p:nvSpPr>
+          <p:cNvPr id="17442" name="Rectangle 17441"/>
+          <p:cNvSpPr/>
+          <p:nvPr/>
+        </p:nvSpPr>
+        <p:spPr>
+          <a:xfrm>
+            <a:off x="6355080" y="4507992"/>
+            <a:ext cx="5257800" cy="566928"/>
+          </a:xfrm>
+          <a:prstGeom prst="rect">
+            <a:avLst/>
+          </a:prstGeom>
+          <a:solidFill>
+            <a:srgbClr val="E8F3EC"/>
+          </a:solidFill>
+          <a:ln w="9525">
+            <a:solidFill>
+              <a:srgbClr val="1E6B3A"/>
+            </a:solidFill>
+          </a:ln>
+          <a:effectLst/>
+        </p:spPr>
+        <p:style>
+          <a:lnRef idx="1">
+            <a:schemeClr val="accent1"/>
+          </a:lnRef>
+          <a:fillRef idx="3">
+            <a:schemeClr val="accent1"/>
+          </a:fillRef>
+          <a:effectRef idx="2">
+            <a:schemeClr val="accent1"/>
+          </a:effectRef>
+          <a:fontRef idx="minor">
+            <a:schemeClr val="lt1"/>
+          </a:fontRef>
+        </p:style>
+        <p:txBody>
+          <a:bodyPr rtlCol="0" anchor="ctr"/>
+          <a:lstStyle/>
+          <a:p>
+            <a:pPr algn="ctr"/>
+          </a:p>
+        </p:txBody>
+      </p:sp>
+      <p:sp>
+        <p:nvSpPr>
+          <p:cNvPr id="17443" name="TextBox 17442"/>
+          <p:cNvSpPr txBox="1"/>
+          <p:nvPr/>
+        </p:nvSpPr>
+        <p:spPr>
+          <a:xfrm>
+            <a:off x="6492240" y="4617720"/>
+            <a:ext cx="4983480" cy="384048"/>
+          </a:xfrm>
+          <a:prstGeom prst="rect">
+            <a:avLst/>
+          </a:prstGeom>
+          <a:noFill/>
+        </p:spPr>
+        <p:txBody>
+          <a:bodyPr wrap="square" anchor="t" lIns="0" rIns="0" tIns="0" bIns="0">
+            <a:spAutoFit/>
+          </a:bodyPr>
+          <a:lstStyle/>
+          <a:p>
+            <a:pPr algn="l">
+              <a:lnSpc>
+                <a:spcPct val="118000"/>
+              </a:lnSpc>
+              <a:spcAft>
+                <a:spcPts val="100"/>
+              </a:spcAft>
+            </a:pPr>
+            <a:r>
+              <a:rPr sz="950" b="1">
+                <a:solidFill>
+                  <a:srgbClr val="1E6B3A"/>
+                </a:solidFill>
+                <a:latin typeface="Times New Roman"/>
+              </a:rPr>
+              <a:t>Evidenced today: 45 contract tests passing · 3 exploits found in our</a:t>
+            </a:r>
+          </a:p>
+          <a:p>
+            <a:pPr algn="l">
+              <a:lnSpc>
+                <a:spcPct val="118000"/>
+              </a:lnSpc>
+              <a:spcAft>
+                <a:spcPts val="100"/>
+              </a:spcAft>
+            </a:pPr>
+            <a:r>
+              <a:rPr sz="950" b="1">
+                <a:solidFill>
+                  <a:srgbClr val="1E6B3A"/>
+                </a:solidFill>
+                <a:latin typeface="Times New Roman"/>
+              </a:rPr>
+              <a:t>own code and closed · 4 distinct on-chain refusals demonstrated.</a:t>
+            </a:r>
+          </a:p>
+        </p:txBody>
+      </p:sp>
     </p:spTree>
     <p:extLst>
       <p:ext uri="{BB962C8B-B14F-4D97-AF65-F5344CB8AC3E}">
@@ -8360,8 +12685,8 @@
         </p:nvSpPr>
         <p:spPr bwMode="auto">
           <a:xfrm>
-            <a:off x="610000" y="1150000"/>
-            <a:ext cx="9400000" cy="5100000"/>
+            <a:off x="502920" y="1051560"/>
+            <a:ext cx="5532120" cy="4709160"/>
           </a:xfrm>
           <a:prstGeom prst="rect">
             <a:avLst/>
@@ -8398,7 +12723,7 @@
               <a:buNone/>
             </a:pPr>
             <a:r>
-              <a:rPr sz="1600" b="1">
+              <a:rPr sz="1300" b="1">
                 <a:solidFill>
                   <a:srgbClr val="000000"/>
                 </a:solidFill>
@@ -8422,242 +12747,320 @@
             </a:endParaRPr>
           </a:p>
           <a:p>
-            <a:pPr>
-              <a:spcAft>
-                <a:spcPts val="300"/>
-              </a:spcAft>
-            </a:pPr>
-            <a:r>
-              <a:rPr sz="1300">
+            <a:pPr algn="l" indent="0" marL="0">
+              <a:spcBef>
+                <a:spcPts val="600"/>
+              </a:spcBef>
+              <a:spcAft>
+                <a:spcPts val="200"/>
+              </a:spcAft>
+              <a:buNone/>
+            </a:pPr>
+            <a:r>
+              <a:rPr sz="1200" b="1">
+                <a:solidFill>
+                  <a:srgbClr val="1F3064"/>
+                </a:solidFill>
+                <a:latin typeface="Times New Roman"/>
+              </a:rPr>
+              <a:t>Problem evidence</a:t>
+            </a:r>
+          </a:p>
+          <a:p>
+            <a:pPr algn="l" indent="0" marL="0">
+              <a:lnSpc>
+                <a:spcPct val="110000"/>
+              </a:lnSpc>
+              <a:spcAft>
+                <a:spcPts val="200"/>
+              </a:spcAft>
+              <a:buNone/>
+            </a:pPr>
+            <a:r>
+              <a:rPr sz="1050" b="0">
                 <a:solidFill>
                   <a:srgbClr val="000000"/>
                 </a:solidFill>
                 <a:latin typeface="Times New Roman"/>
               </a:rPr>
-              <a:t>•  ERC-721 Non-Fungible Token Standard — </a:t>
-            </a:r>
-            <a:r>
-              <a:rPr sz="1300">
+              <a:t>•  CAG Audit Report No. 10 of 2024 — Ordnance Factory Board inventory management. cag.gov.in</a:t>
+            </a:r>
+          </a:p>
+          <a:p>
+            <a:pPr algn="l" indent="0" marL="0">
+              <a:lnSpc>
+                <a:spcPct val="110000"/>
+              </a:lnSpc>
+              <a:spcAft>
+                <a:spcPts val="200"/>
+              </a:spcAft>
+              <a:buNone/>
+            </a:pPr>
+            <a:r>
+              <a:rPr sz="1050" b="0">
+                <a:solidFill>
+                  <a:srgbClr val="000000"/>
+                </a:solidFill>
+                <a:latin typeface="Times New Roman"/>
+              </a:rPr>
+              <a:t>•  CAG Audit Report No. 34 — Defence Public Sector Undertakings, stores-in-hand. cag.gov.in</a:t>
+            </a:r>
+          </a:p>
+          <a:p>
+            <a:pPr algn="l" indent="0" marL="0">
+              <a:lnSpc>
+                <a:spcPct val="110000"/>
+              </a:lnSpc>
+              <a:spcAft>
+                <a:spcPts val="200"/>
+              </a:spcAft>
+              <a:buNone/>
+            </a:pPr>
+            <a:r>
+              <a:rPr sz="1050" b="0">
+                <a:solidFill>
+                  <a:srgbClr val="000000"/>
+                </a:solidFill>
+                <a:latin typeface="Times New Roman"/>
+              </a:rPr>
+              <a:t>•  IBM Cost of a Data Breach Report 2025 — India. in.newsroom.ibm.com</a:t>
+            </a:r>
+          </a:p>
+          <a:p>
+            <a:pPr algn="l" indent="0" marL="0">
+              <a:lnSpc>
+                <a:spcPct val="110000"/>
+              </a:lnSpc>
+              <a:spcAft>
+                <a:spcPts val="200"/>
+              </a:spcAft>
+              <a:buNone/>
+            </a:pPr>
+            <a:r>
+              <a:rPr sz="1050" b="0">
+                <a:solidFill>
+                  <a:srgbClr val="000000"/>
+                </a:solidFill>
+                <a:latin typeface="Times New Roman"/>
+              </a:rPr>
+              <a:t>•  Verizon Data Breach Investigations Report 2025. verizon.com/business/resources/reports/dbir</a:t>
+            </a:r>
+          </a:p>
+          <a:p>
+            <a:pPr algn="l" indent="0" marL="0">
+              <a:lnSpc>
+                <a:spcPct val="110000"/>
+              </a:lnSpc>
+              <a:spcAft>
+                <a:spcPts val="200"/>
+              </a:spcAft>
+              <a:buNone/>
+            </a:pPr>
+            <a:r>
+              <a:rPr sz="1050" b="0">
+                <a:solidFill>
+                  <a:srgbClr val="000000"/>
+                </a:solidFill>
+                <a:latin typeface="Times New Roman"/>
+              </a:rPr>
+              <a:t>•  USENIX Security Symposium 2025 — former-employee access retention.</a:t>
+            </a:r>
+          </a:p>
+          <a:p>
+            <a:pPr algn="l" indent="0" marL="0">
+              <a:spcBef>
+                <a:spcPts val="700"/>
+              </a:spcBef>
+              <a:spcAft>
+                <a:spcPts val="200"/>
+              </a:spcAft>
+              <a:buNone/>
+            </a:pPr>
+            <a:r>
+              <a:rPr sz="1200" b="1">
                 <a:solidFill>
                   <a:srgbClr val="1F3064"/>
                 </a:solidFill>
                 <a:latin typeface="Times New Roman"/>
               </a:rPr>
-              <a:t>https://eips.ethereum.org/EIPS/eip-721</a:t>
-            </a:r>
-          </a:p>
-          <a:p>
-            <a:pPr>
-              <a:spcAft>
-                <a:spcPts val="300"/>
-              </a:spcAft>
-            </a:pPr>
-            <a:r>
-              <a:rPr sz="1300">
+              <a:t>Technical standards</a:t>
+            </a:r>
+          </a:p>
+          <a:p>
+            <a:pPr algn="l" indent="0" marL="0">
+              <a:lnSpc>
+                <a:spcPct val="110000"/>
+              </a:lnSpc>
+              <a:spcAft>
+                <a:spcPts val="200"/>
+              </a:spcAft>
+              <a:buNone/>
+            </a:pPr>
+            <a:r>
+              <a:rPr sz="1050" b="0">
                 <a:solidFill>
                   <a:srgbClr val="000000"/>
                 </a:solidFill>
                 <a:latin typeface="Times New Roman"/>
               </a:rPr>
-              <a:t>•  EIP-712 Typed Structured Data Hashing and Signing — </a:t>
-            </a:r>
-            <a:r>
-              <a:rPr sz="1300">
+              <a:t>•  ERC-721 Non-Fungible Token Standard — eips.ethereum.org/EIPS/eip-721</a:t>
+            </a:r>
+          </a:p>
+          <a:p>
+            <a:pPr algn="l" indent="0" marL="0">
+              <a:lnSpc>
+                <a:spcPct val="110000"/>
+              </a:lnSpc>
+              <a:spcAft>
+                <a:spcPts val="200"/>
+              </a:spcAft>
+              <a:buNone/>
+            </a:pPr>
+            <a:r>
+              <a:rPr sz="1050" b="0">
+                <a:solidFill>
+                  <a:srgbClr val="000000"/>
+                </a:solidFill>
+                <a:latin typeface="Times New Roman"/>
+              </a:rPr>
+              <a:t>•  EIP-712 Typed Structured Data Hashing and Signing — eips.ethereum.org/EIPS/eip-712</a:t>
+            </a:r>
+          </a:p>
+          <a:p>
+            <a:pPr algn="l" indent="0" marL="0">
+              <a:lnSpc>
+                <a:spcPct val="110000"/>
+              </a:lnSpc>
+              <a:spcAft>
+                <a:spcPts val="200"/>
+              </a:spcAft>
+              <a:buNone/>
+            </a:pPr>
+            <a:r>
+              <a:rPr sz="1050" b="0">
+                <a:solidFill>
+                  <a:srgbClr val="000000"/>
+                </a:solidFill>
+                <a:latin typeface="Times New Roman"/>
+              </a:rPr>
+              <a:t>•  OpenZeppelin Contracts v5 — docs.openzeppelin.com/contracts/5.x</a:t>
+            </a:r>
+          </a:p>
+          <a:p>
+            <a:pPr algn="l" indent="0" marL="0">
+              <a:lnSpc>
+                <a:spcPct val="110000"/>
+              </a:lnSpc>
+              <a:spcAft>
+                <a:spcPts val="200"/>
+              </a:spcAft>
+              <a:buNone/>
+            </a:pPr>
+            <a:r>
+              <a:rPr sz="1050" b="0">
+                <a:solidFill>
+                  <a:srgbClr val="000000"/>
+                </a:solidFill>
+                <a:latin typeface="Times New Roman"/>
+              </a:rPr>
+              <a:t>•  NIST SP 800-63-3 Digital Identity Guidelines — pages.nist.gov/800-63-3</a:t>
+            </a:r>
+          </a:p>
+          <a:p>
+            <a:pPr algn="l" indent="0" marL="0">
+              <a:lnSpc>
+                <a:spcPct val="110000"/>
+              </a:lnSpc>
+              <a:spcAft>
+                <a:spcPts val="200"/>
+              </a:spcAft>
+              <a:buNone/>
+            </a:pPr>
+            <a:r>
+              <a:rPr sz="1050" b="0">
+                <a:solidFill>
+                  <a:srgbClr val="000000"/>
+                </a:solidFill>
+                <a:latin typeface="Times New Roman"/>
+              </a:rPr>
+              <a:t>•  OWASP Smart Contract Top 10 — owasp.org</a:t>
+            </a:r>
+          </a:p>
+          <a:p>
+            <a:pPr algn="l" indent="0" marL="0">
+              <a:lnSpc>
+                <a:spcPct val="110000"/>
+              </a:lnSpc>
+              <a:spcAft>
+                <a:spcPts val="200"/>
+              </a:spcAft>
+              <a:buNone/>
+            </a:pPr>
+            <a:r>
+              <a:rPr sz="1050" b="0">
+                <a:solidFill>
+                  <a:srgbClr val="000000"/>
+                </a:solidFill>
+                <a:latin typeface="Times New Roman"/>
+              </a:rPr>
+              <a:t>•  Hyperledger Besu, permissioned EVM — besu.hyperledger.org</a:t>
+            </a:r>
+          </a:p>
+          <a:p>
+            <a:pPr algn="l" indent="0" marL="0">
+              <a:lnSpc>
+                <a:spcPct val="110000"/>
+              </a:lnSpc>
+              <a:spcAft>
+                <a:spcPts val="200"/>
+              </a:spcAft>
+              <a:buNone/>
+            </a:pPr>
+            <a:r>
+              <a:rPr sz="1050" b="0">
+                <a:solidFill>
+                  <a:srgbClr val="000000"/>
+                </a:solidFill>
+                <a:latin typeface="Times New Roman"/>
+              </a:rPr>
+              <a:t>•  W3C Decentralized Identifiers v1.0 — w3.org/TR/did-core (reviewed, not claimed)</a:t>
+            </a:r>
+          </a:p>
+          <a:p>
+            <a:pPr algn="l" indent="0" marL="0">
+              <a:spcBef>
+                <a:spcPts val="700"/>
+              </a:spcBef>
+              <a:spcAft>
+                <a:spcPts val="200"/>
+              </a:spcAft>
+              <a:buNone/>
+            </a:pPr>
+            <a:r>
+              <a:rPr sz="1200" b="1">
                 <a:solidFill>
                   <a:srgbClr val="1F3064"/>
                 </a:solidFill>
                 <a:latin typeface="Times New Roman"/>
               </a:rPr>
-              <a:t>https://eips.ethereum.org/EIPS/eip-712</a:t>
-            </a:r>
-          </a:p>
-          <a:p>
-            <a:pPr>
-              <a:spcAft>
-                <a:spcPts val="300"/>
-              </a:spcAft>
-            </a:pPr>
-            <a:r>
-              <a:rPr sz="1300">
+              <a:t>Prototype</a:t>
+            </a:r>
+          </a:p>
+          <a:p>
+            <a:pPr algn="l" indent="0" marL="0">
+              <a:spcAft>
+                <a:spcPts val="200"/>
+              </a:spcAft>
+              <a:buNone/>
+            </a:pPr>
+            <a:r>
+              <a:rPr sz="1050" b="0">
                 <a:solidFill>
                   <a:srgbClr val="000000"/>
                 </a:solidFill>
                 <a:latin typeface="Times New Roman"/>
               </a:rPr>
-              <a:t>•  OpenZeppelin Contracts v5 — AccessControl and ERC-721 — </a:t>
-            </a:r>
-            <a:r>
-              <a:rPr sz="1300">
-                <a:solidFill>
-                  <a:srgbClr val="1F3064"/>
-                </a:solidFill>
-                <a:latin typeface="Times New Roman"/>
-              </a:rPr>
-              <a:t>https://docs.openzeppelin.com/contracts/5.x/</a:t>
-            </a:r>
-          </a:p>
-          <a:p>
-            <a:pPr>
-              <a:spcAft>
-                <a:spcPts val="300"/>
-              </a:spcAft>
-            </a:pPr>
-            <a:r>
-              <a:rPr sz="1300">
-                <a:solidFill>
-                  <a:srgbClr val="000000"/>
-                </a:solidFill>
-                <a:latin typeface="Times New Roman"/>
-              </a:rPr>
-              <a:t>•  Solidity Language Documentation and Security Considerations — </a:t>
-            </a:r>
-            <a:r>
-              <a:rPr sz="1300">
-                <a:solidFill>
-                  <a:srgbClr val="1F3064"/>
-                </a:solidFill>
-                <a:latin typeface="Times New Roman"/>
-              </a:rPr>
-              <a:t>https://docs.soliditylang.org</a:t>
-            </a:r>
-          </a:p>
-          <a:p>
-            <a:pPr>
-              <a:spcAft>
-                <a:spcPts val="300"/>
-              </a:spcAft>
-            </a:pPr>
-            <a:r>
-              <a:rPr sz="1300">
-                <a:solidFill>
-                  <a:srgbClr val="000000"/>
-                </a:solidFill>
-                <a:latin typeface="Times New Roman"/>
-              </a:rPr>
-              <a:t>•  NIST SP 800-63-3, Digital Identity Guidelines — </a:t>
-            </a:r>
-            <a:r>
-              <a:rPr sz="1300">
-                <a:solidFill>
-                  <a:srgbClr val="1F3064"/>
-                </a:solidFill>
-                <a:latin typeface="Times New Roman"/>
-              </a:rPr>
-              <a:t>https://pages.nist.gov/800-63-3/</a:t>
-            </a:r>
-          </a:p>
-          <a:p>
-            <a:pPr>
-              <a:spcAft>
-                <a:spcPts val="300"/>
-              </a:spcAft>
-            </a:pPr>
-            <a:r>
-              <a:rPr sz="1300">
-                <a:solidFill>
-                  <a:srgbClr val="000000"/>
-                </a:solidFill>
-                <a:latin typeface="Times New Roman"/>
-              </a:rPr>
-              <a:t>•  OWASP Smart Contract Top 10 — </a:t>
-            </a:r>
-            <a:r>
-              <a:rPr sz="1300">
-                <a:solidFill>
-                  <a:srgbClr val="1F3064"/>
-                </a:solidFill>
-                <a:latin typeface="Times New Roman"/>
-              </a:rPr>
-              <a:t>https://owasp.org/www-project-smart-contract-top-10/</a:t>
-            </a:r>
-          </a:p>
-          <a:p>
-            <a:pPr>
-              <a:spcAft>
-                <a:spcPts val="300"/>
-              </a:spcAft>
-            </a:pPr>
-            <a:r>
-              <a:rPr sz="1300">
-                <a:solidFill>
-                  <a:srgbClr val="000000"/>
-                </a:solidFill>
-                <a:latin typeface="Times New Roman"/>
-              </a:rPr>
-              <a:t>•  Hyperledger Besu — permissioned EVM networks — </a:t>
-            </a:r>
-            <a:r>
-              <a:rPr sz="1300">
-                <a:solidFill>
-                  <a:srgbClr val="1F3064"/>
-                </a:solidFill>
-                <a:latin typeface="Times New Roman"/>
-              </a:rPr>
-              <a:t>https://besu.hyperledger.org</a:t>
-            </a:r>
-          </a:p>
-          <a:p>
-            <a:pPr>
-              <a:spcAft>
-                <a:spcPts val="300"/>
-              </a:spcAft>
-            </a:pPr>
-            <a:r>
-              <a:rPr sz="1300">
-                <a:solidFill>
-                  <a:srgbClr val="000000"/>
-                </a:solidFill>
-                <a:latin typeface="Times New Roman"/>
-              </a:rPr>
-              <a:t>•  W3C Decentralized Identifiers (DID) v1.0 — reviewed for the identity model — </a:t>
-            </a:r>
-            <a:r>
-              <a:rPr sz="1300">
-                <a:solidFill>
-                  <a:srgbClr val="1F3064"/>
-                </a:solidFill>
-                <a:latin typeface="Times New Roman"/>
-              </a:rPr>
-              <a:t>https://www.w3.org/TR/did-core/</a:t>
-            </a:r>
-          </a:p>
-          <a:p>
-            <a:pPr algn="l">
-              <a:spcBef>
-                <a:spcPts val="1000"/>
-              </a:spcBef>
-              <a:spcAft>
-                <a:spcPts val="200"/>
-              </a:spcAft>
-            </a:pPr>
-            <a:r>
-              <a:rPr sz="1600" b="1">
-                <a:solidFill>
-                  <a:srgbClr val="000000"/>
-                </a:solidFill>
-                <a:latin typeface="Times New Roman"/>
-              </a:rPr>
-              <a:t>Prototype repository</a:t>
-            </a:r>
-          </a:p>
-          <a:p>
-            <a:r>
-              <a:rPr sz="1300">
-                <a:solidFill>
-                  <a:srgbClr val="000000"/>
-                </a:solidFill>
-                <a:latin typeface="Times New Roman"/>
-              </a:rPr>
-              <a:t>•  Source code, 45 contract tests, security audit and threat model — </a:t>
-            </a:r>
-            <a:r>
-              <a:rPr sz="1300">
-                <a:solidFill>
-                  <a:srgbClr val="1F3064"/>
-                </a:solidFill>
-                <a:latin typeface="Times New Roman"/>
-              </a:rPr>
-              <a:t>https://github.com/tohraan/chainid-vault</a:t>
+              <a:t>•  Source, tests, security audit and threat model — github.com/tohraan/chainid-vault</a:t>
             </a:r>
           </a:p>
         </p:txBody>
@@ -8865,7 +13268,7 @@
               <a:buNone/>
             </a:pPr>
             <a:r>
-              <a:rPr sz="1100" b="1">
+              <a:rPr sz="1000" b="1">
                 <a:solidFill>
                   <a:srgbClr val="1F3064"/>
                 </a:solidFill>
@@ -8907,6 +13310,597 @@
           </a:prstGeom>
         </p:spPr>
       </p:pic>
+      <p:sp>
+        <p:nvSpPr>
+          <p:cNvPr id="17411" name="TextBox 17410"/>
+          <p:cNvSpPr txBox="1"/>
+          <p:nvPr/>
+        </p:nvSpPr>
+        <p:spPr>
+          <a:xfrm>
+            <a:off x="6355080" y="1051560"/>
+            <a:ext cx="5257800" cy="201168"/>
+          </a:xfrm>
+          <a:prstGeom prst="rect">
+            <a:avLst/>
+          </a:prstGeom>
+          <a:noFill/>
+        </p:spPr>
+        <p:txBody>
+          <a:bodyPr wrap="square" anchor="t" lIns="0" rIns="0" tIns="0" bIns="0">
+            <a:spAutoFit/>
+          </a:bodyPr>
+          <a:lstStyle/>
+          <a:p>
+            <a:pPr algn="l">
+              <a:spcAft>
+                <a:spcPts val="100"/>
+              </a:spcAft>
+            </a:pPr>
+            <a:r>
+              <a:rPr sz="1000" b="1">
+                <a:solidFill>
+                  <a:srgbClr val="1F3064"/>
+                </a:solidFill>
+                <a:latin typeface="Times New Roman"/>
+              </a:rPr>
+              <a:t>THE NUMBER THIS IS BUILT ON</a:t>
+            </a:r>
+          </a:p>
+        </p:txBody>
+      </p:sp>
+      <p:sp>
+        <p:nvSpPr>
+          <p:cNvPr id="17412" name="Rectangle 17411"/>
+          <p:cNvSpPr/>
+          <p:nvPr/>
+        </p:nvSpPr>
+        <p:spPr>
+          <a:xfrm>
+            <a:off x="6355080" y="1325880"/>
+            <a:ext cx="5257800" cy="1600200"/>
+          </a:xfrm>
+          <a:prstGeom prst="rect">
+            <a:avLst/>
+          </a:prstGeom>
+          <a:solidFill>
+            <a:srgbClr val="1F3064"/>
+          </a:solidFill>
+          <a:ln>
+            <a:noFill/>
+          </a:ln>
+          <a:effectLst/>
+        </p:spPr>
+        <p:style>
+          <a:lnRef idx="1">
+            <a:schemeClr val="accent1"/>
+          </a:lnRef>
+          <a:fillRef idx="3">
+            <a:schemeClr val="accent1"/>
+          </a:fillRef>
+          <a:effectRef idx="2">
+            <a:schemeClr val="accent1"/>
+          </a:effectRef>
+          <a:fontRef idx="minor">
+            <a:schemeClr val="lt1"/>
+          </a:fontRef>
+        </p:style>
+        <p:txBody>
+          <a:bodyPr rtlCol="0" anchor="ctr"/>
+          <a:lstStyle/>
+          <a:p>
+            <a:pPr algn="ctr"/>
+          </a:p>
+        </p:txBody>
+      </p:sp>
+      <p:sp>
+        <p:nvSpPr>
+          <p:cNvPr id="17413" name="TextBox 17412"/>
+          <p:cNvSpPr txBox="1"/>
+          <p:nvPr/>
+        </p:nvSpPr>
+        <p:spPr>
+          <a:xfrm>
+            <a:off x="6355080" y="1508760"/>
+            <a:ext cx="5257800" cy="685800"/>
+          </a:xfrm>
+          <a:prstGeom prst="rect">
+            <a:avLst/>
+          </a:prstGeom>
+          <a:noFill/>
+        </p:spPr>
+        <p:txBody>
+          <a:bodyPr wrap="square" anchor="t" lIns="0" rIns="0" tIns="0" bIns="0">
+            <a:spAutoFit/>
+          </a:bodyPr>
+          <a:lstStyle/>
+          <a:p>
+            <a:pPr algn="ctr">
+              <a:spcAft>
+                <a:spcPts val="100"/>
+              </a:spcAft>
+            </a:pPr>
+            <a:r>
+              <a:rPr sz="4000" b="1">
+                <a:solidFill>
+                  <a:srgbClr val="FFFFFF"/>
+                </a:solidFill>
+                <a:latin typeface="Times New Roman"/>
+              </a:rPr>
+              <a:t>₹1,237 crore</a:t>
+            </a:r>
+          </a:p>
+        </p:txBody>
+      </p:sp>
+      <p:sp>
+        <p:nvSpPr>
+          <p:cNvPr id="17414" name="TextBox 17413"/>
+          <p:cNvSpPr txBox="1"/>
+          <p:nvPr/>
+        </p:nvSpPr>
+        <p:spPr>
+          <a:xfrm>
+            <a:off x="6629400" y="2258568"/>
+            <a:ext cx="4709160" cy="548640"/>
+          </a:xfrm>
+          <a:prstGeom prst="rect">
+            <a:avLst/>
+          </a:prstGeom>
+          <a:noFill/>
+        </p:spPr>
+        <p:txBody>
+          <a:bodyPr wrap="square" anchor="t" lIns="0" rIns="0" tIns="0" bIns="0">
+            <a:spAutoFit/>
+          </a:bodyPr>
+          <a:lstStyle/>
+          <a:p>
+            <a:pPr algn="ctr">
+              <a:lnSpc>
+                <a:spcPct val="118000"/>
+              </a:lnSpc>
+              <a:spcAft>
+                <a:spcPts val="100"/>
+              </a:spcAft>
+            </a:pPr>
+            <a:r>
+              <a:rPr sz="1150" b="0">
+                <a:solidFill>
+                  <a:srgbClr val="C8CEDC"/>
+                </a:solidFill>
+                <a:latin typeface="Times New Roman"/>
+              </a:rPr>
+              <a:t>of non-active stores at the Ordnance Factory Board —</a:t>
+            </a:r>
+          </a:p>
+          <a:p>
+            <a:pPr algn="ctr">
+              <a:lnSpc>
+                <a:spcPct val="118000"/>
+              </a:lnSpc>
+              <a:spcAft>
+                <a:spcPts val="100"/>
+              </a:spcAft>
+            </a:pPr>
+            <a:r>
+              <a:rPr sz="1150" b="0">
+                <a:solidFill>
+                  <a:srgbClr val="C8CEDC"/>
+                </a:solidFill>
+                <a:latin typeface="Times New Roman"/>
+              </a:rPr>
+              <a:t>stock the system could not reconcile.</a:t>
+            </a:r>
+          </a:p>
+        </p:txBody>
+      </p:sp>
+      <p:sp>
+        <p:nvSpPr>
+          <p:cNvPr id="17415" name="TextBox 17414"/>
+          <p:cNvSpPr txBox="1"/>
+          <p:nvPr/>
+        </p:nvSpPr>
+        <p:spPr>
+          <a:xfrm>
+            <a:off x="6355080" y="2990088"/>
+            <a:ext cx="5257800" cy="228600"/>
+          </a:xfrm>
+          <a:prstGeom prst="rect">
+            <a:avLst/>
+          </a:prstGeom>
+          <a:noFill/>
+        </p:spPr>
+        <p:txBody>
+          <a:bodyPr wrap="square" anchor="t" lIns="0" rIns="0" tIns="0" bIns="0">
+            <a:spAutoFit/>
+          </a:bodyPr>
+          <a:lstStyle/>
+          <a:p>
+            <a:pPr algn="ctr">
+              <a:spcAft>
+                <a:spcPts val="100"/>
+              </a:spcAft>
+            </a:pPr>
+            <a:r>
+              <a:rPr sz="950" b="0">
+                <a:solidFill>
+                  <a:srgbClr val="5A5751"/>
+                </a:solidFill>
+                <a:latin typeface="Times New Roman"/>
+              </a:rPr>
+              <a:t>CAG Audit Report No. 10 of 2024, Government of India</a:t>
+            </a:r>
+          </a:p>
+        </p:txBody>
+      </p:sp>
+      <p:sp>
+        <p:nvSpPr>
+          <p:cNvPr id="17416" name="Rectangle 17415"/>
+          <p:cNvSpPr/>
+          <p:nvPr/>
+        </p:nvSpPr>
+        <p:spPr>
+          <a:xfrm>
+            <a:off x="6355080" y="3383279"/>
+            <a:ext cx="5257800" cy="1051560"/>
+          </a:xfrm>
+          <a:prstGeom prst="rect">
+            <a:avLst/>
+          </a:prstGeom>
+          <a:solidFill>
+            <a:srgbClr val="FFFFFF"/>
+          </a:solidFill>
+          <a:ln w="9525">
+            <a:solidFill>
+              <a:srgbClr val="BFBFBF"/>
+            </a:solidFill>
+          </a:ln>
+          <a:effectLst/>
+        </p:spPr>
+        <p:style>
+          <a:lnRef idx="1">
+            <a:schemeClr val="accent1"/>
+          </a:lnRef>
+          <a:fillRef idx="3">
+            <a:schemeClr val="accent1"/>
+          </a:fillRef>
+          <a:effectRef idx="2">
+            <a:schemeClr val="accent1"/>
+          </a:effectRef>
+          <a:fontRef idx="minor">
+            <a:schemeClr val="lt1"/>
+          </a:fontRef>
+        </p:style>
+        <p:txBody>
+          <a:bodyPr rtlCol="0" anchor="ctr"/>
+          <a:lstStyle/>
+          <a:p>
+            <a:pPr algn="ctr"/>
+          </a:p>
+        </p:txBody>
+      </p:sp>
+      <p:sp>
+        <p:nvSpPr>
+          <p:cNvPr id="17417" name="TextBox 17416"/>
+          <p:cNvSpPr txBox="1"/>
+          <p:nvPr/>
+        </p:nvSpPr>
+        <p:spPr>
+          <a:xfrm>
+            <a:off x="6537960" y="3502152"/>
+            <a:ext cx="4892040" cy="201168"/>
+          </a:xfrm>
+          <a:prstGeom prst="rect">
+            <a:avLst/>
+          </a:prstGeom>
+          <a:noFill/>
+        </p:spPr>
+        <p:txBody>
+          <a:bodyPr wrap="square" anchor="t" lIns="0" rIns="0" tIns="0" bIns="0">
+            <a:spAutoFit/>
+          </a:bodyPr>
+          <a:lstStyle/>
+          <a:p>
+            <a:pPr algn="l">
+              <a:spcAft>
+                <a:spcPts val="100"/>
+              </a:spcAft>
+            </a:pPr>
+            <a:r>
+              <a:rPr sz="1000" b="1">
+                <a:solidFill>
+                  <a:srgbClr val="A61B1B"/>
+                </a:solidFill>
+                <a:latin typeface="Times New Roman"/>
+              </a:rPr>
+              <a:t>AND THE SAME FAILURE, TWO YEARS LATER</a:t>
+            </a:r>
+          </a:p>
+        </p:txBody>
+      </p:sp>
+      <p:sp>
+        <p:nvSpPr>
+          <p:cNvPr id="17418" name="TextBox 17417"/>
+          <p:cNvSpPr txBox="1"/>
+          <p:nvPr/>
+        </p:nvSpPr>
+        <p:spPr>
+          <a:xfrm>
+            <a:off x="6355080" y="3749039"/>
+            <a:ext cx="5257800" cy="411480"/>
+          </a:xfrm>
+          <a:prstGeom prst="rect">
+            <a:avLst/>
+          </a:prstGeom>
+          <a:noFill/>
+        </p:spPr>
+        <p:txBody>
+          <a:bodyPr wrap="square" anchor="t" lIns="0" rIns="0" tIns="0" bIns="0">
+            <a:spAutoFit/>
+          </a:bodyPr>
+          <a:lstStyle/>
+          <a:p>
+            <a:pPr algn="ctr">
+              <a:spcAft>
+                <a:spcPts val="100"/>
+              </a:spcAft>
+            </a:pPr>
+            <a:r>
+              <a:rPr sz="2200" b="1">
+                <a:solidFill>
+                  <a:srgbClr val="A61B1B"/>
+                </a:solidFill>
+                <a:latin typeface="Times New Roman"/>
+              </a:rPr>
+              <a:t>21%  ·  ₹330 crore</a:t>
+            </a:r>
+          </a:p>
+        </p:txBody>
+      </p:sp>
+      <p:sp>
+        <p:nvSpPr>
+          <p:cNvPr id="17419" name="TextBox 17418"/>
+          <p:cNvSpPr txBox="1"/>
+          <p:nvPr/>
+        </p:nvSpPr>
+        <p:spPr>
+          <a:xfrm>
+            <a:off x="6537960" y="4160520"/>
+            <a:ext cx="4892040" cy="228600"/>
+          </a:xfrm>
+          <a:prstGeom prst="rect">
+            <a:avLst/>
+          </a:prstGeom>
+          <a:noFill/>
+        </p:spPr>
+        <p:txBody>
+          <a:bodyPr wrap="square" anchor="t" lIns="0" rIns="0" tIns="0" bIns="0">
+            <a:spAutoFit/>
+          </a:bodyPr>
+          <a:lstStyle/>
+          <a:p>
+            <a:pPr algn="ctr">
+              <a:lnSpc>
+                <a:spcPct val="115000"/>
+              </a:lnSpc>
+              <a:spcAft>
+                <a:spcPts val="100"/>
+              </a:spcAft>
+            </a:pPr>
+            <a:r>
+              <a:rPr sz="950" b="0">
+                <a:solidFill>
+                  <a:srgbClr val="5A5751"/>
+                </a:solidFill>
+                <a:latin typeface="Times New Roman"/>
+              </a:rPr>
+              <a:t>of stores-in-hand still non-active, four sampled factories,</a:t>
+            </a:r>
+          </a:p>
+          <a:p>
+            <a:pPr algn="ctr">
+              <a:lnSpc>
+                <a:spcPct val="115000"/>
+              </a:lnSpc>
+              <a:spcAft>
+                <a:spcPts val="100"/>
+              </a:spcAft>
+            </a:pPr>
+            <a:r>
+              <a:rPr sz="950" b="0">
+                <a:solidFill>
+                  <a:srgbClr val="5A5751"/>
+                </a:solidFill>
+                <a:latin typeface="Times New Roman"/>
+              </a:rPr>
+              <a:t>31 March 2023 — CAG Report No. 34</a:t>
+            </a:r>
+          </a:p>
+        </p:txBody>
+      </p:sp>
+      <p:sp>
+        <p:nvSpPr>
+          <p:cNvPr id="17420" name="Rectangle 17419"/>
+          <p:cNvSpPr/>
+          <p:nvPr/>
+        </p:nvSpPr>
+        <p:spPr>
+          <a:xfrm>
+            <a:off x="6355080" y="4572000"/>
+            <a:ext cx="5257800" cy="1170432"/>
+          </a:xfrm>
+          <a:prstGeom prst="rect">
+            <a:avLst/>
+          </a:prstGeom>
+          <a:solidFill>
+            <a:srgbClr val="F2F2F2"/>
+          </a:solidFill>
+          <a:ln w="9525">
+            <a:solidFill>
+              <a:srgbClr val="BFBFBF"/>
+            </a:solidFill>
+          </a:ln>
+          <a:effectLst/>
+        </p:spPr>
+        <p:style>
+          <a:lnRef idx="1">
+            <a:schemeClr val="accent1"/>
+          </a:lnRef>
+          <a:fillRef idx="3">
+            <a:schemeClr val="accent1"/>
+          </a:fillRef>
+          <a:effectRef idx="2">
+            <a:schemeClr val="accent1"/>
+          </a:effectRef>
+          <a:fontRef idx="minor">
+            <a:schemeClr val="lt1"/>
+          </a:fontRef>
+        </p:style>
+        <p:txBody>
+          <a:bodyPr rtlCol="0" anchor="ctr"/>
+          <a:lstStyle/>
+          <a:p>
+            <a:pPr algn="ctr"/>
+          </a:p>
+        </p:txBody>
+      </p:sp>
+      <p:sp>
+        <p:nvSpPr>
+          <p:cNvPr id="17421" name="TextBox 17420"/>
+          <p:cNvSpPr txBox="1"/>
+          <p:nvPr/>
+        </p:nvSpPr>
+        <p:spPr>
+          <a:xfrm>
+            <a:off x="6537960" y="4690872"/>
+            <a:ext cx="4892040" cy="201168"/>
+          </a:xfrm>
+          <a:prstGeom prst="rect">
+            <a:avLst/>
+          </a:prstGeom>
+          <a:noFill/>
+        </p:spPr>
+        <p:txBody>
+          <a:bodyPr wrap="square" anchor="t" lIns="0" rIns="0" tIns="0" bIns="0">
+            <a:spAutoFit/>
+          </a:bodyPr>
+          <a:lstStyle/>
+          <a:p>
+            <a:pPr algn="l">
+              <a:spcAft>
+                <a:spcPts val="100"/>
+              </a:spcAft>
+            </a:pPr>
+            <a:r>
+              <a:rPr sz="1000" b="1">
+                <a:solidFill>
+                  <a:srgbClr val="1F3064"/>
+                </a:solidFill>
+                <a:latin typeface="Times New Roman"/>
+              </a:rPr>
+              <a:t>WHAT WE DO NOT CLAIM</a:t>
+            </a:r>
+          </a:p>
+        </p:txBody>
+      </p:sp>
+      <p:sp>
+        <p:nvSpPr>
+          <p:cNvPr id="17422" name="TextBox 17421"/>
+          <p:cNvSpPr txBox="1"/>
+          <p:nvPr/>
+        </p:nvSpPr>
+        <p:spPr>
+          <a:xfrm>
+            <a:off x="6537960" y="4928616"/>
+            <a:ext cx="4892040" cy="731520"/>
+          </a:xfrm>
+          <a:prstGeom prst="rect">
+            <a:avLst/>
+          </a:prstGeom>
+          <a:noFill/>
+        </p:spPr>
+        <p:txBody>
+          <a:bodyPr wrap="square" anchor="t" lIns="0" rIns="0" tIns="0" bIns="0">
+            <a:spAutoFit/>
+          </a:bodyPr>
+          <a:lstStyle/>
+          <a:p>
+            <a:pPr algn="l">
+              <a:lnSpc>
+                <a:spcPct val="118000"/>
+              </a:lnSpc>
+              <a:spcAft>
+                <a:spcPts val="100"/>
+              </a:spcAft>
+            </a:pPr>
+            <a:r>
+              <a:rPr sz="1000" b="0">
+                <a:solidFill>
+                  <a:srgbClr val="000000"/>
+                </a:solidFill>
+                <a:latin typeface="Times New Roman"/>
+              </a:rPr>
+              <a:t>We have not deployed and cannot claim field results. Every figure</a:t>
+            </a:r>
+          </a:p>
+          <a:p>
+            <a:pPr algn="l">
+              <a:lnSpc>
+                <a:spcPct val="118000"/>
+              </a:lnSpc>
+              <a:spcAft>
+                <a:spcPts val="100"/>
+              </a:spcAft>
+            </a:pPr>
+            <a:r>
+              <a:rPr sz="1000" b="0">
+                <a:solidFill>
+                  <a:srgbClr val="000000"/>
+                </a:solidFill>
+                <a:latin typeface="Times New Roman"/>
+              </a:rPr>
+              <a:t>above is the documented problem, not our measured effect. What we</a:t>
+            </a:r>
+          </a:p>
+          <a:p>
+            <a:pPr algn="l">
+              <a:lnSpc>
+                <a:spcPct val="118000"/>
+              </a:lnSpc>
+              <a:spcAft>
+                <a:spcPts val="100"/>
+              </a:spcAft>
+            </a:pPr>
+            <a:r>
+              <a:rPr sz="1000" b="0">
+                <a:solidFill>
+                  <a:srgbClr val="000000"/>
+                </a:solidFill>
+                <a:latin typeface="Times New Roman"/>
+              </a:rPr>
+              <a:t>can evidence is a working prototype, 45 passing tests, and three</a:t>
+            </a:r>
+          </a:p>
+          <a:p>
+            <a:pPr algn="l">
+              <a:lnSpc>
+                <a:spcPct val="118000"/>
+              </a:lnSpc>
+              <a:spcAft>
+                <a:spcPts val="100"/>
+              </a:spcAft>
+            </a:pPr>
+            <a:r>
+              <a:rPr sz="1000" b="0">
+                <a:solidFill>
+                  <a:srgbClr val="000000"/>
+                </a:solidFill>
+                <a:latin typeface="Times New Roman"/>
+              </a:rPr>
+              <a:t>exploits found in our own code and closed.</a:t>
+            </a:r>
+          </a:p>
+        </p:txBody>
+      </p:sp>
     </p:spTree>
     <p:extLst>
       <p:ext uri="{BB962C8B-B14F-4D97-AF65-F5344CB8AC3E}">
